--- a/deliverables/Slides/Production-Control-Tower.pptx
+++ b/deliverables/Slides/Production-Control-Tower.pptx
@@ -4,6 +4,9 @@
   <p:sldMasterIdLst>
     <p:sldMasterId id="2147483648" r:id="rId1"/>
   </p:sldMasterIdLst>
+  <p:notesMasterIdLst>
+    <p:notesMasterId r:id="rId17"/>
+  </p:notesMasterIdLst>
   <p:sldIdLst>
     <p:sldId id="256" r:id="rId2"/>
     <p:sldId id="257" r:id="rId3"/>
@@ -21,11 +24,8 @@
     <p:sldId id="269" r:id="rId15"/>
     <p:sldId id="270" r:id="rId16"/>
   </p:sldIdLst>
-  <p:notesMasterIdLst>
-    <p:notesMasterId r:id="rId17"/>
-  </p:notesMasterIdLst>
-  <p:sldSz cx="12191695" cy="6858000"/>
-  <p:notesSz cx="6858000" cy="12191695"/>
+  <p:sldSz cx="12192000" cy="6858000"/>
+  <p:notesSz cx="6858000" cy="12192000"/>
   <p:defaultTextStyle>
     <a:lvl1pPr marL="0" algn="l" defTabSz="914400" rtl="0" eaLnBrk="1" latinLnBrk="0" hangingPunct="1">
       <a:defRPr sz="1800" kern="1200">
@@ -118,6 +118,11 @@
       </a:defRPr>
     </a:lvl9pPr>
   </p:defaultTextStyle>
+  <p:extLst>
+    <p:ext uri="{EFAFB233-063F-42B5-8137-9DF3F51BA10A}">
+      <p15:sldGuideLst xmlns:p15="http://schemas.microsoft.com/office/powerpoint/2012/main"/>
+    </p:ext>
+  </p:extLst>
 </p:presentation>
 </file>
 
@@ -143,241 +148,17 @@
           <a:chExt cx="0" cy="0"/>
         </a:xfrm>
       </p:grpSpPr>
-      <p:sp>
-        <p:nvSpPr>
-          <p:cNvPr id="2" name="Header Placeholder 1"/>
-          <p:cNvSpPr>
-            <a:spLocks noGrp="1"/>
-          </p:cNvSpPr>
-          <p:nvPr>
-            <p:ph type="hdr" sz="quarter"/>
-          </p:nvPr>
-        </p:nvSpPr>
-        <p:spPr>
-          <a:xfrm>
-            <a:off x="0" y="0"/>
-            <a:ext cx="2971800" cy="458788"/>
-          </a:xfrm>
-          <a:prstGeom prst="rect">
-            <a:avLst/>
-          </a:prstGeom>
-        </p:spPr>
-        <p:txBody>
-          <a:bodyPr vert="horz" lIns="91440" tIns="45720" rIns="91440" bIns="45720" rtlCol="0"/>
-          <a:lstStyle>
-            <a:lvl1pPr algn="l">
-              <a:defRPr sz="1200"/>
-            </a:lvl1pPr>
-          </a:lstStyle>
-          <a:p>
-            <a:endParaRPr lang="en-US"/>
-          </a:p>
-        </p:txBody>
-      </p:sp>
-      <p:sp>
-        <p:nvSpPr>
-          <p:cNvPr id="3" name="Date Placeholder 2"/>
-          <p:cNvSpPr>
-            <a:spLocks noGrp="1"/>
-          </p:cNvSpPr>
-          <p:nvPr>
-            <p:ph type="dt" idx="1"/>
-          </p:nvPr>
-        </p:nvSpPr>
-        <p:spPr>
-          <a:xfrm>
-            <a:off x="3884613" y="0"/>
-            <a:ext cx="2971800" cy="458788"/>
-          </a:xfrm>
-          <a:prstGeom prst="rect">
-            <a:avLst/>
-          </a:prstGeom>
-        </p:spPr>
-        <p:txBody>
-          <a:bodyPr vert="horz" lIns="91440" tIns="45720" rIns="91440" bIns="45720" rtlCol="0"/>
-          <a:lstStyle>
-            <a:lvl1pPr algn="r">
-              <a:defRPr sz="1200"/>
-            </a:lvl1pPr>
-          </a:lstStyle>
-          <a:p>
-            <a:fld id="{5282F153-3F37-0F45-9E97-73ACFA13230C}" type="datetimeFigureOut">
-              <a:rPr lang="en-US"/>
-              <a:t>7/23/19</a:t>
-            </a:fld>
-            <a:endParaRPr lang="en-US"/>
-          </a:p>
-        </p:txBody>
-      </p:sp>
-      <p:sp>
-        <p:nvSpPr>
-          <p:cNvPr id="4" name="Slide Image Placeholder 3"/>
-          <p:cNvSpPr>
-            <a:spLocks noGrp="1" noRot="1" noChangeAspect="1"/>
-          </p:cNvSpPr>
-          <p:nvPr>
-            <p:ph type="sldImg" idx="2"/>
-          </p:nvPr>
-        </p:nvSpPr>
-        <p:spPr>
-          <a:xfrm>
-            <a:off x="685800" y="1143000"/>
-            <a:ext cx="5486400" cy="3086100"/>
-          </a:xfrm>
-          <a:prstGeom prst="rect">
-            <a:avLst/>
-          </a:prstGeom>
-          <a:noFill/>
-          <a:ln w="12700">
-            <a:solidFill>
-              <a:prstClr val="black"/>
-            </a:solidFill>
-          </a:ln>
-        </p:spPr>
-        <p:txBody>
-          <a:bodyPr vert="horz" lIns="91440" tIns="45720" rIns="91440" bIns="45720" rtlCol="0" anchor="ctr"/>
-          <a:lstStyle/>
-          <a:p>
-            <a:endParaRPr lang="en-US"/>
-          </a:p>
-        </p:txBody>
-      </p:sp>
-      <p:sp>
-        <p:nvSpPr>
-          <p:cNvPr id="5" name="Notes Placeholder 4"/>
-          <p:cNvSpPr>
-            <a:spLocks noGrp="1"/>
-          </p:cNvSpPr>
-          <p:nvPr>
-            <p:ph type="body" sz="quarter" idx="3"/>
-          </p:nvPr>
-        </p:nvSpPr>
-        <p:spPr>
-          <a:xfrm>
-            <a:off x="685800" y="4400550"/>
-            <a:ext cx="5486400" cy="3600450"/>
-          </a:xfrm>
-          <a:prstGeom prst="rect">
-            <a:avLst/>
-          </a:prstGeom>
-        </p:spPr>
-        <p:txBody>
-          <a:bodyPr vert="horz" lIns="91440" tIns="45720" rIns="91440" bIns="45720" rtlCol="0"/>
-          <a:lstStyle/>
-          <a:p>
-            <a:pPr lvl="0"/>
-            <a:r>
-              <a:rPr lang="en-US"/>
-              <a:t>Click to edit Master text styles</a:t>
-            </a:r>
-          </a:p>
-          <a:p>
-            <a:pPr lvl="1"/>
-            <a:r>
-              <a:rPr lang="en-US"/>
-              <a:t>Second level</a:t>
-            </a:r>
-          </a:p>
-          <a:p>
-            <a:pPr lvl="2"/>
-            <a:r>
-              <a:rPr lang="en-US"/>
-              <a:t>Third level</a:t>
-            </a:r>
-          </a:p>
-          <a:p>
-            <a:pPr lvl="3"/>
-            <a:r>
-              <a:rPr lang="en-US"/>
-              <a:t>Fourth level</a:t>
-            </a:r>
-          </a:p>
-          <a:p>
-            <a:pPr lvl="4"/>
-            <a:r>
-              <a:rPr lang="en-US"/>
-              <a:t>Fifth level</a:t>
-            </a:r>
-          </a:p>
-        </p:txBody>
-      </p:sp>
-      <p:sp>
-        <p:nvSpPr>
-          <p:cNvPr id="6" name="Footer Placeholder 5"/>
-          <p:cNvSpPr>
-            <a:spLocks noGrp="1"/>
-          </p:cNvSpPr>
-          <p:nvPr>
-            <p:ph type="ftr" sz="quarter" idx="4"/>
-          </p:nvPr>
-        </p:nvSpPr>
-        <p:spPr>
-          <a:xfrm>
-            <a:off x="0" y="8685213"/>
-            <a:ext cx="2971800" cy="458787"/>
-          </a:xfrm>
-          <a:prstGeom prst="rect">
-            <a:avLst/>
-          </a:prstGeom>
-        </p:spPr>
-        <p:txBody>
-          <a:bodyPr vert="horz" lIns="91440" tIns="45720" rIns="91440" bIns="45720" rtlCol="0" anchor="b"/>
-          <a:lstStyle>
-            <a:lvl1pPr algn="l">
-              <a:defRPr sz="1200"/>
-            </a:lvl1pPr>
-          </a:lstStyle>
-          <a:p>
-            <a:endParaRPr lang="en-US"/>
-          </a:p>
-        </p:txBody>
-      </p:sp>
-      <p:sp>
-        <p:nvSpPr>
-          <p:cNvPr id="7" name="Slide Number Placeholder 6"/>
-          <p:cNvSpPr>
-            <a:spLocks noGrp="1"/>
-          </p:cNvSpPr>
-          <p:nvPr>
-            <p:ph type="sldNum" sz="quarter" idx="5"/>
-          </p:nvPr>
-        </p:nvSpPr>
-        <p:spPr>
-          <a:xfrm>
-            <a:off x="3884613" y="8685213"/>
-            <a:ext cx="2971800" cy="458787"/>
-          </a:xfrm>
-          <a:prstGeom prst="rect">
-            <a:avLst/>
-          </a:prstGeom>
-        </p:spPr>
-        <p:txBody>
-          <a:bodyPr vert="horz" lIns="91440" tIns="45720" rIns="91440" bIns="45720" rtlCol="0" anchor="b"/>
-          <a:lstStyle>
-            <a:lvl1pPr algn="r">
-              <a:defRPr sz="1200"/>
-            </a:lvl1pPr>
-          </a:lstStyle>
-          <a:p>
-            <a:fld id="{CE5E9CC1-C706-0F49-92D6-E571CC5EEA8F}" type="slidenum">
-              <a:rPr lang="en-US"/>
-              <a:t>‹#›</a:t>
-            </a:fld>
-            <a:endParaRPr lang="en-US"/>
-          </a:p>
-        </p:txBody>
-      </p:sp>
     </p:spTree>
     <p:extLst>
       <p:ext uri="{BB962C8B-B14F-4D97-AF65-F5344CB8AC3E}">
-        <p14:creationId xmlns:p14="http://schemas.microsoft.com/office/powerpoint/2010/main" val="1024086991"/>
+        <p14:creationId xmlns:p14="http://schemas.microsoft.com/office/powerpoint/2010/main" val="2915931631"/>
       </p:ext>
     </p:extLst>
   </p:cSld>
   <p:clrMap bg1="lt1" tx1="dk1" bg2="lt2" tx2="dk2" accent1="accent1" accent2="accent2" accent3="accent3" accent4="accent4" accent5="accent5" accent6="accent6" hlink="hlink" folHlink="folHlink"/>
   <p:notesStyle>
     <a:lvl1pPr marL="0" algn="l" defTabSz="914400" rtl="0" eaLnBrk="1" latinLnBrk="0" hangingPunct="1">
-      <a:defRPr sz="1200" kern="1200">
+      <a:defRPr sz="1800" kern="1200">
         <a:solidFill>
           <a:schemeClr val="tx1"/>
         </a:solidFill>
@@ -387,7 +168,7 @@
       </a:defRPr>
     </a:lvl1pPr>
     <a:lvl2pPr marL="457200" algn="l" defTabSz="914400" rtl="0" eaLnBrk="1" latinLnBrk="0" hangingPunct="1">
-      <a:defRPr sz="1200" kern="1200">
+      <a:defRPr sz="1800" kern="1200">
         <a:solidFill>
           <a:schemeClr val="tx1"/>
         </a:solidFill>
@@ -397,7 +178,7 @@
       </a:defRPr>
     </a:lvl2pPr>
     <a:lvl3pPr marL="914400" algn="l" defTabSz="914400" rtl="0" eaLnBrk="1" latinLnBrk="0" hangingPunct="1">
-      <a:defRPr sz="1200" kern="1200">
+      <a:defRPr sz="1800" kern="1200">
         <a:solidFill>
           <a:schemeClr val="tx1"/>
         </a:solidFill>
@@ -407,7 +188,7 @@
       </a:defRPr>
     </a:lvl3pPr>
     <a:lvl4pPr marL="1371600" algn="l" defTabSz="914400" rtl="0" eaLnBrk="1" latinLnBrk="0" hangingPunct="1">
-      <a:defRPr sz="1200" kern="1200">
+      <a:defRPr sz="1800" kern="1200">
         <a:solidFill>
           <a:schemeClr val="tx1"/>
         </a:solidFill>
@@ -417,7 +198,7 @@
       </a:defRPr>
     </a:lvl4pPr>
     <a:lvl5pPr marL="1828800" algn="l" defTabSz="914400" rtl="0" eaLnBrk="1" latinLnBrk="0" hangingPunct="1">
-      <a:defRPr sz="1200" kern="1200">
+      <a:defRPr sz="1800" kern="1200">
         <a:solidFill>
           <a:schemeClr val="tx1"/>
         </a:solidFill>
@@ -427,7 +208,7 @@
       </a:defRPr>
     </a:lvl5pPr>
     <a:lvl6pPr marL="2286000" algn="l" defTabSz="914400" rtl="0" eaLnBrk="1" latinLnBrk="0" hangingPunct="1">
-      <a:defRPr sz="1200" kern="1200">
+      <a:defRPr sz="1800" kern="1200">
         <a:solidFill>
           <a:schemeClr val="tx1"/>
         </a:solidFill>
@@ -437,7 +218,7 @@
       </a:defRPr>
     </a:lvl6pPr>
     <a:lvl7pPr marL="2743200" algn="l" defTabSz="914400" rtl="0" eaLnBrk="1" latinLnBrk="0" hangingPunct="1">
-      <a:defRPr sz="1200" kern="1200">
+      <a:defRPr sz="1800" kern="1200">
         <a:solidFill>
           <a:schemeClr val="tx1"/>
         </a:solidFill>
@@ -447,7 +228,7 @@
       </a:defRPr>
     </a:lvl7pPr>
     <a:lvl8pPr marL="3200400" algn="l" defTabSz="914400" rtl="0" eaLnBrk="1" latinLnBrk="0" hangingPunct="1">
-      <a:defRPr sz="1200" kern="1200">
+      <a:defRPr sz="1800" kern="1200">
         <a:solidFill>
           <a:schemeClr val="tx1"/>
         </a:solidFill>
@@ -457,7 +238,7 @@
       </a:defRPr>
     </a:lvl8pPr>
     <a:lvl9pPr marL="3657600" algn="l" defTabSz="914400" rtl="0" eaLnBrk="1" latinLnBrk="0" hangingPunct="1">
-      <a:defRPr sz="1200" kern="1200">
+      <a:defRPr sz="1800" kern="1200">
         <a:solidFill>
           <a:schemeClr val="tx1"/>
         </a:solidFill>
@@ -514,10 +295,6 @@
           <a:bodyPr/>
           <a:lstStyle/>
           <a:p>
-            <a:r>
-              <a:rPr lang="en-US" dirty="0"/>
-              <a:t/>
-            </a:r>
             <a:endParaRPr lang="en-US" dirty="0"/>
           </a:p>
         </p:txBody>
@@ -602,10 +379,6 @@
           <a:bodyPr/>
           <a:lstStyle/>
           <a:p>
-            <a:r>
-              <a:rPr lang="en-US" dirty="0"/>
-              <a:t/>
-            </a:r>
             <a:endParaRPr lang="en-US" dirty="0"/>
           </a:p>
         </p:txBody>
@@ -690,10 +463,6 @@
           <a:bodyPr/>
           <a:lstStyle/>
           <a:p>
-            <a:r>
-              <a:rPr lang="en-US" dirty="0"/>
-              <a:t/>
-            </a:r>
             <a:endParaRPr lang="en-US" dirty="0"/>
           </a:p>
         </p:txBody>
@@ -778,10 +547,6 @@
           <a:bodyPr/>
           <a:lstStyle/>
           <a:p>
-            <a:r>
-              <a:rPr lang="en-US" dirty="0"/>
-              <a:t/>
-            </a:r>
             <a:endParaRPr lang="en-US" dirty="0"/>
           </a:p>
         </p:txBody>
@@ -866,10 +631,6 @@
           <a:bodyPr/>
           <a:lstStyle/>
           <a:p>
-            <a:r>
-              <a:rPr lang="en-US" dirty="0"/>
-              <a:t/>
-            </a:r>
             <a:endParaRPr lang="en-US" dirty="0"/>
           </a:p>
         </p:txBody>
@@ -954,10 +715,6 @@
           <a:bodyPr/>
           <a:lstStyle/>
           <a:p>
-            <a:r>
-              <a:rPr lang="en-US" dirty="0"/>
-              <a:t/>
-            </a:r>
             <a:endParaRPr lang="en-US" dirty="0"/>
           </a:p>
         </p:txBody>
@@ -1042,10 +799,6 @@
           <a:bodyPr/>
           <a:lstStyle/>
           <a:p>
-            <a:r>
-              <a:rPr lang="en-US" dirty="0"/>
-              <a:t/>
-            </a:r>
             <a:endParaRPr lang="en-US" dirty="0"/>
           </a:p>
         </p:txBody>
@@ -1130,10 +883,6 @@
           <a:bodyPr/>
           <a:lstStyle/>
           <a:p>
-            <a:r>
-              <a:rPr lang="en-US" dirty="0"/>
-              <a:t/>
-            </a:r>
             <a:endParaRPr lang="en-US" dirty="0"/>
           </a:p>
         </p:txBody>
@@ -1218,10 +967,6 @@
           <a:bodyPr/>
           <a:lstStyle/>
           <a:p>
-            <a:r>
-              <a:rPr lang="en-US" dirty="0"/>
-              <a:t/>
-            </a:r>
             <a:endParaRPr lang="en-US" dirty="0"/>
           </a:p>
         </p:txBody>
@@ -1306,10 +1051,6 @@
           <a:bodyPr/>
           <a:lstStyle/>
           <a:p>
-            <a:r>
-              <a:rPr lang="en-US" dirty="0"/>
-              <a:t/>
-            </a:r>
             <a:endParaRPr lang="en-US" dirty="0"/>
           </a:p>
         </p:txBody>
@@ -1394,10 +1135,6 @@
           <a:bodyPr/>
           <a:lstStyle/>
           <a:p>
-            <a:r>
-              <a:rPr lang="en-US" dirty="0"/>
-              <a:t/>
-            </a:r>
             <a:endParaRPr lang="en-US" dirty="0"/>
           </a:p>
         </p:txBody>
@@ -1482,10 +1219,6 @@
           <a:bodyPr/>
           <a:lstStyle/>
           <a:p>
-            <a:r>
-              <a:rPr lang="en-US" dirty="0"/>
-              <a:t/>
-            </a:r>
             <a:endParaRPr lang="en-US" dirty="0"/>
           </a:p>
         </p:txBody>
@@ -1570,10 +1303,6 @@
           <a:bodyPr/>
           <a:lstStyle/>
           <a:p>
-            <a:r>
-              <a:rPr lang="en-US" dirty="0"/>
-              <a:t/>
-            </a:r>
             <a:endParaRPr lang="en-US" dirty="0"/>
           </a:p>
         </p:txBody>
@@ -1658,10 +1387,6 @@
           <a:bodyPr/>
           <a:lstStyle/>
           <a:p>
-            <a:r>
-              <a:rPr lang="en-US" dirty="0"/>
-              <a:t/>
-            </a:r>
             <a:endParaRPr lang="en-US" dirty="0"/>
           </a:p>
         </p:txBody>
@@ -1746,10 +1471,6 @@
           <a:bodyPr/>
           <a:lstStyle/>
           <a:p>
-            <a:r>
-              <a:rPr lang="en-US" dirty="0"/>
-              <a:t/>
-            </a:r>
             <a:endParaRPr lang="en-US" dirty="0"/>
           </a:p>
         </p:txBody>
@@ -1823,6 +1544,11 @@
 <file path=ppt/slideMasters/slideMaster1.xml><?xml version="1.0" encoding="utf-8"?>
 <p:sldMaster xmlns:a="http://schemas.openxmlformats.org/drawingml/2006/main" xmlns:r="http://schemas.openxmlformats.org/officeDocument/2006/relationships" xmlns:p="http://schemas.openxmlformats.org/presentationml/2006/main">
   <p:cSld>
+    <p:bg>
+      <p:bgRef idx="1001">
+        <a:schemeClr val="bg1"/>
+      </p:bgRef>
+    </p:bg>
     <p:spTree>
       <p:nvGrpSpPr>
         <p:cNvPr id="1" name=""/>
@@ -2105,6 +1831,7 @@
         <a:solidFill>
           <a:srgbClr val="0F172A"/>
         </a:solidFill>
+        <a:effectLst/>
       </p:bgPr>
     </p:bg>
     <p:spTree>
@@ -2140,6 +1867,13 @@
           </a:solidFill>
           <a:ln/>
         </p:spPr>
+        <p:txBody>
+          <a:bodyPr/>
+          <a:lstStyle/>
+          <a:p>
+            <a:endParaRPr lang="th-TH"/>
+          </a:p>
+        </p:txBody>
       </p:sp>
       <p:sp>
         <p:nvSpPr>
@@ -2162,11 +1896,11 @@
           <a:bodyPr wrap="square" rtlCol="0" anchor="ctr"/>
           <a:lstStyle/>
           <a:p>
-            <a:pPr indent="0" marL="0">
-              <a:buNone/>
-            </a:pPr>
-            <a:r>
-              <a:rPr lang="en-US" sz="1300" b="1" spc="300" kern="0" dirty="0">
+            <a:pPr marL="0" indent="0">
+              <a:buNone/>
+            </a:pPr>
+            <a:r>
+              <a:rPr lang="en-US" sz="1300" b="1" kern="0" spc="300" dirty="0">
                 <a:solidFill>
                   <a:srgbClr val="D97706"/>
                 </a:solidFill>
@@ -2201,7 +1935,7 @@
           <a:bodyPr wrap="square" rtlCol="0" anchor="ctr"/>
           <a:lstStyle/>
           <a:p>
-            <a:pPr indent="0" marL="0">
+            <a:pPr marL="0" indent="0">
               <a:buNone/>
             </a:pPr>
             <a:r>
@@ -2240,7 +1974,7 @@
           <a:bodyPr wrap="square" rtlCol="0" anchor="ctr"/>
           <a:lstStyle/>
           <a:p>
-            <a:pPr indent="0" marL="0">
+            <a:pPr marL="0" indent="0">
               <a:lnSpc>
                 <a:spcPct val="130000"/>
               </a:lnSpc>
@@ -2260,7 +1994,7 @@
             <a:endParaRPr lang="en-US" sz="1700" dirty="0"/>
           </a:p>
           <a:p>
-            <a:pPr indent="0" marL="0">
+            <a:pPr marL="0" indent="0">
               <a:lnSpc>
                 <a:spcPct val="130000"/>
               </a:lnSpc>
@@ -2307,6 +2041,13 @@
             <a:prstDash val="solid"/>
           </a:ln>
         </p:spPr>
+        <p:txBody>
+          <a:bodyPr/>
+          <a:lstStyle/>
+          <a:p>
+            <a:endParaRPr lang="th-TH"/>
+          </a:p>
+        </p:txBody>
       </p:sp>
       <p:sp>
         <p:nvSpPr>
@@ -2329,7 +2070,7 @@
           <a:bodyPr wrap="square" rtlCol="0" anchor="ctr"/>
           <a:lstStyle/>
           <a:p>
-            <a:pPr indent="0" marL="0">
+            <a:pPr marL="0" indent="0">
               <a:buNone/>
             </a:pPr>
             <a:r>
@@ -2368,7 +2109,7 @@
           <a:bodyPr wrap="square" rtlCol="0" anchor="ctr"/>
           <a:lstStyle/>
           <a:p>
-            <a:pPr indent="0" marL="0">
+            <a:pPr marL="0" indent="0">
               <a:buNone/>
             </a:pPr>
             <a:r>
@@ -2412,6 +2153,13 @@
             <a:prstDash val="solid"/>
           </a:ln>
         </p:spPr>
+        <p:txBody>
+          <a:bodyPr/>
+          <a:lstStyle/>
+          <a:p>
+            <a:endParaRPr lang="th-TH"/>
+          </a:p>
+        </p:txBody>
       </p:sp>
       <p:sp>
         <p:nvSpPr>
@@ -2434,7 +2182,7 @@
           <a:bodyPr wrap="square" rtlCol="0" anchor="ctr"/>
           <a:lstStyle/>
           <a:p>
-            <a:pPr indent="0" marL="0">
+            <a:pPr marL="0" indent="0">
               <a:buNone/>
             </a:pPr>
             <a:r>
@@ -2473,7 +2221,7 @@
           <a:bodyPr wrap="square" rtlCol="0" anchor="ctr"/>
           <a:lstStyle/>
           <a:p>
-            <a:pPr indent="0" marL="0">
+            <a:pPr marL="0" indent="0">
               <a:buNone/>
             </a:pPr>
             <a:r>
@@ -2517,6 +2265,13 @@
             <a:prstDash val="solid"/>
           </a:ln>
         </p:spPr>
+        <p:txBody>
+          <a:bodyPr/>
+          <a:lstStyle/>
+          <a:p>
+            <a:endParaRPr lang="th-TH"/>
+          </a:p>
+        </p:txBody>
       </p:sp>
       <p:sp>
         <p:nvSpPr>
@@ -2539,7 +2294,7 @@
           <a:bodyPr wrap="square" rtlCol="0" anchor="ctr"/>
           <a:lstStyle/>
           <a:p>
-            <a:pPr indent="0" marL="0">
+            <a:pPr marL="0" indent="0">
               <a:buNone/>
             </a:pPr>
             <a:r>
@@ -2578,7 +2333,7 @@
           <a:bodyPr wrap="square" rtlCol="0" anchor="ctr"/>
           <a:lstStyle/>
           <a:p>
-            <a:pPr indent="0" marL="0">
+            <a:pPr marL="0" indent="0">
               <a:buNone/>
             </a:pPr>
             <a:r>
@@ -2617,7 +2372,7 @@
           <a:bodyPr wrap="square" rtlCol="0" anchor="ctr"/>
           <a:lstStyle/>
           <a:p>
-            <a:pPr indent="0" marL="0">
+            <a:pPr marL="0" indent="0">
               <a:buNone/>
             </a:pPr>
             <a:r>
@@ -2651,6 +2406,7 @@
         <a:solidFill>
           <a:srgbClr val="F8FAFC"/>
         </a:solidFill>
+        <a:effectLst/>
       </p:bgPr>
     </p:bg>
     <p:spTree>
@@ -2688,11 +2444,11 @@
           <a:bodyPr wrap="square" rtlCol="0" anchor="ctr"/>
           <a:lstStyle/>
           <a:p>
-            <a:pPr indent="0" marL="0">
-              <a:buNone/>
-            </a:pPr>
-            <a:r>
-              <a:rPr lang="en-US" sz="1100" b="1" spc="200" kern="0" dirty="0">
+            <a:pPr marL="0" indent="0">
+              <a:buNone/>
+            </a:pPr>
+            <a:r>
+              <a:rPr lang="en-US" sz="1100" b="1" kern="0" spc="200" dirty="0">
                 <a:solidFill>
                   <a:srgbClr val="D97706"/>
                 </a:solidFill>
@@ -2727,7 +2483,7 @@
           <a:bodyPr wrap="square" rtlCol="0" anchor="ctr"/>
           <a:lstStyle/>
           <a:p>
-            <a:pPr indent="0" marL="0">
+            <a:pPr marL="0" indent="0">
               <a:buNone/>
             </a:pPr>
             <a:r>
@@ -2764,6 +2520,13 @@
           </a:solidFill>
           <a:ln/>
         </p:spPr>
+        <p:txBody>
+          <a:bodyPr/>
+          <a:lstStyle/>
+          <a:p>
+            <a:endParaRPr lang="th-TH"/>
+          </a:p>
+        </p:txBody>
       </p:sp>
       <p:sp>
         <p:nvSpPr>
@@ -2786,7 +2549,7 @@
           <a:bodyPr wrap="square" rtlCol="0" anchor="ctr"/>
           <a:lstStyle/>
           <a:p>
-            <a:pPr indent="0" marL="0">
+            <a:pPr marL="0" indent="0">
               <a:buNone/>
             </a:pPr>
             <a:r>
@@ -2825,7 +2588,7 @@
           <a:bodyPr wrap="square" rtlCol="0" anchor="ctr"/>
           <a:lstStyle/>
           <a:p>
-            <a:pPr algn="r" indent="0" marL="0">
+            <a:pPr marL="0" indent="0" algn="r">
               <a:buNone/>
             </a:pPr>
             <a:r>
@@ -2864,7 +2627,7 @@
           <a:bodyPr wrap="square" rtlCol="0" anchor="ctr"/>
           <a:lstStyle/>
           <a:p>
-            <a:pPr indent="0" marL="0">
+            <a:pPr marL="0" indent="0">
               <a:buNone/>
             </a:pPr>
             <a:r>
@@ -2908,6 +2671,13 @@
             <a:prstDash val="solid"/>
           </a:ln>
         </p:spPr>
+        <p:txBody>
+          <a:bodyPr/>
+          <a:lstStyle/>
+          <a:p>
+            <a:endParaRPr lang="th-TH"/>
+          </a:p>
+        </p:txBody>
       </p:sp>
       <p:sp>
         <p:nvSpPr>
@@ -2930,7 +2700,7 @@
           <a:bodyPr wrap="square" rtlCol="0" anchor="ctr"/>
           <a:lstStyle/>
           <a:p>
-            <a:pPr indent="0" marL="0">
+            <a:pPr marL="0" indent="0">
               <a:buNone/>
             </a:pPr>
             <a:r>
@@ -2969,7 +2739,7 @@
           <a:bodyPr wrap="square" rtlCol="0" anchor="ctr"/>
           <a:lstStyle/>
           <a:p>
-            <a:pPr indent="0" marL="0">
+            <a:pPr marL="0" indent="0">
               <a:buNone/>
             </a:pPr>
             <a:r>
@@ -3008,7 +2778,7 @@
           <a:bodyPr wrap="square" rtlCol="0" anchor="ctr"/>
           <a:lstStyle/>
           <a:p>
-            <a:pPr algn="ctr" indent="0" marL="0">
+            <a:pPr marL="0" indent="0" algn="ctr">
               <a:buNone/>
             </a:pPr>
             <a:r>
@@ -3047,7 +2817,7 @@
           <a:bodyPr wrap="square" rtlCol="0" anchor="ctr"/>
           <a:lstStyle/>
           <a:p>
-            <a:pPr indent="0" marL="0">
+            <a:pPr marL="0" indent="0">
               <a:buNone/>
             </a:pPr>
             <a:r>
@@ -3086,7 +2856,7 @@
           <a:bodyPr wrap="square" rtlCol="0" anchor="ctr"/>
           <a:lstStyle/>
           <a:p>
-            <a:pPr algn="ctr" indent="0" marL="0">
+            <a:pPr marL="0" indent="0" algn="ctr">
               <a:buNone/>
             </a:pPr>
             <a:r>
@@ -3125,7 +2895,7 @@
           <a:bodyPr wrap="square" rtlCol="0" anchor="ctr"/>
           <a:lstStyle/>
           <a:p>
-            <a:pPr indent="0" marL="0">
+            <a:pPr marL="0" indent="0">
               <a:buNone/>
             </a:pPr>
             <a:r>
@@ -3164,7 +2934,7 @@
           <a:bodyPr wrap="square" rtlCol="0" anchor="ctr"/>
           <a:lstStyle/>
           <a:p>
-            <a:pPr algn="ctr" indent="0" marL="0">
+            <a:pPr marL="0" indent="0" algn="ctr">
               <a:buNone/>
             </a:pPr>
             <a:r>
@@ -3203,7 +2973,7 @@
           <a:bodyPr wrap="square" rtlCol="0" anchor="ctr"/>
           <a:lstStyle/>
           <a:p>
-            <a:pPr indent="0" marL="0">
+            <a:pPr marL="0" indent="0">
               <a:buNone/>
             </a:pPr>
             <a:r>
@@ -3242,7 +3012,7 @@
           <a:bodyPr wrap="square" rtlCol="0" anchor="ctr"/>
           <a:lstStyle/>
           <a:p>
-            <a:pPr algn="ctr" indent="0" marL="0">
+            <a:pPr marL="0" indent="0" algn="ctr">
               <a:buNone/>
             </a:pPr>
             <a:r>
@@ -3281,7 +3051,7 @@
           <a:bodyPr wrap="square" rtlCol="0" anchor="ctr"/>
           <a:lstStyle/>
           <a:p>
-            <a:pPr indent="0" marL="0">
+            <a:pPr marL="0" indent="0">
               <a:buNone/>
             </a:pPr>
             <a:r>
@@ -3325,6 +3095,13 @@
             <a:prstDash val="solid"/>
           </a:ln>
         </p:spPr>
+        <p:txBody>
+          <a:bodyPr/>
+          <a:lstStyle/>
+          <a:p>
+            <a:endParaRPr lang="th-TH"/>
+          </a:p>
+        </p:txBody>
       </p:sp>
       <p:sp>
         <p:nvSpPr>
@@ -3347,7 +3124,7 @@
           <a:bodyPr wrap="square" rtlCol="0" anchor="ctr"/>
           <a:lstStyle/>
           <a:p>
-            <a:pPr indent="0" marL="0">
+            <a:pPr marL="0" indent="0">
               <a:buNone/>
             </a:pPr>
             <a:r>
@@ -3386,7 +3163,7 @@
           <a:bodyPr wrap="square" rtlCol="0" anchor="ctr"/>
           <a:lstStyle/>
           <a:p>
-            <a:pPr indent="0" marL="0">
+            <a:pPr marL="0" indent="0">
               <a:buNone/>
             </a:pPr>
             <a:r>
@@ -3425,7 +3202,7 @@
           <a:bodyPr wrap="square" rtlCol="0" anchor="ctr"/>
           <a:lstStyle/>
           <a:p>
-            <a:pPr algn="ctr" indent="0" marL="0">
+            <a:pPr marL="0" indent="0" algn="ctr">
               <a:buNone/>
             </a:pPr>
             <a:r>
@@ -3464,7 +3241,7 @@
           <a:bodyPr wrap="square" rtlCol="0" anchor="ctr"/>
           <a:lstStyle/>
           <a:p>
-            <a:pPr indent="0" marL="0">
+            <a:pPr marL="0" indent="0">
               <a:buNone/>
             </a:pPr>
             <a:r>
@@ -3503,7 +3280,7 @@
           <a:bodyPr wrap="square" rtlCol="0" anchor="ctr"/>
           <a:lstStyle/>
           <a:p>
-            <a:pPr algn="ctr" indent="0" marL="0">
+            <a:pPr marL="0" indent="0" algn="ctr">
               <a:buNone/>
             </a:pPr>
             <a:r>
@@ -3542,7 +3319,7 @@
           <a:bodyPr wrap="square" rtlCol="0" anchor="ctr"/>
           <a:lstStyle/>
           <a:p>
-            <a:pPr indent="0" marL="0">
+            <a:pPr marL="0" indent="0">
               <a:buNone/>
             </a:pPr>
             <a:r>
@@ -3581,7 +3358,7 @@
           <a:bodyPr wrap="square" rtlCol="0" anchor="ctr"/>
           <a:lstStyle/>
           <a:p>
-            <a:pPr algn="ctr" indent="0" marL="0">
+            <a:pPr marL="0" indent="0" algn="ctr">
               <a:buNone/>
             </a:pPr>
             <a:r>
@@ -3620,7 +3397,7 @@
           <a:bodyPr wrap="square" rtlCol="0" anchor="ctr"/>
           <a:lstStyle/>
           <a:p>
-            <a:pPr indent="0" marL="0">
+            <a:pPr marL="0" indent="0">
               <a:buNone/>
             </a:pPr>
             <a:r>
@@ -3659,7 +3436,7 @@
           <a:bodyPr wrap="square" rtlCol="0" anchor="ctr"/>
           <a:lstStyle/>
           <a:p>
-            <a:pPr algn="ctr" indent="0" marL="0">
+            <a:pPr marL="0" indent="0" algn="ctr">
               <a:buNone/>
             </a:pPr>
             <a:r>
@@ -3698,7 +3475,7 @@
           <a:bodyPr wrap="square" rtlCol="0" anchor="ctr"/>
           <a:lstStyle/>
           <a:p>
-            <a:pPr indent="0" marL="0">
+            <a:pPr marL="0" indent="0">
               <a:buNone/>
             </a:pPr>
             <a:r>
@@ -3742,6 +3519,13 @@
             <a:prstDash val="solid"/>
           </a:ln>
         </p:spPr>
+        <p:txBody>
+          <a:bodyPr/>
+          <a:lstStyle/>
+          <a:p>
+            <a:endParaRPr lang="th-TH"/>
+          </a:p>
+        </p:txBody>
       </p:sp>
       <p:sp>
         <p:nvSpPr>
@@ -3764,7 +3548,7 @@
           <a:bodyPr wrap="square" rtlCol="0" anchor="ctr"/>
           <a:lstStyle/>
           <a:p>
-            <a:pPr indent="0" marL="0">
+            <a:pPr marL="0" indent="0">
               <a:buNone/>
             </a:pPr>
             <a:r>
@@ -3803,7 +3587,7 @@
           <a:bodyPr wrap="square" rtlCol="0" anchor="ctr"/>
           <a:lstStyle/>
           <a:p>
-            <a:pPr indent="0" marL="0">
+            <a:pPr marL="0" indent="0">
               <a:buNone/>
             </a:pPr>
             <a:r>
@@ -3842,7 +3626,7 @@
           <a:bodyPr wrap="square" rtlCol="0" anchor="ctr"/>
           <a:lstStyle/>
           <a:p>
-            <a:pPr algn="ctr" indent="0" marL="0">
+            <a:pPr marL="0" indent="0" algn="ctr">
               <a:buNone/>
             </a:pPr>
             <a:r>
@@ -3881,7 +3665,7 @@
           <a:bodyPr wrap="square" rtlCol="0" anchor="ctr"/>
           <a:lstStyle/>
           <a:p>
-            <a:pPr indent="0" marL="0">
+            <a:pPr marL="0" indent="0">
               <a:buNone/>
             </a:pPr>
             <a:r>
@@ -3920,7 +3704,7 @@
           <a:bodyPr wrap="square" rtlCol="0" anchor="ctr"/>
           <a:lstStyle/>
           <a:p>
-            <a:pPr algn="ctr" indent="0" marL="0">
+            <a:pPr marL="0" indent="0" algn="ctr">
               <a:buNone/>
             </a:pPr>
             <a:r>
@@ -3959,7 +3743,7 @@
           <a:bodyPr wrap="square" rtlCol="0" anchor="ctr"/>
           <a:lstStyle/>
           <a:p>
-            <a:pPr indent="0" marL="0">
+            <a:pPr marL="0" indent="0">
               <a:buNone/>
             </a:pPr>
             <a:r>
@@ -3998,7 +3782,7 @@
           <a:bodyPr wrap="square" rtlCol="0" anchor="ctr"/>
           <a:lstStyle/>
           <a:p>
-            <a:pPr algn="ctr" indent="0" marL="0">
+            <a:pPr marL="0" indent="0" algn="ctr">
               <a:buNone/>
             </a:pPr>
             <a:r>
@@ -4037,7 +3821,7 @@
           <a:bodyPr wrap="square" rtlCol="0" anchor="ctr"/>
           <a:lstStyle/>
           <a:p>
-            <a:pPr indent="0" marL="0">
+            <a:pPr marL="0" indent="0">
               <a:buNone/>
             </a:pPr>
             <a:r>
@@ -4076,7 +3860,7 @@
           <a:bodyPr wrap="square" rtlCol="0" anchor="ctr"/>
           <a:lstStyle/>
           <a:p>
-            <a:pPr algn="ctr" indent="0" marL="0">
+            <a:pPr marL="0" indent="0" algn="ctr">
               <a:buNone/>
             </a:pPr>
             <a:r>
@@ -4115,7 +3899,7 @@
           <a:bodyPr wrap="square" rtlCol="0" anchor="ctr"/>
           <a:lstStyle/>
           <a:p>
-            <a:pPr indent="0" marL="0">
+            <a:pPr marL="0" indent="0">
               <a:buNone/>
             </a:pPr>
             <a:r>
@@ -4154,6 +3938,13 @@
           </a:solidFill>
           <a:ln/>
         </p:spPr>
+        <p:txBody>
+          <a:bodyPr/>
+          <a:lstStyle/>
+          <a:p>
+            <a:endParaRPr lang="th-TH"/>
+          </a:p>
+        </p:txBody>
       </p:sp>
       <p:sp>
         <p:nvSpPr>
@@ -4176,7 +3967,7 @@
           <a:bodyPr wrap="square" rtlCol="0" anchor="ctr"/>
           <a:lstStyle/>
           <a:p>
-            <a:pPr indent="0" marL="0">
+            <a:pPr marL="0" indent="0">
               <a:lnSpc>
                 <a:spcPct val="120000"/>
               </a:lnSpc>
@@ -4193,12 +3984,6 @@
               </a:rPr>
               <a:t>เจาะลึก:  </a:t>
             </a:r>
-            <a:pPr indent="0" marL="0">
-              <a:lnSpc>
-                <a:spcPct val="120000"/>
-              </a:lnSpc>
-              <a:buNone/>
-            </a:pPr>
             <a:r>
               <a:rPr lang="en-US" sz="1200" dirty="0">
                 <a:solidFill>
@@ -4230,6 +4015,7 @@
         <a:solidFill>
           <a:srgbClr val="F8FAFC"/>
         </a:solidFill>
+        <a:effectLst/>
       </p:bgPr>
     </p:bg>
     <p:spTree>
@@ -4267,11 +4053,11 @@
           <a:bodyPr wrap="square" rtlCol="0" anchor="ctr"/>
           <a:lstStyle/>
           <a:p>
-            <a:pPr indent="0" marL="0">
-              <a:buNone/>
-            </a:pPr>
-            <a:r>
-              <a:rPr lang="en-US" sz="1100" b="1" spc="200" kern="0" dirty="0">
+            <a:pPr marL="0" indent="0">
+              <a:buNone/>
+            </a:pPr>
+            <a:r>
+              <a:rPr lang="en-US" sz="1100" b="1" kern="0" spc="200" dirty="0">
                 <a:solidFill>
                   <a:srgbClr val="D97706"/>
                 </a:solidFill>
@@ -4306,7 +4092,7 @@
           <a:bodyPr wrap="square" rtlCol="0" anchor="ctr"/>
           <a:lstStyle/>
           <a:p>
-            <a:pPr indent="0" marL="0">
+            <a:pPr marL="0" indent="0">
               <a:buNone/>
             </a:pPr>
             <a:r>
@@ -4343,6 +4129,13 @@
           </a:solidFill>
           <a:ln/>
         </p:spPr>
+        <p:txBody>
+          <a:bodyPr/>
+          <a:lstStyle/>
+          <a:p>
+            <a:endParaRPr lang="th-TH"/>
+          </a:p>
+        </p:txBody>
       </p:sp>
       <p:sp>
         <p:nvSpPr>
@@ -4365,7 +4158,7 @@
           <a:bodyPr wrap="square" rtlCol="0" anchor="ctr"/>
           <a:lstStyle/>
           <a:p>
-            <a:pPr indent="0" marL="0">
+            <a:pPr marL="0" indent="0">
               <a:buNone/>
             </a:pPr>
             <a:r>
@@ -4404,7 +4197,7 @@
           <a:bodyPr wrap="square" rtlCol="0" anchor="ctr"/>
           <a:lstStyle/>
           <a:p>
-            <a:pPr algn="r" indent="0" marL="0">
+            <a:pPr marL="0" indent="0" algn="r">
               <a:buNone/>
             </a:pPr>
             <a:r>
@@ -4443,7 +4236,7 @@
           <a:bodyPr wrap="square" rtlCol="0" anchor="ctr"/>
           <a:lstStyle/>
           <a:p>
-            <a:pPr indent="0" marL="0">
+            <a:pPr marL="0" indent="0">
               <a:buNone/>
             </a:pPr>
             <a:r>
@@ -4487,13 +4280,20 @@
             <a:prstDash val="solid"/>
           </a:ln>
           <a:effectLst>
-            <a:outerShdw sx="100000" sy="100000" kx="0" ky="0" algn="bl" rotWithShape="0" blurRad="76200" dist="12700" dir="5400000">
+            <a:outerShdw blurRad="76200" dist="12700" dir="5400000" algn="bl" rotWithShape="0">
               <a:srgbClr val="94A3B8">
                 <a:alpha val="16000"/>
               </a:srgbClr>
             </a:outerShdw>
           </a:effectLst>
         </p:spPr>
+        <p:txBody>
+          <a:bodyPr/>
+          <a:lstStyle/>
+          <a:p>
+            <a:endParaRPr lang="th-TH"/>
+          </a:p>
+        </p:txBody>
       </p:sp>
       <p:sp>
         <p:nvSpPr>
@@ -4514,6 +4314,13 @@
           </a:solidFill>
           <a:ln/>
         </p:spPr>
+        <p:txBody>
+          <a:bodyPr/>
+          <a:lstStyle/>
+          <a:p>
+            <a:endParaRPr lang="th-TH"/>
+          </a:p>
+        </p:txBody>
       </p:sp>
       <p:sp>
         <p:nvSpPr>
@@ -4536,7 +4343,7 @@
           <a:bodyPr wrap="square" rtlCol="0" anchor="ctr"/>
           <a:lstStyle/>
           <a:p>
-            <a:pPr indent="0" marL="0">
+            <a:pPr marL="0" indent="0">
               <a:buNone/>
             </a:pPr>
             <a:r>
@@ -4575,7 +4382,7 @@
           <a:bodyPr wrap="square" rtlCol="0" anchor="ctr"/>
           <a:lstStyle/>
           <a:p>
-            <a:pPr indent="0" marL="0">
+            <a:pPr marL="0" indent="0">
               <a:lnSpc>
                 <a:spcPct val="110000"/>
               </a:lnSpc>
@@ -4593,12 +4400,6 @@
               <a:t>-- ฟังก์ชันอยู่ตรงนี้
 </a:t>
             </a:r>
-            <a:pPr indent="0" marL="0">
-              <a:lnSpc>
-                <a:spcPct val="110000"/>
-              </a:lnSpc>
-              <a:buNone/>
-            </a:pPr>
             <a:r>
               <a:rPr lang="en-US" sz="950" dirty="0">
                 <a:solidFill>
@@ -4609,86 +4410,34 @@
                 <a:cs typeface="Consolas" pitchFamily="34" charset="-120"/>
               </a:rPr>
               <a:t>create function authz.current_role()
+returns app_role as $$
 </a:t>
             </a:r>
-            <a:pPr indent="0" marL="0">
-              <a:lnSpc>
-                <a:spcPct val="110000"/>
-              </a:lnSpc>
-              <a:buNone/>
-            </a:pPr>
             <a:r>
               <a:rPr lang="en-US" sz="950" dirty="0">
                 <a:solidFill>
-                  <a:srgbClr val="E2E8F0"/>
+                  <a:srgbClr val="F87171"/>
                 </a:solidFill>
                 <a:latin typeface="Consolas" pitchFamily="34" charset="0"/>
                 <a:ea typeface="Consolas" pitchFamily="34" charset="-122"/>
                 <a:cs typeface="Consolas" pitchFamily="34" charset="-120"/>
               </a:rPr>
-              <a:t>returns app_role as $$
+              <a:t>  select role from public.app_users
+  where user_id = auth.uid();
 </a:t>
             </a:r>
-            <a:pPr indent="0" marL="0">
-              <a:lnSpc>
-                <a:spcPct val="110000"/>
-              </a:lnSpc>
-              <a:buNone/>
-            </a:pPr>
             <a:r>
               <a:rPr lang="en-US" sz="950" dirty="0">
                 <a:solidFill>
-                  <a:srgbClr val="F87171"/>
+                  <a:srgbClr val="E2E8F0"/>
                 </a:solidFill>
                 <a:latin typeface="Consolas" pitchFamily="34" charset="0"/>
                 <a:ea typeface="Consolas" pitchFamily="34" charset="-122"/>
                 <a:cs typeface="Consolas" pitchFamily="34" charset="-120"/>
               </a:rPr>
-              <a:t>  select role from public.app_users
-</a:t>
-            </a:r>
-            <a:pPr indent="0" marL="0">
-              <a:lnSpc>
-                <a:spcPct val="110000"/>
-              </a:lnSpc>
-              <a:buNone/>
-            </a:pPr>
-            <a:r>
-              <a:rPr lang="en-US" sz="950" dirty="0">
-                <a:solidFill>
-                  <a:srgbClr val="F87171"/>
-                </a:solidFill>
-                <a:latin typeface="Consolas" pitchFamily="34" charset="0"/>
-                <a:ea typeface="Consolas" pitchFamily="34" charset="-122"/>
-                <a:cs typeface="Consolas" pitchFamily="34" charset="-120"/>
-              </a:rPr>
-              <a:t>  where user_id = auth.uid();
-</a:t>
-            </a:r>
-            <a:pPr indent="0" marL="0">
-              <a:lnSpc>
-                <a:spcPct val="110000"/>
-              </a:lnSpc>
-              <a:buNone/>
-            </a:pPr>
-            <a:r>
-              <a:rPr lang="en-US" sz="950" dirty="0">
-                <a:solidFill>
-                  <a:srgbClr val="E2E8F0"/>
-                </a:solidFill>
-                <a:latin typeface="Consolas" pitchFamily="34" charset="0"/>
-                <a:ea typeface="Consolas" pitchFamily="34" charset="-122"/>
-                <a:cs typeface="Consolas" pitchFamily="34" charset="-120"/>
-              </a:rPr>
               <a:t>$$ language sql;
 </a:t>
             </a:r>
-            <a:pPr indent="0" marL="0">
-              <a:lnSpc>
-                <a:spcPct val="110000"/>
-              </a:lnSpc>
-              <a:buNone/>
-            </a:pPr>
             <a:r>
               <a:rPr lang="en-US" sz="950" dirty="0">
                 <a:solidFill>
@@ -4730,13 +4479,20 @@
             <a:prstDash val="solid"/>
           </a:ln>
           <a:effectLst>
-            <a:outerShdw sx="100000" sy="100000" kx="0" ky="0" algn="bl" rotWithShape="0" blurRad="76200" dist="12700" dir="5400000">
+            <a:outerShdw blurRad="76200" dist="12700" dir="5400000" algn="bl" rotWithShape="0">
               <a:srgbClr val="94A3B8">
                 <a:alpha val="16000"/>
               </a:srgbClr>
             </a:outerShdw>
           </a:effectLst>
         </p:spPr>
+        <p:txBody>
+          <a:bodyPr/>
+          <a:lstStyle/>
+          <a:p>
+            <a:endParaRPr lang="th-TH"/>
+          </a:p>
+        </p:txBody>
       </p:sp>
       <p:sp>
         <p:nvSpPr>
@@ -4757,6 +4513,13 @@
           </a:solidFill>
           <a:ln/>
         </p:spPr>
+        <p:txBody>
+          <a:bodyPr/>
+          <a:lstStyle/>
+          <a:p>
+            <a:endParaRPr lang="th-TH"/>
+          </a:p>
+        </p:txBody>
       </p:sp>
       <p:sp>
         <p:nvSpPr>
@@ -4779,7 +4542,7 @@
           <a:bodyPr wrap="square" rtlCol="0" anchor="ctr"/>
           <a:lstStyle/>
           <a:p>
-            <a:pPr indent="0" marL="0">
+            <a:pPr marL="0" indent="0">
               <a:buNone/>
             </a:pPr>
             <a:r>
@@ -4818,7 +4581,7 @@
           <a:bodyPr wrap="square" rtlCol="0" anchor="ctr"/>
           <a:lstStyle/>
           <a:p>
-            <a:pPr indent="0" marL="0">
+            <a:pPr marL="0" indent="0">
               <a:lnSpc>
                 <a:spcPct val="110000"/>
               </a:lnSpc>
@@ -4836,12 +4599,6 @@
               <a:t>-- สร้างตารางก่อน
 </a:t>
             </a:r>
-            <a:pPr indent="0" marL="0">
-              <a:lnSpc>
-                <a:spcPct val="110000"/>
-              </a:lnSpc>
-              <a:buNone/>
-            </a:pPr>
             <a:r>
               <a:rPr lang="en-US" sz="950" dirty="0">
                 <a:solidFill>
@@ -4854,12 +4611,6 @@
               <a:t>create table public.app_users (...);
 </a:t>
             </a:r>
-            <a:pPr indent="0" marL="0">
-              <a:lnSpc>
-                <a:spcPct val="110000"/>
-              </a:lnSpc>
-              <a:buNone/>
-            </a:pPr>
             <a:r>
               <a:rPr lang="en-US" sz="950" dirty="0">
                 <a:solidFill>
@@ -4872,12 +4623,6 @@
               <a:t>-- แล้วค่อยสร้างฟังก์ชัน
 </a:t>
             </a:r>
-            <a:pPr indent="0" marL="0">
-              <a:lnSpc>
-                <a:spcPct val="110000"/>
-              </a:lnSpc>
-              <a:buNone/>
-            </a:pPr>
             <a:r>
               <a:rPr lang="en-US" sz="950" dirty="0">
                 <a:solidFill>
@@ -4888,78 +4633,10 @@
                 <a:cs typeface="Consolas" pitchFamily="34" charset="-120"/>
               </a:rPr>
               <a:t>create function authz.current_role()
-</a:t>
-            </a:r>
-            <a:pPr indent="0" marL="0">
-              <a:lnSpc>
-                <a:spcPct val="110000"/>
-              </a:lnSpc>
-              <a:buNone/>
-            </a:pPr>
-            <a:r>
-              <a:rPr lang="en-US" sz="950" dirty="0">
-                <a:solidFill>
-                  <a:srgbClr val="86EFAC"/>
-                </a:solidFill>
-                <a:latin typeface="Consolas" pitchFamily="34" charset="0"/>
-                <a:ea typeface="Consolas" pitchFamily="34" charset="-122"/>
-                <a:cs typeface="Consolas" pitchFamily="34" charset="-120"/>
-              </a:rPr>
-              <a:t>returns app_role as $$
-</a:t>
-            </a:r>
-            <a:pPr indent="0" marL="0">
-              <a:lnSpc>
-                <a:spcPct val="110000"/>
-              </a:lnSpc>
-              <a:buNone/>
-            </a:pPr>
-            <a:r>
-              <a:rPr lang="en-US" sz="950" dirty="0">
-                <a:solidFill>
-                  <a:srgbClr val="86EFAC"/>
-                </a:solidFill>
-                <a:latin typeface="Consolas" pitchFamily="34" charset="0"/>
-                <a:ea typeface="Consolas" pitchFamily="34" charset="-122"/>
-                <a:cs typeface="Consolas" pitchFamily="34" charset="-120"/>
-              </a:rPr>
-              <a:t>  select role from public.app_users
-</a:t>
-            </a:r>
-            <a:pPr indent="0" marL="0">
-              <a:lnSpc>
-                <a:spcPct val="110000"/>
-              </a:lnSpc>
-              <a:buNone/>
-            </a:pPr>
-            <a:r>
-              <a:rPr lang="en-US" sz="950" dirty="0">
-                <a:solidFill>
-                  <a:srgbClr val="86EFAC"/>
-                </a:solidFill>
-                <a:latin typeface="Consolas" pitchFamily="34" charset="0"/>
-                <a:ea typeface="Consolas" pitchFamily="34" charset="-122"/>
-                <a:cs typeface="Consolas" pitchFamily="34" charset="-120"/>
-              </a:rPr>
-              <a:t>  where user_id = auth.uid();
-</a:t>
-            </a:r>
-            <a:pPr indent="0" marL="0">
-              <a:lnSpc>
-                <a:spcPct val="110000"/>
-              </a:lnSpc>
-              <a:buNone/>
-            </a:pPr>
-            <a:r>
-              <a:rPr lang="en-US" sz="950" dirty="0">
-                <a:solidFill>
-                  <a:srgbClr val="86EFAC"/>
-                </a:solidFill>
-                <a:latin typeface="Consolas" pitchFamily="34" charset="0"/>
-                <a:ea typeface="Consolas" pitchFamily="34" charset="-122"/>
-                <a:cs typeface="Consolas" pitchFamily="34" charset="-120"/>
-              </a:rPr>
-              <a:t>$$ language sql;</a:t>
+returns app_role as $$
+  select role from public.app_users
+  where user_id = auth.uid();
+$$ language sql;</a:t>
             </a:r>
             <a:endParaRPr lang="en-US" sz="950" dirty="0"/>
           </a:p>
@@ -4991,13 +4668,20 @@
             <a:prstDash val="solid"/>
           </a:ln>
           <a:effectLst>
-            <a:outerShdw sx="100000" sy="100000" kx="0" ky="0" algn="bl" rotWithShape="0" blurRad="76200" dist="12700" dir="5400000">
+            <a:outerShdw blurRad="76200" dist="12700" dir="5400000" algn="bl" rotWithShape="0">
               <a:srgbClr val="94A3B8">
                 <a:alpha val="16000"/>
               </a:srgbClr>
             </a:outerShdw>
           </a:effectLst>
         </p:spPr>
+        <p:txBody>
+          <a:bodyPr/>
+          <a:lstStyle/>
+          <a:p>
+            <a:endParaRPr lang="th-TH"/>
+          </a:p>
+        </p:txBody>
       </p:sp>
       <p:sp>
         <p:nvSpPr>
@@ -5018,6 +4702,13 @@
           </a:solidFill>
           <a:ln/>
         </p:spPr>
+        <p:txBody>
+          <a:bodyPr/>
+          <a:lstStyle/>
+          <a:p>
+            <a:endParaRPr lang="th-TH"/>
+          </a:p>
+        </p:txBody>
       </p:sp>
       <p:sp>
         <p:nvSpPr>
@@ -5040,7 +4731,7 @@
           <a:bodyPr wrap="square" rtlCol="0" anchor="ctr"/>
           <a:lstStyle/>
           <a:p>
-            <a:pPr indent="0" marL="0">
+            <a:pPr marL="0" indent="0">
               <a:buNone/>
             </a:pPr>
             <a:r>
@@ -5079,7 +4770,7 @@
           <a:bodyPr wrap="square" rtlCol="0" anchor="ctr"/>
           <a:lstStyle/>
           <a:p>
-            <a:pPr indent="0" marL="0">
+            <a:pPr marL="0" indent="0">
               <a:lnSpc>
                 <a:spcPct val="125000"/>
               </a:lnSpc>
@@ -5121,7 +4812,7 @@
           <a:bodyPr wrap="square" rtlCol="0" anchor="ctr"/>
           <a:lstStyle/>
           <a:p>
-            <a:pPr indent="0" marL="0">
+            <a:pPr marL="0" indent="0">
               <a:buNone/>
             </a:pPr>
             <a:r>
@@ -5155,6 +4846,7 @@
         <a:solidFill>
           <a:srgbClr val="F8FAFC"/>
         </a:solidFill>
+        <a:effectLst/>
       </p:bgPr>
     </p:bg>
     <p:spTree>
@@ -5192,11 +4884,11 @@
           <a:bodyPr wrap="square" rtlCol="0" anchor="ctr"/>
           <a:lstStyle/>
           <a:p>
-            <a:pPr indent="0" marL="0">
-              <a:buNone/>
-            </a:pPr>
-            <a:r>
-              <a:rPr lang="en-US" sz="1100" b="1" spc="200" kern="0" dirty="0">
+            <a:pPr marL="0" indent="0">
+              <a:buNone/>
+            </a:pPr>
+            <a:r>
+              <a:rPr lang="en-US" sz="1100" b="1" kern="0" spc="200" dirty="0">
                 <a:solidFill>
                   <a:srgbClr val="D97706"/>
                 </a:solidFill>
@@ -5231,7 +4923,7 @@
           <a:bodyPr wrap="square" rtlCol="0" anchor="ctr"/>
           <a:lstStyle/>
           <a:p>
-            <a:pPr indent="0" marL="0">
+            <a:pPr marL="0" indent="0">
               <a:buNone/>
             </a:pPr>
             <a:r>
@@ -5268,6 +4960,13 @@
           </a:solidFill>
           <a:ln/>
         </p:spPr>
+        <p:txBody>
+          <a:bodyPr/>
+          <a:lstStyle/>
+          <a:p>
+            <a:endParaRPr lang="th-TH"/>
+          </a:p>
+        </p:txBody>
       </p:sp>
       <p:sp>
         <p:nvSpPr>
@@ -5290,7 +4989,7 @@
           <a:bodyPr wrap="square" rtlCol="0" anchor="ctr"/>
           <a:lstStyle/>
           <a:p>
-            <a:pPr indent="0" marL="0">
+            <a:pPr marL="0" indent="0">
               <a:buNone/>
             </a:pPr>
             <a:r>
@@ -5329,7 +5028,7 @@
           <a:bodyPr wrap="square" rtlCol="0" anchor="ctr"/>
           <a:lstStyle/>
           <a:p>
-            <a:pPr algn="r" indent="0" marL="0">
+            <a:pPr marL="0" indent="0" algn="r">
               <a:buNone/>
             </a:pPr>
             <a:r>
@@ -5373,13 +5072,20 @@
             <a:prstDash val="solid"/>
           </a:ln>
           <a:effectLst>
-            <a:outerShdw sx="100000" sy="100000" kx="0" ky="0" algn="bl" rotWithShape="0" blurRad="76200" dist="12700" dir="5400000">
+            <a:outerShdw blurRad="76200" dist="12700" dir="5400000" algn="bl" rotWithShape="0">
               <a:srgbClr val="94A3B8">
                 <a:alpha val="16000"/>
               </a:srgbClr>
             </a:outerShdw>
           </a:effectLst>
         </p:spPr>
+        <p:txBody>
+          <a:bodyPr/>
+          <a:lstStyle/>
+          <a:p>
+            <a:endParaRPr lang="th-TH"/>
+          </a:p>
+        </p:txBody>
       </p:sp>
       <p:sp>
         <p:nvSpPr>
@@ -5400,6 +5106,13 @@
           </a:solidFill>
           <a:ln/>
         </p:spPr>
+        <p:txBody>
+          <a:bodyPr/>
+          <a:lstStyle/>
+          <a:p>
+            <a:endParaRPr lang="th-TH"/>
+          </a:p>
+        </p:txBody>
       </p:sp>
       <p:sp>
         <p:nvSpPr>
@@ -5422,7 +5135,7 @@
           <a:bodyPr wrap="square" rtlCol="0" anchor="ctr"/>
           <a:lstStyle/>
           <a:p>
-            <a:pPr indent="0" marL="0">
+            <a:pPr marL="0" indent="0">
               <a:buNone/>
             </a:pPr>
             <a:r>
@@ -5461,7 +5174,7 @@
           <a:bodyPr wrap="square" rtlCol="0" anchor="ctr"/>
           <a:lstStyle/>
           <a:p>
-            <a:pPr indent="0" marL="0">
+            <a:pPr marL="0" indent="0">
               <a:lnSpc>
                 <a:spcPct val="130000"/>
               </a:lnSpc>
@@ -5478,86 +5191,68 @@
               </a:rPr>
               <a:t>trigger ได้ค่า </a:t>
             </a:r>
-            <a:pPr indent="0" marL="0">
+            <a:r>
+              <a:rPr lang="en-US" sz="1200" b="1" dirty="0">
+                <a:solidFill>
+                  <a:srgbClr val="B91C1C"/>
+                </a:solidFill>
+                <a:latin typeface="Consolas" pitchFamily="34" charset="0"/>
+                <a:ea typeface="Consolas" pitchFamily="34" charset="-122"/>
+                <a:cs typeface="Consolas" pitchFamily="34" charset="-120"/>
+              </a:rPr>
+              <a:t>INSERT</a:t>
+            </a:r>
+            <a:r>
+              <a:rPr lang="en-US" sz="1200" dirty="0">
+                <a:solidFill>
+                  <a:srgbClr val="334155"/>
+                </a:solidFill>
+                <a:latin typeface="Leelawadee UI" pitchFamily="34" charset="0"/>
+                <a:ea typeface="Leelawadee UI" pitchFamily="34" charset="-122"/>
+                <a:cs typeface="Leelawadee UI" pitchFamily="34" charset="-120"/>
+              </a:rPr>
+              <a:t> (ตัวพิมพ์ใหญ่)</a:t>
+            </a:r>
+            <a:endParaRPr lang="en-US" sz="1200" dirty="0"/>
+          </a:p>
+          <a:p>
+            <a:pPr marL="0" indent="0">
               <a:lnSpc>
                 <a:spcPct val="130000"/>
               </a:lnSpc>
               <a:buNone/>
             </a:pPr>
             <a:r>
+              <a:rPr lang="en-US" sz="1200" dirty="0">
+                <a:solidFill>
+                  <a:srgbClr val="334155"/>
+                </a:solidFill>
+                <a:latin typeface="Leelawadee UI" pitchFamily="34" charset="0"/>
+                <a:ea typeface="Leelawadee UI" pitchFamily="34" charset="-122"/>
+                <a:cs typeface="Leelawadee UI" pitchFamily="34" charset="-120"/>
+              </a:rPr>
+              <a:t>แต่ชนิดข้อมูล enum เก็บเป็น </a:t>
+            </a:r>
+            <a:endParaRPr lang="en-US" sz="1200" dirty="0"/>
+          </a:p>
+          <a:p>
+            <a:pPr marL="0" indent="0">
+              <a:lnSpc>
+                <a:spcPct val="130000"/>
+              </a:lnSpc>
+              <a:buNone/>
+            </a:pPr>
+            <a:r>
               <a:rPr lang="en-US" sz="1200" b="1" dirty="0">
                 <a:solidFill>
-                  <a:srgbClr val="B91C1C"/>
+                  <a:srgbClr val="15803D"/>
                 </a:solidFill>
                 <a:latin typeface="Consolas" pitchFamily="34" charset="0"/>
                 <a:ea typeface="Consolas" pitchFamily="34" charset="-122"/>
                 <a:cs typeface="Consolas" pitchFamily="34" charset="-120"/>
               </a:rPr>
-              <a:t>INSERT</a:t>
-            </a:r>
-            <a:pPr indent="0" marL="0">
-              <a:lnSpc>
-                <a:spcPct val="130000"/>
-              </a:lnSpc>
-              <a:buNone/>
-            </a:pPr>
-            <a:r>
-              <a:rPr lang="en-US" sz="1200" dirty="0">
-                <a:solidFill>
-                  <a:srgbClr val="334155"/>
-                </a:solidFill>
-                <a:latin typeface="Leelawadee UI" pitchFamily="34" charset="0"/>
-                <a:ea typeface="Leelawadee UI" pitchFamily="34" charset="-122"/>
-                <a:cs typeface="Leelawadee UI" pitchFamily="34" charset="-120"/>
-              </a:rPr>
-              <a:t> (ตัวพิมพ์ใหญ่)</a:t>
-            </a:r>
-            <a:endParaRPr lang="en-US" sz="1200" dirty="0"/>
-          </a:p>
-          <a:p>
-            <a:pPr indent="0" marL="0">
-              <a:lnSpc>
-                <a:spcPct val="130000"/>
-              </a:lnSpc>
-              <a:buNone/>
-            </a:pPr>
-            <a:r>
-              <a:rPr lang="en-US" sz="1200" dirty="0">
-                <a:solidFill>
-                  <a:srgbClr val="334155"/>
-                </a:solidFill>
-                <a:latin typeface="Leelawadee UI" pitchFamily="34" charset="0"/>
-                <a:ea typeface="Leelawadee UI" pitchFamily="34" charset="-122"/>
-                <a:cs typeface="Leelawadee UI" pitchFamily="34" charset="-120"/>
-              </a:rPr>
-              <a:t>แต่ชนิดข้อมูล enum เก็บเป็น </a:t>
-            </a:r>
-            <a:endParaRPr lang="en-US" sz="1200" dirty="0"/>
-          </a:p>
-          <a:p>
-            <a:pPr indent="0" marL="0">
-              <a:lnSpc>
-                <a:spcPct val="130000"/>
-              </a:lnSpc>
-              <a:buNone/>
-            </a:pPr>
-            <a:r>
-              <a:rPr lang="en-US" sz="1200" b="1" dirty="0">
-                <a:solidFill>
-                  <a:srgbClr val="15803D"/>
-                </a:solidFill>
-                <a:latin typeface="Consolas" pitchFamily="34" charset="0"/>
-                <a:ea typeface="Consolas" pitchFamily="34" charset="-122"/>
-                <a:cs typeface="Consolas" pitchFamily="34" charset="-120"/>
-              </a:rPr>
               <a:t>insert</a:t>
             </a:r>
-            <a:pPr indent="0" marL="0">
-              <a:lnSpc>
-                <a:spcPct val="130000"/>
-              </a:lnSpc>
-              <a:buNone/>
-            </a:pPr>
             <a:r>
               <a:rPr lang="en-US" sz="1200" dirty="0">
                 <a:solidFill>
@@ -5594,6 +5289,13 @@
           </a:solidFill>
           <a:ln/>
         </p:spPr>
+        <p:txBody>
+          <a:bodyPr/>
+          <a:lstStyle/>
+          <a:p>
+            <a:endParaRPr lang="th-TH"/>
+          </a:p>
+        </p:txBody>
       </p:sp>
       <p:sp>
         <p:nvSpPr>
@@ -5616,7 +5318,7 @@
           <a:bodyPr wrap="square" rtlCol="0" anchor="ctr"/>
           <a:lstStyle/>
           <a:p>
-            <a:pPr indent="0" marL="0">
+            <a:pPr marL="0" indent="0">
               <a:buNone/>
             </a:pPr>
             <a:r>
@@ -5630,9 +5332,6 @@
               </a:rPr>
               <a:t>ก่อน:  </a:t>
             </a:r>
-            <a:pPr indent="0" marL="0">
-              <a:buNone/>
-            </a:pPr>
             <a:r>
               <a:rPr lang="en-US" sz="1000" dirty="0">
                 <a:solidFill>
@@ -5644,9 +5343,6 @@
               </a:rPr>
               <a:t>tg_op::trail_action</a:t>
             </a:r>
-            <a:pPr indent="0" marL="0">
-              <a:buNone/>
-            </a:pPr>
             <a:r>
               <a:rPr lang="en-US" sz="1000" dirty="0">
                 <a:solidFill>
@@ -5658,9 +5354,6 @@
               </a:rPr>
               <a:t>        แก้:  </a:t>
             </a:r>
-            <a:pPr indent="0" marL="0">
-              <a:buNone/>
-            </a:pPr>
             <a:r>
               <a:rPr lang="en-US" sz="1000" dirty="0">
                 <a:solidFill>
@@ -5702,13 +5395,20 @@
             <a:prstDash val="solid"/>
           </a:ln>
           <a:effectLst>
-            <a:outerShdw sx="100000" sy="100000" kx="0" ky="0" algn="bl" rotWithShape="0" blurRad="76200" dist="12700" dir="5400000">
+            <a:outerShdw blurRad="76200" dist="12700" dir="5400000" algn="bl" rotWithShape="0">
               <a:srgbClr val="94A3B8">
                 <a:alpha val="16000"/>
               </a:srgbClr>
             </a:outerShdw>
           </a:effectLst>
         </p:spPr>
+        <p:txBody>
+          <a:bodyPr/>
+          <a:lstStyle/>
+          <a:p>
+            <a:endParaRPr lang="th-TH"/>
+          </a:p>
+        </p:txBody>
       </p:sp>
       <p:sp>
         <p:nvSpPr>
@@ -5729,6 +5429,13 @@
           </a:solidFill>
           <a:ln/>
         </p:spPr>
+        <p:txBody>
+          <a:bodyPr/>
+          <a:lstStyle/>
+          <a:p>
+            <a:endParaRPr lang="th-TH"/>
+          </a:p>
+        </p:txBody>
       </p:sp>
       <p:sp>
         <p:nvSpPr>
@@ -5751,7 +5458,7 @@
           <a:bodyPr wrap="square" rtlCol="0" anchor="ctr"/>
           <a:lstStyle/>
           <a:p>
-            <a:pPr indent="0" marL="0">
+            <a:pPr marL="0" indent="0">
               <a:buNone/>
             </a:pPr>
             <a:r>
@@ -5790,7 +5497,7 @@
           <a:bodyPr wrap="square" rtlCol="0" anchor="ctr"/>
           <a:lstStyle/>
           <a:p>
-            <a:pPr indent="0" marL="0">
+            <a:pPr marL="0" indent="0">
               <a:lnSpc>
                 <a:spcPct val="130000"/>
               </a:lnSpc>
@@ -5810,7 +5517,7 @@
             <a:endParaRPr lang="en-US" sz="1200" dirty="0"/>
           </a:p>
           <a:p>
-            <a:pPr indent="0" marL="0">
+            <a:pPr marL="0" indent="0">
               <a:lnSpc>
                 <a:spcPct val="130000"/>
               </a:lnSpc>
@@ -5830,7 +5537,7 @@
             <a:endParaRPr lang="en-US" sz="1200" dirty="0"/>
           </a:p>
           <a:p>
-            <a:pPr indent="0" marL="0">
+            <a:pPr marL="0" indent="0">
               <a:lnSpc>
                 <a:spcPct val="130000"/>
               </a:lnSpc>
@@ -5847,12 +5554,6 @@
               </a:rPr>
               <a:t>“รับทราบแล้ว เครื่องยังไม่กลับมา”</a:t>
             </a:r>
-            <a:pPr indent="0" marL="0">
-              <a:lnSpc>
-                <a:spcPct val="130000"/>
-              </a:lnSpc>
-              <a:buNone/>
-            </a:pPr>
             <a:r>
               <a:rPr lang="en-US" sz="1200" dirty="0">
                 <a:solidFill>
@@ -5889,6 +5590,13 @@
           </a:solidFill>
           <a:ln/>
         </p:spPr>
+        <p:txBody>
+          <a:bodyPr/>
+          <a:lstStyle/>
+          <a:p>
+            <a:endParaRPr lang="th-TH"/>
+          </a:p>
+        </p:txBody>
       </p:sp>
       <p:sp>
         <p:nvSpPr>
@@ -5911,7 +5619,7 @@
           <a:bodyPr wrap="square" rtlCol="0" anchor="ctr"/>
           <a:lstStyle/>
           <a:p>
-            <a:pPr indent="0" marL="0">
+            <a:pPr marL="0" indent="0">
               <a:lnSpc>
                 <a:spcPct val="120000"/>
               </a:lnSpc>
@@ -5958,13 +5666,20 @@
             <a:prstDash val="solid"/>
           </a:ln>
           <a:effectLst>
-            <a:outerShdw sx="100000" sy="100000" kx="0" ky="0" algn="bl" rotWithShape="0" blurRad="76200" dist="12700" dir="5400000">
+            <a:outerShdw blurRad="76200" dist="12700" dir="5400000" algn="bl" rotWithShape="0">
               <a:srgbClr val="94A3B8">
                 <a:alpha val="16000"/>
               </a:srgbClr>
             </a:outerShdw>
           </a:effectLst>
         </p:spPr>
+        <p:txBody>
+          <a:bodyPr/>
+          <a:lstStyle/>
+          <a:p>
+            <a:endParaRPr lang="th-TH"/>
+          </a:p>
+        </p:txBody>
       </p:sp>
       <p:sp>
         <p:nvSpPr>
@@ -5985,6 +5700,13 @@
           </a:solidFill>
           <a:ln/>
         </p:spPr>
+        <p:txBody>
+          <a:bodyPr/>
+          <a:lstStyle/>
+          <a:p>
+            <a:endParaRPr lang="th-TH"/>
+          </a:p>
+        </p:txBody>
       </p:sp>
       <p:sp>
         <p:nvSpPr>
@@ -6007,7 +5729,7 @@
           <a:bodyPr wrap="square" rtlCol="0" anchor="ctr"/>
           <a:lstStyle/>
           <a:p>
-            <a:pPr indent="0" marL="0">
+            <a:pPr marL="0" indent="0">
               <a:buNone/>
             </a:pPr>
             <a:r>
@@ -6046,7 +5768,7 @@
           <a:bodyPr wrap="square" rtlCol="0" anchor="ctr"/>
           <a:lstStyle/>
           <a:p>
-            <a:pPr indent="0" marL="0">
+            <a:pPr marL="0" indent="0">
               <a:lnSpc>
                 <a:spcPct val="125000"/>
               </a:lnSpc>
@@ -6088,7 +5810,7 @@
           <a:bodyPr wrap="square" rtlCol="0" anchor="ctr"/>
           <a:lstStyle/>
           <a:p>
-            <a:pPr indent="0" marL="0">
+            <a:pPr marL="0" indent="0">
               <a:lnSpc>
                 <a:spcPct val="125000"/>
               </a:lnSpc>
@@ -6125,6 +5847,7 @@
         <a:solidFill>
           <a:srgbClr val="F8FAFC"/>
         </a:solidFill>
+        <a:effectLst/>
       </p:bgPr>
     </p:bg>
     <p:spTree>
@@ -6162,11 +5885,11 @@
           <a:bodyPr wrap="square" rtlCol="0" anchor="ctr"/>
           <a:lstStyle/>
           <a:p>
-            <a:pPr indent="0" marL="0">
-              <a:buNone/>
-            </a:pPr>
-            <a:r>
-              <a:rPr lang="en-US" sz="1100" b="1" spc="200" kern="0" dirty="0">
+            <a:pPr marL="0" indent="0">
+              <a:buNone/>
+            </a:pPr>
+            <a:r>
+              <a:rPr lang="en-US" sz="1100" b="1" kern="0" spc="200" dirty="0">
                 <a:solidFill>
                   <a:srgbClr val="D97706"/>
                 </a:solidFill>
@@ -6201,7 +5924,7 @@
           <a:bodyPr wrap="square" rtlCol="0" anchor="ctr"/>
           <a:lstStyle/>
           <a:p>
-            <a:pPr indent="0" marL="0">
+            <a:pPr marL="0" indent="0">
               <a:buNone/>
             </a:pPr>
             <a:r>
@@ -6238,6 +5961,13 @@
           </a:solidFill>
           <a:ln/>
         </p:spPr>
+        <p:txBody>
+          <a:bodyPr/>
+          <a:lstStyle/>
+          <a:p>
+            <a:endParaRPr lang="th-TH"/>
+          </a:p>
+        </p:txBody>
       </p:sp>
       <p:sp>
         <p:nvSpPr>
@@ -6260,7 +5990,7 @@
           <a:bodyPr wrap="square" rtlCol="0" anchor="ctr"/>
           <a:lstStyle/>
           <a:p>
-            <a:pPr indent="0" marL="0">
+            <a:pPr marL="0" indent="0">
               <a:buNone/>
             </a:pPr>
             <a:r>
@@ -6299,7 +6029,7 @@
           <a:bodyPr wrap="square" rtlCol="0" anchor="ctr"/>
           <a:lstStyle/>
           <a:p>
-            <a:pPr algn="r" indent="0" marL="0">
+            <a:pPr marL="0" indent="0" algn="r">
               <a:buNone/>
             </a:pPr>
             <a:r>
@@ -6343,6 +6073,13 @@
             <a:prstDash val="solid"/>
           </a:ln>
         </p:spPr>
+        <p:txBody>
+          <a:bodyPr/>
+          <a:lstStyle/>
+          <a:p>
+            <a:endParaRPr lang="th-TH"/>
+          </a:p>
+        </p:txBody>
       </p:sp>
       <p:sp>
         <p:nvSpPr>
@@ -6365,7 +6102,7 @@
           <a:bodyPr wrap="square" rtlCol="0" anchor="ctr"/>
           <a:lstStyle/>
           <a:p>
-            <a:pPr algn="ctr" indent="0" marL="0">
+            <a:pPr marL="0" indent="0" algn="ctr">
               <a:buNone/>
             </a:pPr>
             <a:r>
@@ -6404,7 +6141,7 @@
           <a:bodyPr wrap="square" rtlCol="0" anchor="ctr"/>
           <a:lstStyle/>
           <a:p>
-            <a:pPr indent="0" marL="0">
+            <a:pPr marL="0" indent="0">
               <a:buNone/>
             </a:pPr>
             <a:r>
@@ -6443,7 +6180,7 @@
           <a:bodyPr wrap="square" rtlCol="0" anchor="ctr"/>
           <a:lstStyle/>
           <a:p>
-            <a:pPr algn="r" indent="0" marL="0">
+            <a:pPr marL="0" indent="0" algn="r">
               <a:buNone/>
             </a:pPr>
             <a:r>
@@ -6482,7 +6219,7 @@
           <a:bodyPr wrap="square" rtlCol="0" anchor="ctr"/>
           <a:lstStyle/>
           <a:p>
-            <a:pPr algn="r" indent="0" marL="0">
+            <a:pPr marL="0" indent="0" algn="r">
               <a:buNone/>
             </a:pPr>
             <a:r>
@@ -6526,6 +6263,13 @@
             <a:prstDash val="solid"/>
           </a:ln>
         </p:spPr>
+        <p:txBody>
+          <a:bodyPr/>
+          <a:lstStyle/>
+          <a:p>
+            <a:endParaRPr lang="th-TH"/>
+          </a:p>
+        </p:txBody>
       </p:sp>
       <p:sp>
         <p:nvSpPr>
@@ -6548,7 +6292,7 @@
           <a:bodyPr wrap="square" rtlCol="0" anchor="ctr"/>
           <a:lstStyle/>
           <a:p>
-            <a:pPr algn="ctr" indent="0" marL="0">
+            <a:pPr marL="0" indent="0" algn="ctr">
               <a:buNone/>
             </a:pPr>
             <a:r>
@@ -6587,7 +6331,7 @@
           <a:bodyPr wrap="square" rtlCol="0" anchor="ctr"/>
           <a:lstStyle/>
           <a:p>
-            <a:pPr indent="0" marL="0">
+            <a:pPr marL="0" indent="0">
               <a:buNone/>
             </a:pPr>
             <a:r>
@@ -6626,7 +6370,7 @@
           <a:bodyPr wrap="square" rtlCol="0" anchor="ctr"/>
           <a:lstStyle/>
           <a:p>
-            <a:pPr algn="r" indent="0" marL="0">
+            <a:pPr marL="0" indent="0" algn="r">
               <a:buNone/>
             </a:pPr>
             <a:r>
@@ -6665,7 +6409,7 @@
           <a:bodyPr wrap="square" rtlCol="0" anchor="ctr"/>
           <a:lstStyle/>
           <a:p>
-            <a:pPr algn="r" indent="0" marL="0">
+            <a:pPr marL="0" indent="0" algn="r">
               <a:buNone/>
             </a:pPr>
             <a:r>
@@ -6709,6 +6453,13 @@
             <a:prstDash val="solid"/>
           </a:ln>
         </p:spPr>
+        <p:txBody>
+          <a:bodyPr/>
+          <a:lstStyle/>
+          <a:p>
+            <a:endParaRPr lang="th-TH"/>
+          </a:p>
+        </p:txBody>
       </p:sp>
       <p:sp>
         <p:nvSpPr>
@@ -6731,7 +6482,7 @@
           <a:bodyPr wrap="square" rtlCol="0" anchor="ctr"/>
           <a:lstStyle/>
           <a:p>
-            <a:pPr algn="ctr" indent="0" marL="0">
+            <a:pPr marL="0" indent="0" algn="ctr">
               <a:buNone/>
             </a:pPr>
             <a:r>
@@ -6770,7 +6521,7 @@
           <a:bodyPr wrap="square" rtlCol="0" anchor="ctr"/>
           <a:lstStyle/>
           <a:p>
-            <a:pPr indent="0" marL="0">
+            <a:pPr marL="0" indent="0">
               <a:buNone/>
             </a:pPr>
             <a:r>
@@ -6809,7 +6560,7 @@
           <a:bodyPr wrap="square" rtlCol="0" anchor="ctr"/>
           <a:lstStyle/>
           <a:p>
-            <a:pPr algn="r" indent="0" marL="0">
+            <a:pPr marL="0" indent="0" algn="r">
               <a:buNone/>
             </a:pPr>
             <a:r>
@@ -6848,7 +6599,7 @@
           <a:bodyPr wrap="square" rtlCol="0" anchor="ctr"/>
           <a:lstStyle/>
           <a:p>
-            <a:pPr algn="r" indent="0" marL="0">
+            <a:pPr marL="0" indent="0" algn="r">
               <a:buNone/>
             </a:pPr>
             <a:r>
@@ -6892,6 +6643,13 @@
             <a:prstDash val="solid"/>
           </a:ln>
         </p:spPr>
+        <p:txBody>
+          <a:bodyPr/>
+          <a:lstStyle/>
+          <a:p>
+            <a:endParaRPr lang="th-TH"/>
+          </a:p>
+        </p:txBody>
       </p:sp>
       <p:sp>
         <p:nvSpPr>
@@ -6914,7 +6672,7 @@
           <a:bodyPr wrap="square" rtlCol="0" anchor="ctr"/>
           <a:lstStyle/>
           <a:p>
-            <a:pPr algn="ctr" indent="0" marL="0">
+            <a:pPr marL="0" indent="0" algn="ctr">
               <a:buNone/>
             </a:pPr>
             <a:r>
@@ -6953,7 +6711,7 @@
           <a:bodyPr wrap="square" rtlCol="0" anchor="ctr"/>
           <a:lstStyle/>
           <a:p>
-            <a:pPr indent="0" marL="0">
+            <a:pPr marL="0" indent="0">
               <a:buNone/>
             </a:pPr>
             <a:r>
@@ -6992,7 +6750,7 @@
           <a:bodyPr wrap="square" rtlCol="0" anchor="ctr"/>
           <a:lstStyle/>
           <a:p>
-            <a:pPr algn="r" indent="0" marL="0">
+            <a:pPr marL="0" indent="0" algn="r">
               <a:buNone/>
             </a:pPr>
             <a:r>
@@ -7031,7 +6789,7 @@
           <a:bodyPr wrap="square" rtlCol="0" anchor="ctr"/>
           <a:lstStyle/>
           <a:p>
-            <a:pPr algn="r" indent="0" marL="0">
+            <a:pPr marL="0" indent="0" algn="r">
               <a:buNone/>
             </a:pPr>
             <a:r>
@@ -7075,6 +6833,13 @@
             <a:prstDash val="solid"/>
           </a:ln>
         </p:spPr>
+        <p:txBody>
+          <a:bodyPr/>
+          <a:lstStyle/>
+          <a:p>
+            <a:endParaRPr lang="th-TH"/>
+          </a:p>
+        </p:txBody>
       </p:sp>
       <p:sp>
         <p:nvSpPr>
@@ -7097,7 +6862,7 @@
           <a:bodyPr wrap="square" rtlCol="0" anchor="ctr"/>
           <a:lstStyle/>
           <a:p>
-            <a:pPr algn="ctr" indent="0" marL="0">
+            <a:pPr marL="0" indent="0" algn="ctr">
               <a:buNone/>
             </a:pPr>
             <a:r>
@@ -7136,7 +6901,7 @@
           <a:bodyPr wrap="square" rtlCol="0" anchor="ctr"/>
           <a:lstStyle/>
           <a:p>
-            <a:pPr indent="0" marL="0">
+            <a:pPr marL="0" indent="0">
               <a:buNone/>
             </a:pPr>
             <a:r>
@@ -7175,7 +6940,7 @@
           <a:bodyPr wrap="square" rtlCol="0" anchor="ctr"/>
           <a:lstStyle/>
           <a:p>
-            <a:pPr algn="r" indent="0" marL="0">
+            <a:pPr marL="0" indent="0" algn="r">
               <a:buNone/>
             </a:pPr>
             <a:r>
@@ -7214,7 +6979,7 @@
           <a:bodyPr wrap="square" rtlCol="0" anchor="ctr"/>
           <a:lstStyle/>
           <a:p>
-            <a:pPr algn="r" indent="0" marL="0">
+            <a:pPr marL="0" indent="0" algn="r">
               <a:buNone/>
             </a:pPr>
             <a:r>
@@ -7258,6 +7023,13 @@
             <a:prstDash val="solid"/>
           </a:ln>
         </p:spPr>
+        <p:txBody>
+          <a:bodyPr/>
+          <a:lstStyle/>
+          <a:p>
+            <a:endParaRPr lang="th-TH"/>
+          </a:p>
+        </p:txBody>
       </p:sp>
       <p:sp>
         <p:nvSpPr>
@@ -7280,7 +7052,7 @@
           <a:bodyPr wrap="square" rtlCol="0" anchor="ctr"/>
           <a:lstStyle/>
           <a:p>
-            <a:pPr algn="ctr" indent="0" marL="0">
+            <a:pPr marL="0" indent="0" algn="ctr">
               <a:buNone/>
             </a:pPr>
             <a:r>
@@ -7319,7 +7091,7 @@
           <a:bodyPr wrap="square" rtlCol="0" anchor="ctr"/>
           <a:lstStyle/>
           <a:p>
-            <a:pPr indent="0" marL="0">
+            <a:pPr marL="0" indent="0">
               <a:buNone/>
             </a:pPr>
             <a:r>
@@ -7358,7 +7130,7 @@
           <a:bodyPr wrap="square" rtlCol="0" anchor="ctr"/>
           <a:lstStyle/>
           <a:p>
-            <a:pPr algn="r" indent="0" marL="0">
+            <a:pPr marL="0" indent="0" algn="r">
               <a:buNone/>
             </a:pPr>
             <a:r>
@@ -7397,7 +7169,7 @@
           <a:bodyPr wrap="square" rtlCol="0" anchor="ctr"/>
           <a:lstStyle/>
           <a:p>
-            <a:pPr algn="r" indent="0" marL="0">
+            <a:pPr marL="0" indent="0" algn="r">
               <a:buNone/>
             </a:pPr>
             <a:r>
@@ -7441,6 +7213,13 @@
             <a:prstDash val="solid"/>
           </a:ln>
         </p:spPr>
+        <p:txBody>
+          <a:bodyPr/>
+          <a:lstStyle/>
+          <a:p>
+            <a:endParaRPr lang="th-TH"/>
+          </a:p>
+        </p:txBody>
       </p:sp>
       <p:sp>
         <p:nvSpPr>
@@ -7463,7 +7242,7 @@
           <a:bodyPr wrap="square" rtlCol="0" anchor="ctr"/>
           <a:lstStyle/>
           <a:p>
-            <a:pPr algn="ctr" indent="0" marL="0">
+            <a:pPr marL="0" indent="0" algn="ctr">
               <a:buNone/>
             </a:pPr>
             <a:r>
@@ -7502,7 +7281,7 @@
           <a:bodyPr wrap="square" rtlCol="0" anchor="ctr"/>
           <a:lstStyle/>
           <a:p>
-            <a:pPr indent="0" marL="0">
+            <a:pPr marL="0" indent="0">
               <a:buNone/>
             </a:pPr>
             <a:r>
@@ -7541,7 +7320,7 @@
           <a:bodyPr wrap="square" rtlCol="0" anchor="ctr"/>
           <a:lstStyle/>
           <a:p>
-            <a:pPr algn="r" indent="0" marL="0">
+            <a:pPr marL="0" indent="0" algn="r">
               <a:buNone/>
             </a:pPr>
             <a:r>
@@ -7580,7 +7359,7 @@
           <a:bodyPr wrap="square" rtlCol="0" anchor="ctr"/>
           <a:lstStyle/>
           <a:p>
-            <a:pPr algn="r" indent="0" marL="0">
+            <a:pPr marL="0" indent="0" algn="r">
               <a:buNone/>
             </a:pPr>
             <a:r>
@@ -7624,6 +7403,13 @@
             <a:prstDash val="solid"/>
           </a:ln>
         </p:spPr>
+        <p:txBody>
+          <a:bodyPr/>
+          <a:lstStyle/>
+          <a:p>
+            <a:endParaRPr lang="th-TH"/>
+          </a:p>
+        </p:txBody>
       </p:sp>
       <p:sp>
         <p:nvSpPr>
@@ -7646,7 +7432,7 @@
           <a:bodyPr wrap="square" rtlCol="0" anchor="ctr"/>
           <a:lstStyle/>
           <a:p>
-            <a:pPr algn="ctr" indent="0" marL="0">
+            <a:pPr marL="0" indent="0" algn="ctr">
               <a:buNone/>
             </a:pPr>
             <a:r>
@@ -7685,7 +7471,7 @@
           <a:bodyPr wrap="square" rtlCol="0" anchor="ctr"/>
           <a:lstStyle/>
           <a:p>
-            <a:pPr indent="0" marL="0">
+            <a:pPr marL="0" indent="0">
               <a:buNone/>
             </a:pPr>
             <a:r>
@@ -7724,7 +7510,7 @@
           <a:bodyPr wrap="square" rtlCol="0" anchor="ctr"/>
           <a:lstStyle/>
           <a:p>
-            <a:pPr algn="r" indent="0" marL="0">
+            <a:pPr marL="0" indent="0" algn="r">
               <a:buNone/>
             </a:pPr>
             <a:r>
@@ -7763,7 +7549,7 @@
           <a:bodyPr wrap="square" rtlCol="0" anchor="ctr"/>
           <a:lstStyle/>
           <a:p>
-            <a:pPr algn="r" indent="0" marL="0">
+            <a:pPr marL="0" indent="0" algn="r">
               <a:buNone/>
             </a:pPr>
             <a:r>
@@ -7802,6 +7588,13 @@
           </a:solidFill>
           <a:ln/>
         </p:spPr>
+        <p:txBody>
+          <a:bodyPr/>
+          <a:lstStyle/>
+          <a:p>
+            <a:endParaRPr lang="th-TH"/>
+          </a:p>
+        </p:txBody>
       </p:sp>
       <p:sp>
         <p:nvSpPr>
@@ -7824,7 +7617,7 @@
           <a:bodyPr wrap="square" rtlCol="0" anchor="ctr"/>
           <a:lstStyle/>
           <a:p>
-            <a:pPr indent="0" marL="0">
+            <a:pPr marL="0" indent="0">
               <a:buNone/>
             </a:pPr>
             <a:r>
@@ -7863,7 +7656,7 @@
           <a:bodyPr wrap="square" rtlCol="0" anchor="ctr"/>
           <a:lstStyle/>
           <a:p>
-            <a:pPr indent="0" marL="0">
+            <a:pPr marL="0" indent="0">
               <a:buNone/>
             </a:pPr>
             <a:r>
@@ -7902,7 +7695,7 @@
           <a:bodyPr wrap="square" rtlCol="0" anchor="ctr"/>
           <a:lstStyle/>
           <a:p>
-            <a:pPr indent="0" marL="0">
+            <a:pPr marL="0" indent="0">
               <a:lnSpc>
                 <a:spcPct val="120000"/>
               </a:lnSpc>
@@ -7939,6 +7732,7 @@
         <a:solidFill>
           <a:srgbClr val="F8FAFC"/>
         </a:solidFill>
+        <a:effectLst/>
       </p:bgPr>
     </p:bg>
     <p:spTree>
@@ -7976,11 +7770,11 @@
           <a:bodyPr wrap="square" rtlCol="0" anchor="ctr"/>
           <a:lstStyle/>
           <a:p>
-            <a:pPr indent="0" marL="0">
-              <a:buNone/>
-            </a:pPr>
-            <a:r>
-              <a:rPr lang="en-US" sz="1100" b="1" spc="200" kern="0" dirty="0">
+            <a:pPr marL="0" indent="0">
+              <a:buNone/>
+            </a:pPr>
+            <a:r>
+              <a:rPr lang="en-US" sz="1100" b="1" kern="0" spc="200" dirty="0">
                 <a:solidFill>
                   <a:srgbClr val="D97706"/>
                 </a:solidFill>
@@ -8015,7 +7809,7 @@
           <a:bodyPr wrap="square" rtlCol="0" anchor="ctr"/>
           <a:lstStyle/>
           <a:p>
-            <a:pPr indent="0" marL="0">
+            <a:pPr marL="0" indent="0">
               <a:buNone/>
             </a:pPr>
             <a:r>
@@ -8052,6 +7846,13 @@
           </a:solidFill>
           <a:ln/>
         </p:spPr>
+        <p:txBody>
+          <a:bodyPr/>
+          <a:lstStyle/>
+          <a:p>
+            <a:endParaRPr lang="th-TH"/>
+          </a:p>
+        </p:txBody>
       </p:sp>
       <p:sp>
         <p:nvSpPr>
@@ -8074,7 +7875,7 @@
           <a:bodyPr wrap="square" rtlCol="0" anchor="ctr"/>
           <a:lstStyle/>
           <a:p>
-            <a:pPr indent="0" marL="0">
+            <a:pPr marL="0" indent="0">
               <a:buNone/>
             </a:pPr>
             <a:r>
@@ -8113,7 +7914,7 @@
           <a:bodyPr wrap="square" rtlCol="0" anchor="ctr"/>
           <a:lstStyle/>
           <a:p>
-            <a:pPr algn="r" indent="0" marL="0">
+            <a:pPr marL="0" indent="0" algn="r">
               <a:buNone/>
             </a:pPr>
             <a:r>
@@ -8157,13 +7958,20 @@
             <a:prstDash val="solid"/>
           </a:ln>
           <a:effectLst>
-            <a:outerShdw sx="100000" sy="100000" kx="0" ky="0" algn="bl" rotWithShape="0" blurRad="76200" dist="12700" dir="5400000">
+            <a:outerShdw blurRad="76200" dist="12700" dir="5400000" algn="bl" rotWithShape="0">
               <a:srgbClr val="94A3B8">
                 <a:alpha val="16000"/>
               </a:srgbClr>
             </a:outerShdw>
           </a:effectLst>
         </p:spPr>
+        <p:txBody>
+          <a:bodyPr/>
+          <a:lstStyle/>
+          <a:p>
+            <a:endParaRPr lang="th-TH"/>
+          </a:p>
+        </p:txBody>
       </p:sp>
       <p:sp>
         <p:nvSpPr>
@@ -8184,6 +7992,13 @@
           </a:solidFill>
           <a:ln/>
         </p:spPr>
+        <p:txBody>
+          <a:bodyPr/>
+          <a:lstStyle/>
+          <a:p>
+            <a:endParaRPr lang="th-TH"/>
+          </a:p>
+        </p:txBody>
       </p:sp>
       <p:sp>
         <p:nvSpPr>
@@ -8206,7 +8021,7 @@
           <a:bodyPr wrap="square" rtlCol="0" anchor="ctr"/>
           <a:lstStyle/>
           <a:p>
-            <a:pPr indent="0" marL="0">
+            <a:pPr marL="0" indent="0">
               <a:buNone/>
             </a:pPr>
             <a:r>
@@ -8245,7 +8060,7 @@
           <a:bodyPr wrap="square" rtlCol="0" anchor="ctr"/>
           <a:lstStyle/>
           <a:p>
-            <a:pPr indent="0" marL="0">
+            <a:pPr marL="0" indent="0">
               <a:lnSpc>
                 <a:spcPct val="115000"/>
               </a:lnSpc>
@@ -8287,7 +8102,7 @@
           <a:bodyPr wrap="square" rtlCol="0" anchor="ctr"/>
           <a:lstStyle/>
           <a:p>
-            <a:pPr indent="0" marL="0">
+            <a:pPr marL="0" indent="0">
               <a:buNone/>
             </a:pPr>
             <a:r>
@@ -8299,21 +8114,7 @@
                 <a:ea typeface="Leelawadee UI" pitchFamily="34" charset="-122"/>
                 <a:cs typeface="Leelawadee UI" pitchFamily="34" charset="-120"/>
               </a:rPr>
-              <a:t>→ </a:t>
-            </a:r>
-            <a:pPr indent="0" marL="0">
-              <a:buNone/>
-            </a:pPr>
-            <a:r>
-              <a:rPr lang="en-US" sz="1050" b="1" dirty="0">
-                <a:solidFill>
-                  <a:srgbClr val="B91C1C"/>
-                </a:solidFill>
-                <a:latin typeface="Leelawadee UI" pitchFamily="34" charset="0"/>
-                <a:ea typeface="Leelawadee UI" pitchFamily="34" charset="-122"/>
-                <a:cs typeface="Leelawadee UI" pitchFamily="34" charset="-120"/>
-              </a:rPr>
-              <a:t>ต่อโปรเจกต์จริงแล้วรันซ้ำ</a:t>
+              <a:t>→ ต่อโปรเจกต์จริงแล้วรันซ้ำ</a:t>
             </a:r>
             <a:endParaRPr lang="en-US" sz="1050" dirty="0"/>
           </a:p>
@@ -8345,13 +8146,20 @@
             <a:prstDash val="solid"/>
           </a:ln>
           <a:effectLst>
-            <a:outerShdw sx="100000" sy="100000" kx="0" ky="0" algn="bl" rotWithShape="0" blurRad="76200" dist="12700" dir="5400000">
+            <a:outerShdw blurRad="76200" dist="12700" dir="5400000" algn="bl" rotWithShape="0">
               <a:srgbClr val="94A3B8">
                 <a:alpha val="16000"/>
               </a:srgbClr>
             </a:outerShdw>
           </a:effectLst>
         </p:spPr>
+        <p:txBody>
+          <a:bodyPr/>
+          <a:lstStyle/>
+          <a:p>
+            <a:endParaRPr lang="th-TH"/>
+          </a:p>
+        </p:txBody>
       </p:sp>
       <p:sp>
         <p:nvSpPr>
@@ -8372,6 +8180,13 @@
           </a:solidFill>
           <a:ln/>
         </p:spPr>
+        <p:txBody>
+          <a:bodyPr/>
+          <a:lstStyle/>
+          <a:p>
+            <a:endParaRPr lang="th-TH"/>
+          </a:p>
+        </p:txBody>
       </p:sp>
       <p:sp>
         <p:nvSpPr>
@@ -8394,7 +8209,7 @@
           <a:bodyPr wrap="square" rtlCol="0" anchor="ctr"/>
           <a:lstStyle/>
           <a:p>
-            <a:pPr indent="0" marL="0">
+            <a:pPr marL="0" indent="0">
               <a:buNone/>
             </a:pPr>
             <a:r>
@@ -8433,7 +8248,7 @@
           <a:bodyPr wrap="square" rtlCol="0" anchor="ctr"/>
           <a:lstStyle/>
           <a:p>
-            <a:pPr indent="0" marL="0">
+            <a:pPr marL="0" indent="0">
               <a:lnSpc>
                 <a:spcPct val="115000"/>
               </a:lnSpc>
@@ -8475,7 +8290,7 @@
           <a:bodyPr wrap="square" rtlCol="0" anchor="ctr"/>
           <a:lstStyle/>
           <a:p>
-            <a:pPr indent="0" marL="0">
+            <a:pPr marL="0" indent="0">
               <a:buNone/>
             </a:pPr>
             <a:r>
@@ -8487,21 +8302,7 @@
                 <a:ea typeface="Leelawadee UI" pitchFamily="34" charset="-122"/>
                 <a:cs typeface="Leelawadee UI" pitchFamily="34" charset="-120"/>
               </a:rPr>
-              <a:t>→ </a:t>
-            </a:r>
-            <a:pPr indent="0" marL="0">
-              <a:buNone/>
-            </a:pPr>
-            <a:r>
-              <a:rPr lang="en-US" sz="1050" b="1" dirty="0">
-                <a:solidFill>
-                  <a:srgbClr val="D97706"/>
-                </a:solidFill>
-                <a:latin typeface="Leelawadee UI" pitchFamily="34" charset="0"/>
-                <a:ea typeface="Leelawadee UI" pitchFamily="34" charset="-122"/>
-                <a:cs typeface="Leelawadee UI" pitchFamily="34" charset="-120"/>
-              </a:rPr>
-              <a:t>ต้องทดสอบกับผู้ใช้จริง</a:t>
+              <a:t>→ ต้องทดสอบกับผู้ใช้จริง</a:t>
             </a:r>
             <a:endParaRPr lang="en-US" sz="1050" dirty="0"/>
           </a:p>
@@ -8533,13 +8334,20 @@
             <a:prstDash val="solid"/>
           </a:ln>
           <a:effectLst>
-            <a:outerShdw sx="100000" sy="100000" kx="0" ky="0" algn="bl" rotWithShape="0" blurRad="76200" dist="12700" dir="5400000">
+            <a:outerShdw blurRad="76200" dist="12700" dir="5400000" algn="bl" rotWithShape="0">
               <a:srgbClr val="94A3B8">
                 <a:alpha val="16000"/>
               </a:srgbClr>
             </a:outerShdw>
           </a:effectLst>
         </p:spPr>
+        <p:txBody>
+          <a:bodyPr/>
+          <a:lstStyle/>
+          <a:p>
+            <a:endParaRPr lang="th-TH"/>
+          </a:p>
+        </p:txBody>
       </p:sp>
       <p:sp>
         <p:nvSpPr>
@@ -8560,6 +8368,13 @@
           </a:solidFill>
           <a:ln/>
         </p:spPr>
+        <p:txBody>
+          <a:bodyPr/>
+          <a:lstStyle/>
+          <a:p>
+            <a:endParaRPr lang="th-TH"/>
+          </a:p>
+        </p:txBody>
       </p:sp>
       <p:sp>
         <p:nvSpPr>
@@ -8582,7 +8397,7 @@
           <a:bodyPr wrap="square" rtlCol="0" anchor="ctr"/>
           <a:lstStyle/>
           <a:p>
-            <a:pPr indent="0" marL="0">
+            <a:pPr marL="0" indent="0">
               <a:buNone/>
             </a:pPr>
             <a:r>
@@ -8621,7 +8436,7 @@
           <a:bodyPr wrap="square" rtlCol="0" anchor="ctr"/>
           <a:lstStyle/>
           <a:p>
-            <a:pPr indent="0" marL="0">
+            <a:pPr marL="0" indent="0">
               <a:lnSpc>
                 <a:spcPct val="115000"/>
               </a:lnSpc>
@@ -8663,7 +8478,7 @@
           <a:bodyPr wrap="square" rtlCol="0" anchor="ctr"/>
           <a:lstStyle/>
           <a:p>
-            <a:pPr indent="0" marL="0">
+            <a:pPr marL="0" indent="0">
               <a:buNone/>
             </a:pPr>
             <a:r>
@@ -8675,21 +8490,7 @@
                 <a:ea typeface="Leelawadee UI" pitchFamily="34" charset="-122"/>
                 <a:cs typeface="Leelawadee UI" pitchFamily="34" charset="-120"/>
               </a:rPr>
-              <a:t>→ </a:t>
-            </a:r>
-            <a:pPr indent="0" marL="0">
-              <a:buNone/>
-            </a:pPr>
-            <a:r>
-              <a:rPr lang="en-US" sz="1050" b="1" dirty="0">
-                <a:solidFill>
-                  <a:srgbClr val="0369A1"/>
-                </a:solidFill>
-                <a:latin typeface="Leelawadee UI" pitchFamily="34" charset="0"/>
-                <a:ea typeface="Leelawadee UI" pitchFamily="34" charset="-122"/>
-                <a:cs typeface="Leelawadee UI" pitchFamily="34" charset="-120"/>
-              </a:rPr>
-              <a:t>ต่อกับ PLC เมื่อมีอุปกรณ์จริง</a:t>
+              <a:t>→ ต่อกับ PLC เมื่อมีอุปกรณ์จริง</a:t>
             </a:r>
             <a:endParaRPr lang="en-US" sz="1050" dirty="0"/>
           </a:p>
@@ -8721,13 +8522,20 @@
             <a:prstDash val="solid"/>
           </a:ln>
           <a:effectLst>
-            <a:outerShdw sx="100000" sy="100000" kx="0" ky="0" algn="bl" rotWithShape="0" blurRad="76200" dist="12700" dir="5400000">
+            <a:outerShdw blurRad="76200" dist="12700" dir="5400000" algn="bl" rotWithShape="0">
               <a:srgbClr val="94A3B8">
                 <a:alpha val="16000"/>
               </a:srgbClr>
             </a:outerShdw>
           </a:effectLst>
         </p:spPr>
+        <p:txBody>
+          <a:bodyPr/>
+          <a:lstStyle/>
+          <a:p>
+            <a:endParaRPr lang="th-TH"/>
+          </a:p>
+        </p:txBody>
       </p:sp>
       <p:sp>
         <p:nvSpPr>
@@ -8748,6 +8556,13 @@
           </a:solidFill>
           <a:ln/>
         </p:spPr>
+        <p:txBody>
+          <a:bodyPr/>
+          <a:lstStyle/>
+          <a:p>
+            <a:endParaRPr lang="th-TH"/>
+          </a:p>
+        </p:txBody>
       </p:sp>
       <p:sp>
         <p:nvSpPr>
@@ -8770,7 +8585,7 @@
           <a:bodyPr wrap="square" rtlCol="0" anchor="ctr"/>
           <a:lstStyle/>
           <a:p>
-            <a:pPr indent="0" marL="0">
+            <a:pPr marL="0" indent="0">
               <a:buNone/>
             </a:pPr>
             <a:r>
@@ -8809,7 +8624,7 @@
           <a:bodyPr wrap="square" rtlCol="0" anchor="ctr"/>
           <a:lstStyle/>
           <a:p>
-            <a:pPr indent="0" marL="0">
+            <a:pPr marL="0" indent="0">
               <a:lnSpc>
                 <a:spcPct val="115000"/>
               </a:lnSpc>
@@ -8851,7 +8666,7 @@
           <a:bodyPr wrap="square" rtlCol="0" anchor="ctr"/>
           <a:lstStyle/>
           <a:p>
-            <a:pPr indent="0" marL="0">
+            <a:pPr marL="0" indent="0">
               <a:buNone/>
             </a:pPr>
             <a:r>
@@ -8863,21 +8678,7 @@
                 <a:ea typeface="Leelawadee UI" pitchFamily="34" charset="-122"/>
                 <a:cs typeface="Leelawadee UI" pitchFamily="34" charset="-120"/>
               </a:rPr>
-              <a:t>→ </a:t>
-            </a:r>
-            <a:pPr indent="0" marL="0">
-              <a:buNone/>
-            </a:pPr>
-            <a:r>
-              <a:rPr lang="en-US" sz="1050" b="1" dirty="0">
-                <a:solidFill>
-                  <a:srgbClr val="6D28D9"/>
-                </a:solidFill>
-                <a:latin typeface="Leelawadee UI" pitchFamily="34" charset="0"/>
-                <a:ea typeface="Leelawadee UI" pitchFamily="34" charset="-122"/>
-                <a:cs typeface="Leelawadee UI" pitchFamily="34" charset="-120"/>
-              </a:rPr>
-              <a:t>ใช้ฟังก์ชันที่ห่อธุรกรรมเดียว</a:t>
+              <a:t>→ ใช้ฟังก์ชันที่ห่อธุรกรรมเดียว</a:t>
             </a:r>
             <a:endParaRPr lang="en-US" sz="1050" dirty="0"/>
           </a:p>
@@ -8909,13 +8710,20 @@
             <a:prstDash val="solid"/>
           </a:ln>
           <a:effectLst>
-            <a:outerShdw sx="100000" sy="100000" kx="0" ky="0" algn="bl" rotWithShape="0" blurRad="76200" dist="12700" dir="5400000">
+            <a:outerShdw blurRad="76200" dist="12700" dir="5400000" algn="bl" rotWithShape="0">
               <a:srgbClr val="94A3B8">
                 <a:alpha val="16000"/>
               </a:srgbClr>
             </a:outerShdw>
           </a:effectLst>
         </p:spPr>
+        <p:txBody>
+          <a:bodyPr/>
+          <a:lstStyle/>
+          <a:p>
+            <a:endParaRPr lang="th-TH"/>
+          </a:p>
+        </p:txBody>
       </p:sp>
       <p:sp>
         <p:nvSpPr>
@@ -8936,6 +8744,13 @@
           </a:solidFill>
           <a:ln/>
         </p:spPr>
+        <p:txBody>
+          <a:bodyPr/>
+          <a:lstStyle/>
+          <a:p>
+            <a:endParaRPr lang="th-TH"/>
+          </a:p>
+        </p:txBody>
       </p:sp>
       <p:sp>
         <p:nvSpPr>
@@ -8958,7 +8773,7 @@
           <a:bodyPr wrap="square" rtlCol="0" anchor="ctr"/>
           <a:lstStyle/>
           <a:p>
-            <a:pPr indent="0" marL="0">
+            <a:pPr marL="0" indent="0">
               <a:buNone/>
             </a:pPr>
             <a:r>
@@ -8997,7 +8812,7 @@
           <a:bodyPr wrap="square" rtlCol="0" anchor="ctr"/>
           <a:lstStyle/>
           <a:p>
-            <a:pPr indent="0" marL="0">
+            <a:pPr marL="0" indent="0">
               <a:lnSpc>
                 <a:spcPct val="115000"/>
               </a:lnSpc>
@@ -9039,7 +8854,7 @@
           <a:bodyPr wrap="square" rtlCol="0" anchor="ctr"/>
           <a:lstStyle/>
           <a:p>
-            <a:pPr indent="0" marL="0">
+            <a:pPr marL="0" indent="0">
               <a:buNone/>
             </a:pPr>
             <a:r>
@@ -9051,21 +8866,7 @@
                 <a:ea typeface="Leelawadee UI" pitchFamily="34" charset="-122"/>
                 <a:cs typeface="Leelawadee UI" pitchFamily="34" charset="-120"/>
               </a:rPr>
-              <a:t>→ </a:t>
-            </a:r>
-            <a:pPr indent="0" marL="0">
-              <a:buNone/>
-            </a:pPr>
-            <a:r>
-              <a:rPr lang="en-US" sz="1050" b="1" dirty="0">
-                <a:solidFill>
-                  <a:srgbClr val="B91C1C"/>
-                </a:solidFill>
-                <a:latin typeface="Leelawadee UI" pitchFamily="34" charset="0"/>
-                <a:ea typeface="Leelawadee UI" pitchFamily="34" charset="-122"/>
-                <a:cs typeface="Leelawadee UI" pitchFamily="34" charset="-120"/>
-              </a:rPr>
-              <a:t>ต้องลบตารางนี้ก่อนใช้จริง</a:t>
+              <a:t>→ ต้องลบตารางนี้ก่อนใช้จริง</a:t>
             </a:r>
             <a:endParaRPr lang="en-US" sz="1050" dirty="0"/>
           </a:p>
@@ -9097,13 +8898,20 @@
             <a:prstDash val="solid"/>
           </a:ln>
           <a:effectLst>
-            <a:outerShdw sx="100000" sy="100000" kx="0" ky="0" algn="bl" rotWithShape="0" blurRad="76200" dist="12700" dir="5400000">
+            <a:outerShdw blurRad="76200" dist="12700" dir="5400000" algn="bl" rotWithShape="0">
               <a:srgbClr val="94A3B8">
                 <a:alpha val="16000"/>
               </a:srgbClr>
             </a:outerShdw>
           </a:effectLst>
         </p:spPr>
+        <p:txBody>
+          <a:bodyPr/>
+          <a:lstStyle/>
+          <a:p>
+            <a:endParaRPr lang="th-TH"/>
+          </a:p>
+        </p:txBody>
       </p:sp>
       <p:sp>
         <p:nvSpPr>
@@ -9124,6 +8932,13 @@
           </a:solidFill>
           <a:ln/>
         </p:spPr>
+        <p:txBody>
+          <a:bodyPr/>
+          <a:lstStyle/>
+          <a:p>
+            <a:endParaRPr lang="th-TH"/>
+          </a:p>
+        </p:txBody>
       </p:sp>
       <p:sp>
         <p:nvSpPr>
@@ -9146,7 +8961,7 @@
           <a:bodyPr wrap="square" rtlCol="0" anchor="ctr"/>
           <a:lstStyle/>
           <a:p>
-            <a:pPr indent="0" marL="0">
+            <a:pPr marL="0" indent="0">
               <a:buNone/>
             </a:pPr>
             <a:r>
@@ -9185,7 +9000,7 @@
           <a:bodyPr wrap="square" rtlCol="0" anchor="ctr"/>
           <a:lstStyle/>
           <a:p>
-            <a:pPr indent="0" marL="0">
+            <a:pPr marL="0" indent="0">
               <a:lnSpc>
                 <a:spcPct val="115000"/>
               </a:lnSpc>
@@ -9227,7 +9042,7 @@
           <a:bodyPr wrap="square" rtlCol="0" anchor="ctr"/>
           <a:lstStyle/>
           <a:p>
-            <a:pPr indent="0" marL="0">
+            <a:pPr marL="0" indent="0">
               <a:buNone/>
             </a:pPr>
             <a:r>
@@ -9239,21 +9054,7 @@
                 <a:ea typeface="Leelawadee UI" pitchFamily="34" charset="-122"/>
                 <a:cs typeface="Leelawadee UI" pitchFamily="34" charset="-120"/>
               </a:rPr>
-              <a:t>→ </a:t>
-            </a:r>
-            <a:pPr indent="0" marL="0">
-              <a:buNone/>
-            </a:pPr>
-            <a:r>
-              <a:rPr lang="en-US" sz="1050" b="1" dirty="0">
-                <a:solidFill>
-                  <a:srgbClr val="D97706"/>
-                </a:solidFill>
-                <a:latin typeface="Leelawadee UI" pitchFamily="34" charset="0"/>
-                <a:ea typeface="Leelawadee UI" pitchFamily="34" charset="-122"/>
-                <a:cs typeface="Leelawadee UI" pitchFamily="34" charset="-120"/>
-              </a:rPr>
-              <a:t>อัปเกรด Next.js เป็นเวอร์ชันใหม่</a:t>
+              <a:t>→ อัปเกรด Next.js เป็นเวอร์ชันใหม่</a:t>
             </a:r>
             <a:endParaRPr lang="en-US" sz="1050" dirty="0"/>
           </a:p>
@@ -9275,6 +9076,7 @@
         <a:solidFill>
           <a:srgbClr val="0F172A"/>
         </a:solidFill>
+        <a:effectLst/>
       </p:bgPr>
     </p:bg>
     <p:spTree>
@@ -9310,6 +9112,13 @@
           </a:solidFill>
           <a:ln/>
         </p:spPr>
+        <p:txBody>
+          <a:bodyPr/>
+          <a:lstStyle/>
+          <a:p>
+            <a:endParaRPr lang="th-TH"/>
+          </a:p>
+        </p:txBody>
       </p:sp>
       <p:sp>
         <p:nvSpPr>
@@ -9332,7 +9141,7 @@
           <a:bodyPr wrap="square" rtlCol="0" anchor="ctr"/>
           <a:lstStyle/>
           <a:p>
-            <a:pPr indent="0" marL="0">
+            <a:pPr marL="0" indent="0">
               <a:buNone/>
             </a:pPr>
             <a:r>
@@ -9371,7 +9180,7 @@
           <a:bodyPr wrap="square" rtlCol="0" anchor="ctr"/>
           <a:lstStyle/>
           <a:p>
-            <a:pPr indent="0" marL="0">
+            <a:pPr marL="0" indent="0">
               <a:buNone/>
             </a:pPr>
             <a:r>
@@ -9415,6 +9224,13 @@
             <a:prstDash val="solid"/>
           </a:ln>
         </p:spPr>
+        <p:txBody>
+          <a:bodyPr/>
+          <a:lstStyle/>
+          <a:p>
+            <a:endParaRPr lang="th-TH"/>
+          </a:p>
+        </p:txBody>
       </p:sp>
       <p:sp>
         <p:nvSpPr>
@@ -9437,7 +9253,7 @@
           <a:bodyPr wrap="square" rtlCol="0" anchor="ctr"/>
           <a:lstStyle/>
           <a:p>
-            <a:pPr indent="0" marL="0">
+            <a:pPr marL="0" indent="0">
               <a:buNone/>
             </a:pPr>
             <a:r>
@@ -9476,7 +9292,7 @@
           <a:bodyPr wrap="square" rtlCol="0" anchor="ctr"/>
           <a:lstStyle/>
           <a:p>
-            <a:pPr indent="0" marL="0">
+            <a:pPr marL="0" indent="0">
               <a:lnSpc>
                 <a:spcPct val="112000"/>
               </a:lnSpc>
@@ -9523,6 +9339,13 @@
             <a:prstDash val="solid"/>
           </a:ln>
         </p:spPr>
+        <p:txBody>
+          <a:bodyPr/>
+          <a:lstStyle/>
+          <a:p>
+            <a:endParaRPr lang="th-TH"/>
+          </a:p>
+        </p:txBody>
       </p:sp>
       <p:sp>
         <p:nvSpPr>
@@ -9545,7 +9368,7 @@
           <a:bodyPr wrap="square" rtlCol="0" anchor="ctr"/>
           <a:lstStyle/>
           <a:p>
-            <a:pPr indent="0" marL="0">
+            <a:pPr marL="0" indent="0">
               <a:buNone/>
             </a:pPr>
             <a:r>
@@ -9584,7 +9407,7 @@
           <a:bodyPr wrap="square" rtlCol="0" anchor="ctr"/>
           <a:lstStyle/>
           <a:p>
-            <a:pPr indent="0" marL="0">
+            <a:pPr marL="0" indent="0">
               <a:lnSpc>
                 <a:spcPct val="112000"/>
               </a:lnSpc>
@@ -9631,6 +9454,13 @@
             <a:prstDash val="solid"/>
           </a:ln>
         </p:spPr>
+        <p:txBody>
+          <a:bodyPr/>
+          <a:lstStyle/>
+          <a:p>
+            <a:endParaRPr lang="th-TH"/>
+          </a:p>
+        </p:txBody>
       </p:sp>
       <p:sp>
         <p:nvSpPr>
@@ -9653,7 +9483,7 @@
           <a:bodyPr wrap="square" rtlCol="0" anchor="ctr"/>
           <a:lstStyle/>
           <a:p>
-            <a:pPr indent="0" marL="0">
+            <a:pPr marL="0" indent="0">
               <a:buNone/>
             </a:pPr>
             <a:r>
@@ -9692,7 +9522,7 @@
           <a:bodyPr wrap="square" rtlCol="0" anchor="ctr"/>
           <a:lstStyle/>
           <a:p>
-            <a:pPr indent="0" marL="0">
+            <a:pPr marL="0" indent="0">
               <a:lnSpc>
                 <a:spcPct val="112000"/>
               </a:lnSpc>
@@ -9739,6 +9569,13 @@
             <a:prstDash val="solid"/>
           </a:ln>
         </p:spPr>
+        <p:txBody>
+          <a:bodyPr/>
+          <a:lstStyle/>
+          <a:p>
+            <a:endParaRPr lang="th-TH"/>
+          </a:p>
+        </p:txBody>
       </p:sp>
       <p:sp>
         <p:nvSpPr>
@@ -9761,7 +9598,7 @@
           <a:bodyPr wrap="square" rtlCol="0" anchor="ctr"/>
           <a:lstStyle/>
           <a:p>
-            <a:pPr indent="0" marL="0">
+            <a:pPr marL="0" indent="0">
               <a:buNone/>
             </a:pPr>
             <a:r>
@@ -9800,7 +9637,7 @@
           <a:bodyPr wrap="square" rtlCol="0" anchor="ctr"/>
           <a:lstStyle/>
           <a:p>
-            <a:pPr indent="0" marL="0">
+            <a:pPr marL="0" indent="0">
               <a:lnSpc>
                 <a:spcPct val="112000"/>
               </a:lnSpc>
@@ -9847,6 +9684,13 @@
             <a:prstDash val="solid"/>
           </a:ln>
         </p:spPr>
+        <p:txBody>
+          <a:bodyPr/>
+          <a:lstStyle/>
+          <a:p>
+            <a:endParaRPr lang="th-TH"/>
+          </a:p>
+        </p:txBody>
       </p:sp>
       <p:sp>
         <p:nvSpPr>
@@ -9869,7 +9713,7 @@
           <a:bodyPr wrap="square" rtlCol="0" anchor="ctr"/>
           <a:lstStyle/>
           <a:p>
-            <a:pPr indent="0" marL="0">
+            <a:pPr marL="0" indent="0">
               <a:buNone/>
             </a:pPr>
             <a:r>
@@ -9908,7 +9752,7 @@
           <a:bodyPr wrap="square" rtlCol="0" anchor="ctr"/>
           <a:lstStyle/>
           <a:p>
-            <a:pPr indent="0" marL="0">
+            <a:pPr marL="0" indent="0">
               <a:buNone/>
             </a:pPr>
             <a:r>
@@ -9947,7 +9791,7 @@
           <a:bodyPr wrap="square" rtlCol="0" anchor="ctr"/>
           <a:lstStyle/>
           <a:p>
-            <a:pPr indent="0" marL="0">
+            <a:pPr marL="0" indent="0">
               <a:buNone/>
             </a:pPr>
             <a:r>
@@ -9967,14 +9811,14 @@
       </p:sp>
       <p:pic>
         <p:nvPicPr>
-          <p:cNvPr id="21" name="Image 0" descr="C:\Users\mpalg\OneDrive\เดสก์ท็อป\pic\PLC-Control-Tower\deliverables\Slides\assets\14-dashboard-dark.png">    </p:cNvPr>
+          <p:cNvPr id="21" name="Image 0" descr="C:\Users\mpalg\OneDrive\เดสก์ท็อป\pic\PLC-Control-Tower\deliverables\Slides\assets\14-dashboard-dark.png"/>
           <p:cNvPicPr>
             <a:picLocks noChangeAspect="1"/>
           </p:cNvPicPr>
           <p:nvPr/>
         </p:nvPicPr>
         <p:blipFill>
-          <a:blip r:embed="rId1">
+          <a:blip r:embed="rId3">
             <a:alphaModFix amt="92000"/>
           </a:blip>
           <a:stretch>
@@ -9983,8 +9827,8 @@
         </p:blipFill>
         <p:spPr>
           <a:xfrm>
-            <a:off x="7086600" y="2057400"/>
-            <a:ext cx="3749040" cy="2112264"/>
+            <a:off x="7287768" y="19136"/>
+            <a:ext cx="3547872" cy="1998923"/>
           </a:xfrm>
           <a:prstGeom prst="rect">
             <a:avLst/>
@@ -10012,6 +9856,13 @@
             <a:prstDash val="solid"/>
           </a:ln>
         </p:spPr>
+        <p:txBody>
+          <a:bodyPr/>
+          <a:lstStyle/>
+          <a:p>
+            <a:endParaRPr lang="th-TH"/>
+          </a:p>
+        </p:txBody>
       </p:sp>
       <p:sp>
         <p:nvSpPr>
@@ -10034,7 +9885,7 @@
           <a:bodyPr wrap="square" rtlCol="0" anchor="ctr"/>
           <a:lstStyle/>
           <a:p>
-            <a:pPr algn="ctr" indent="0" marL="0">
+            <a:pPr marL="0" indent="0" algn="ctr">
               <a:buNone/>
             </a:pPr>
             <a:r>
@@ -10068,6 +9919,7 @@
         <a:solidFill>
           <a:srgbClr val="F8FAFC"/>
         </a:solidFill>
+        <a:effectLst/>
       </p:bgPr>
     </p:bg>
     <p:spTree>
@@ -10105,11 +9957,11 @@
           <a:bodyPr wrap="square" rtlCol="0" anchor="ctr"/>
           <a:lstStyle/>
           <a:p>
-            <a:pPr indent="0" marL="0">
-              <a:buNone/>
-            </a:pPr>
-            <a:r>
-              <a:rPr lang="en-US" sz="1100" b="1" spc="200" kern="0" dirty="0">
+            <a:pPr marL="0" indent="0">
+              <a:buNone/>
+            </a:pPr>
+            <a:r>
+              <a:rPr lang="en-US" sz="1100" b="1" kern="0" spc="200" dirty="0">
                 <a:solidFill>
                   <a:srgbClr val="D97706"/>
                 </a:solidFill>
@@ -10144,7 +9996,7 @@
           <a:bodyPr wrap="square" rtlCol="0" anchor="ctr"/>
           <a:lstStyle/>
           <a:p>
-            <a:pPr indent="0" marL="0">
+            <a:pPr marL="0" indent="0">
               <a:buNone/>
             </a:pPr>
             <a:r>
@@ -10181,6 +10033,13 @@
           </a:solidFill>
           <a:ln/>
         </p:spPr>
+        <p:txBody>
+          <a:bodyPr/>
+          <a:lstStyle/>
+          <a:p>
+            <a:endParaRPr lang="th-TH"/>
+          </a:p>
+        </p:txBody>
       </p:sp>
       <p:sp>
         <p:nvSpPr>
@@ -10203,7 +10062,7 @@
           <a:bodyPr wrap="square" rtlCol="0" anchor="ctr"/>
           <a:lstStyle/>
           <a:p>
-            <a:pPr indent="0" marL="0">
+            <a:pPr marL="0" indent="0">
               <a:buNone/>
             </a:pPr>
             <a:r>
@@ -10242,7 +10101,7 @@
           <a:bodyPr wrap="square" rtlCol="0" anchor="ctr"/>
           <a:lstStyle/>
           <a:p>
-            <a:pPr algn="r" indent="0" marL="0">
+            <a:pPr marL="0" indent="0" algn="r">
               <a:buNone/>
             </a:pPr>
             <a:r>
@@ -10286,13 +10145,20 @@
             <a:prstDash val="solid"/>
           </a:ln>
           <a:effectLst>
-            <a:outerShdw sx="100000" sy="100000" kx="0" ky="0" algn="bl" rotWithShape="0" blurRad="76200" dist="12700" dir="5400000">
+            <a:outerShdw blurRad="76200" dist="12700" dir="5400000" algn="bl" rotWithShape="0">
               <a:srgbClr val="94A3B8">
                 <a:alpha val="16000"/>
               </a:srgbClr>
             </a:outerShdw>
           </a:effectLst>
         </p:spPr>
+        <p:txBody>
+          <a:bodyPr/>
+          <a:lstStyle/>
+          <a:p>
+            <a:endParaRPr lang="th-TH"/>
+          </a:p>
+        </p:txBody>
       </p:sp>
       <p:sp>
         <p:nvSpPr>
@@ -10313,6 +10179,13 @@
           </a:solidFill>
           <a:ln/>
         </p:spPr>
+        <p:txBody>
+          <a:bodyPr/>
+          <a:lstStyle/>
+          <a:p>
+            <a:endParaRPr lang="th-TH"/>
+          </a:p>
+        </p:txBody>
       </p:sp>
       <p:sp>
         <p:nvSpPr>
@@ -10335,7 +10208,7 @@
           <a:bodyPr wrap="square" rtlCol="0" anchor="ctr"/>
           <a:lstStyle/>
           <a:p>
-            <a:pPr indent="0" marL="0">
+            <a:pPr marL="0" indent="0">
               <a:buNone/>
             </a:pPr>
             <a:r>
@@ -10521,13 +10394,20 @@
             <a:prstDash val="solid"/>
           </a:ln>
           <a:effectLst>
-            <a:outerShdw sx="100000" sy="100000" kx="0" ky="0" algn="bl" rotWithShape="0" blurRad="76200" dist="12700" dir="5400000">
+            <a:outerShdw blurRad="76200" dist="12700" dir="5400000" algn="bl" rotWithShape="0">
               <a:srgbClr val="94A3B8">
                 <a:alpha val="16000"/>
               </a:srgbClr>
             </a:outerShdw>
           </a:effectLst>
         </p:spPr>
+        <p:txBody>
+          <a:bodyPr/>
+          <a:lstStyle/>
+          <a:p>
+            <a:endParaRPr lang="th-TH"/>
+          </a:p>
+        </p:txBody>
       </p:sp>
       <p:sp>
         <p:nvSpPr>
@@ -10548,6 +10428,13 @@
           </a:solidFill>
           <a:ln/>
         </p:spPr>
+        <p:txBody>
+          <a:bodyPr/>
+          <a:lstStyle/>
+          <a:p>
+            <a:endParaRPr lang="th-TH"/>
+          </a:p>
+        </p:txBody>
       </p:sp>
       <p:sp>
         <p:nvSpPr>
@@ -10570,7 +10457,7 @@
           <a:bodyPr wrap="square" rtlCol="0" anchor="ctr"/>
           <a:lstStyle/>
           <a:p>
-            <a:pPr indent="0" marL="0">
+            <a:pPr marL="0" indent="0">
               <a:buNone/>
             </a:pPr>
             <a:r>
@@ -10780,6 +10667,13 @@
             <a:prstDash val="solid"/>
           </a:ln>
         </p:spPr>
+        <p:txBody>
+          <a:bodyPr/>
+          <a:lstStyle/>
+          <a:p>
+            <a:endParaRPr lang="th-TH"/>
+          </a:p>
+        </p:txBody>
       </p:sp>
       <p:sp>
         <p:nvSpPr>
@@ -10802,7 +10696,7 @@
           <a:bodyPr wrap="square" rtlCol="0" anchor="ctr"/>
           <a:lstStyle/>
           <a:p>
-            <a:pPr indent="0" marL="0">
+            <a:pPr marL="0" indent="0">
               <a:buNone/>
             </a:pPr>
             <a:r>
@@ -10816,9 +10710,6 @@
               </a:rPr>
               <a:t>หัวใจของงาน:  </a:t>
             </a:r>
-            <a:pPr indent="0" marL="0">
-              <a:buNone/>
-            </a:pPr>
             <a:r>
               <a:rPr lang="en-US" sz="1300" dirty="0">
                 <a:solidFill>
@@ -10850,6 +10741,7 @@
         <a:solidFill>
           <a:srgbClr val="F8FAFC"/>
         </a:solidFill>
+        <a:effectLst/>
       </p:bgPr>
     </p:bg>
     <p:spTree>
@@ -10887,11 +10779,11 @@
           <a:bodyPr wrap="square" rtlCol="0" anchor="ctr"/>
           <a:lstStyle/>
           <a:p>
-            <a:pPr indent="0" marL="0">
-              <a:buNone/>
-            </a:pPr>
-            <a:r>
-              <a:rPr lang="en-US" sz="1100" b="1" spc="200" kern="0" dirty="0">
+            <a:pPr marL="0" indent="0">
+              <a:buNone/>
+            </a:pPr>
+            <a:r>
+              <a:rPr lang="en-US" sz="1100" b="1" kern="0" spc="200" dirty="0">
                 <a:solidFill>
                   <a:srgbClr val="D97706"/>
                 </a:solidFill>
@@ -10926,7 +10818,7 @@
           <a:bodyPr wrap="square" rtlCol="0" anchor="ctr"/>
           <a:lstStyle/>
           <a:p>
-            <a:pPr indent="0" marL="0">
+            <a:pPr marL="0" indent="0">
               <a:buNone/>
             </a:pPr>
             <a:r>
@@ -10963,6 +10855,13 @@
           </a:solidFill>
           <a:ln/>
         </p:spPr>
+        <p:txBody>
+          <a:bodyPr/>
+          <a:lstStyle/>
+          <a:p>
+            <a:endParaRPr lang="th-TH"/>
+          </a:p>
+        </p:txBody>
       </p:sp>
       <p:sp>
         <p:nvSpPr>
@@ -10985,7 +10884,7 @@
           <a:bodyPr wrap="square" rtlCol="0" anchor="ctr"/>
           <a:lstStyle/>
           <a:p>
-            <a:pPr indent="0" marL="0">
+            <a:pPr marL="0" indent="0">
               <a:buNone/>
             </a:pPr>
             <a:r>
@@ -11024,7 +10923,7 @@
           <a:bodyPr wrap="square" rtlCol="0" anchor="ctr"/>
           <a:lstStyle/>
           <a:p>
-            <a:pPr algn="r" indent="0" marL="0">
+            <a:pPr marL="0" indent="0" algn="r">
               <a:buNone/>
             </a:pPr>
             <a:r>
@@ -11068,13 +10967,20 @@
             <a:prstDash val="solid"/>
           </a:ln>
           <a:effectLst>
-            <a:outerShdw sx="100000" sy="100000" kx="0" ky="0" algn="bl" rotWithShape="0" blurRad="76200" dist="12700" dir="5400000">
+            <a:outerShdw blurRad="76200" dist="12700" dir="5400000" algn="bl" rotWithShape="0">
               <a:srgbClr val="94A3B8">
                 <a:alpha val="16000"/>
               </a:srgbClr>
             </a:outerShdw>
           </a:effectLst>
         </p:spPr>
+        <p:txBody>
+          <a:bodyPr/>
+          <a:lstStyle/>
+          <a:p>
+            <a:endParaRPr lang="th-TH"/>
+          </a:p>
+        </p:txBody>
       </p:sp>
       <p:sp>
         <p:nvSpPr>
@@ -11095,6 +11001,13 @@
           </a:solidFill>
           <a:ln/>
         </p:spPr>
+        <p:txBody>
+          <a:bodyPr/>
+          <a:lstStyle/>
+          <a:p>
+            <a:endParaRPr lang="th-TH"/>
+          </a:p>
+        </p:txBody>
       </p:sp>
       <p:sp>
         <p:nvSpPr>
@@ -11117,7 +11030,7 @@
           <a:bodyPr wrap="square" rtlCol="0" anchor="ctr"/>
           <a:lstStyle/>
           <a:p>
-            <a:pPr indent="0" marL="0">
+            <a:pPr marL="0" indent="0">
               <a:buNone/>
             </a:pPr>
             <a:r>
@@ -11156,7 +11069,7 @@
           <a:bodyPr wrap="square" rtlCol="0" anchor="ctr"/>
           <a:lstStyle/>
           <a:p>
-            <a:pPr indent="0" marL="0">
+            <a:pPr marL="0" indent="0">
               <a:lnSpc>
                 <a:spcPct val="112000"/>
               </a:lnSpc>
@@ -11203,13 +11116,20 @@
             <a:prstDash val="solid"/>
           </a:ln>
           <a:effectLst>
-            <a:outerShdw sx="100000" sy="100000" kx="0" ky="0" algn="bl" rotWithShape="0" blurRad="76200" dist="12700" dir="5400000">
+            <a:outerShdw blurRad="76200" dist="12700" dir="5400000" algn="bl" rotWithShape="0">
               <a:srgbClr val="94A3B8">
                 <a:alpha val="16000"/>
               </a:srgbClr>
             </a:outerShdw>
           </a:effectLst>
         </p:spPr>
+        <p:txBody>
+          <a:bodyPr/>
+          <a:lstStyle/>
+          <a:p>
+            <a:endParaRPr lang="th-TH"/>
+          </a:p>
+        </p:txBody>
       </p:sp>
       <p:sp>
         <p:nvSpPr>
@@ -11230,6 +11150,13 @@
           </a:solidFill>
           <a:ln/>
         </p:spPr>
+        <p:txBody>
+          <a:bodyPr/>
+          <a:lstStyle/>
+          <a:p>
+            <a:endParaRPr lang="th-TH"/>
+          </a:p>
+        </p:txBody>
       </p:sp>
       <p:sp>
         <p:nvSpPr>
@@ -11252,7 +11179,7 @@
           <a:bodyPr wrap="square" rtlCol="0" anchor="ctr"/>
           <a:lstStyle/>
           <a:p>
-            <a:pPr indent="0" marL="0">
+            <a:pPr marL="0" indent="0">
               <a:buNone/>
             </a:pPr>
             <a:r>
@@ -11291,7 +11218,7 @@
           <a:bodyPr wrap="square" rtlCol="0" anchor="ctr"/>
           <a:lstStyle/>
           <a:p>
-            <a:pPr indent="0" marL="0">
+            <a:pPr marL="0" indent="0">
               <a:lnSpc>
                 <a:spcPct val="112000"/>
               </a:lnSpc>
@@ -11338,13 +11265,20 @@
             <a:prstDash val="solid"/>
           </a:ln>
           <a:effectLst>
-            <a:outerShdw sx="100000" sy="100000" kx="0" ky="0" algn="bl" rotWithShape="0" blurRad="76200" dist="12700" dir="5400000">
+            <a:outerShdw blurRad="76200" dist="12700" dir="5400000" algn="bl" rotWithShape="0">
               <a:srgbClr val="94A3B8">
                 <a:alpha val="16000"/>
               </a:srgbClr>
             </a:outerShdw>
           </a:effectLst>
         </p:spPr>
+        <p:txBody>
+          <a:bodyPr/>
+          <a:lstStyle/>
+          <a:p>
+            <a:endParaRPr lang="th-TH"/>
+          </a:p>
+        </p:txBody>
       </p:sp>
       <p:sp>
         <p:nvSpPr>
@@ -11365,6 +11299,13 @@
           </a:solidFill>
           <a:ln/>
         </p:spPr>
+        <p:txBody>
+          <a:bodyPr/>
+          <a:lstStyle/>
+          <a:p>
+            <a:endParaRPr lang="th-TH"/>
+          </a:p>
+        </p:txBody>
       </p:sp>
       <p:sp>
         <p:nvSpPr>
@@ -11387,7 +11328,7 @@
           <a:bodyPr wrap="square" rtlCol="0" anchor="ctr"/>
           <a:lstStyle/>
           <a:p>
-            <a:pPr indent="0" marL="0">
+            <a:pPr marL="0" indent="0">
               <a:buNone/>
             </a:pPr>
             <a:r>
@@ -11426,7 +11367,7 @@
           <a:bodyPr wrap="square" rtlCol="0" anchor="ctr"/>
           <a:lstStyle/>
           <a:p>
-            <a:pPr indent="0" marL="0">
+            <a:pPr marL="0" indent="0">
               <a:lnSpc>
                 <a:spcPct val="112000"/>
               </a:lnSpc>
@@ -11473,13 +11414,20 @@
             <a:prstDash val="solid"/>
           </a:ln>
           <a:effectLst>
-            <a:outerShdw sx="100000" sy="100000" kx="0" ky="0" algn="bl" rotWithShape="0" blurRad="76200" dist="12700" dir="5400000">
+            <a:outerShdw blurRad="76200" dist="12700" dir="5400000" algn="bl" rotWithShape="0">
               <a:srgbClr val="94A3B8">
                 <a:alpha val="16000"/>
               </a:srgbClr>
             </a:outerShdw>
           </a:effectLst>
         </p:spPr>
+        <p:txBody>
+          <a:bodyPr/>
+          <a:lstStyle/>
+          <a:p>
+            <a:endParaRPr lang="th-TH"/>
+          </a:p>
+        </p:txBody>
       </p:sp>
       <p:sp>
         <p:nvSpPr>
@@ -11500,6 +11448,13 @@
           </a:solidFill>
           <a:ln/>
         </p:spPr>
+        <p:txBody>
+          <a:bodyPr/>
+          <a:lstStyle/>
+          <a:p>
+            <a:endParaRPr lang="th-TH"/>
+          </a:p>
+        </p:txBody>
       </p:sp>
       <p:sp>
         <p:nvSpPr>
@@ -11522,7 +11477,7 @@
           <a:bodyPr wrap="square" rtlCol="0" anchor="ctr"/>
           <a:lstStyle/>
           <a:p>
-            <a:pPr indent="0" marL="0">
+            <a:pPr marL="0" indent="0">
               <a:buNone/>
             </a:pPr>
             <a:r>
@@ -11561,7 +11516,7 @@
           <a:bodyPr wrap="square" rtlCol="0" anchor="ctr"/>
           <a:lstStyle/>
           <a:p>
-            <a:pPr indent="0" marL="0">
+            <a:pPr marL="0" indent="0">
               <a:lnSpc>
                 <a:spcPct val="112000"/>
               </a:lnSpc>
@@ -11608,13 +11563,20 @@
             <a:prstDash val="solid"/>
           </a:ln>
           <a:effectLst>
-            <a:outerShdw sx="100000" sy="100000" kx="0" ky="0" algn="bl" rotWithShape="0" blurRad="76200" dist="12700" dir="5400000">
+            <a:outerShdw blurRad="76200" dist="12700" dir="5400000" algn="bl" rotWithShape="0">
               <a:srgbClr val="94A3B8">
                 <a:alpha val="16000"/>
               </a:srgbClr>
             </a:outerShdw>
           </a:effectLst>
         </p:spPr>
+        <p:txBody>
+          <a:bodyPr/>
+          <a:lstStyle/>
+          <a:p>
+            <a:endParaRPr lang="th-TH"/>
+          </a:p>
+        </p:txBody>
       </p:sp>
       <p:sp>
         <p:nvSpPr>
@@ -11635,6 +11597,13 @@
           </a:solidFill>
           <a:ln/>
         </p:spPr>
+        <p:txBody>
+          <a:bodyPr/>
+          <a:lstStyle/>
+          <a:p>
+            <a:endParaRPr lang="th-TH"/>
+          </a:p>
+        </p:txBody>
       </p:sp>
       <p:sp>
         <p:nvSpPr>
@@ -11657,7 +11626,7 @@
           <a:bodyPr wrap="square" rtlCol="0" anchor="ctr"/>
           <a:lstStyle/>
           <a:p>
-            <a:pPr indent="0" marL="0">
+            <a:pPr marL="0" indent="0">
               <a:buNone/>
             </a:pPr>
             <a:r>
@@ -11696,7 +11665,7 @@
           <a:bodyPr wrap="square" rtlCol="0" anchor="ctr"/>
           <a:lstStyle/>
           <a:p>
-            <a:pPr indent="0" marL="0">
+            <a:pPr marL="0" indent="0">
               <a:lnSpc>
                 <a:spcPct val="112000"/>
               </a:lnSpc>
@@ -11743,13 +11712,20 @@
             <a:prstDash val="solid"/>
           </a:ln>
           <a:effectLst>
-            <a:outerShdw sx="100000" sy="100000" kx="0" ky="0" algn="bl" rotWithShape="0" blurRad="76200" dist="12700" dir="5400000">
+            <a:outerShdw blurRad="76200" dist="12700" dir="5400000" algn="bl" rotWithShape="0">
               <a:srgbClr val="94A3B8">
                 <a:alpha val="16000"/>
               </a:srgbClr>
             </a:outerShdw>
           </a:effectLst>
         </p:spPr>
+        <p:txBody>
+          <a:bodyPr/>
+          <a:lstStyle/>
+          <a:p>
+            <a:endParaRPr lang="th-TH"/>
+          </a:p>
+        </p:txBody>
       </p:sp>
       <p:sp>
         <p:nvSpPr>
@@ -11770,6 +11746,13 @@
           </a:solidFill>
           <a:ln/>
         </p:spPr>
+        <p:txBody>
+          <a:bodyPr/>
+          <a:lstStyle/>
+          <a:p>
+            <a:endParaRPr lang="th-TH"/>
+          </a:p>
+        </p:txBody>
       </p:sp>
       <p:sp>
         <p:nvSpPr>
@@ -11792,7 +11775,7 @@
           <a:bodyPr wrap="square" rtlCol="0" anchor="ctr"/>
           <a:lstStyle/>
           <a:p>
-            <a:pPr indent="0" marL="0">
+            <a:pPr marL="0" indent="0">
               <a:buNone/>
             </a:pPr>
             <a:r>
@@ -11831,7 +11814,7 @@
           <a:bodyPr wrap="square" rtlCol="0" anchor="ctr"/>
           <a:lstStyle/>
           <a:p>
-            <a:pPr indent="0" marL="0">
+            <a:pPr marL="0" indent="0">
               <a:lnSpc>
                 <a:spcPct val="112000"/>
               </a:lnSpc>
@@ -11878,13 +11861,20 @@
             <a:prstDash val="solid"/>
           </a:ln>
           <a:effectLst>
-            <a:outerShdw sx="100000" sy="100000" kx="0" ky="0" algn="bl" rotWithShape="0" blurRad="76200" dist="12700" dir="5400000">
+            <a:outerShdw blurRad="76200" dist="12700" dir="5400000" algn="bl" rotWithShape="0">
               <a:srgbClr val="94A3B8">
                 <a:alpha val="16000"/>
               </a:srgbClr>
             </a:outerShdw>
           </a:effectLst>
         </p:spPr>
+        <p:txBody>
+          <a:bodyPr/>
+          <a:lstStyle/>
+          <a:p>
+            <a:endParaRPr lang="th-TH"/>
+          </a:p>
+        </p:txBody>
       </p:sp>
       <p:sp>
         <p:nvSpPr>
@@ -11905,6 +11895,13 @@
           </a:solidFill>
           <a:ln/>
         </p:spPr>
+        <p:txBody>
+          <a:bodyPr/>
+          <a:lstStyle/>
+          <a:p>
+            <a:endParaRPr lang="th-TH"/>
+          </a:p>
+        </p:txBody>
       </p:sp>
       <p:sp>
         <p:nvSpPr>
@@ -11927,7 +11924,7 @@
           <a:bodyPr wrap="square" rtlCol="0" anchor="ctr"/>
           <a:lstStyle/>
           <a:p>
-            <a:pPr indent="0" marL="0">
+            <a:pPr marL="0" indent="0">
               <a:buNone/>
             </a:pPr>
             <a:r>
@@ -11966,7 +11963,7 @@
           <a:bodyPr wrap="square" rtlCol="0" anchor="ctr"/>
           <a:lstStyle/>
           <a:p>
-            <a:pPr indent="0" marL="0">
+            <a:pPr marL="0" indent="0">
               <a:lnSpc>
                 <a:spcPct val="112000"/>
               </a:lnSpc>
@@ -12013,13 +12010,20 @@
             <a:prstDash val="solid"/>
           </a:ln>
           <a:effectLst>
-            <a:outerShdw sx="100000" sy="100000" kx="0" ky="0" algn="bl" rotWithShape="0" blurRad="76200" dist="12700" dir="5400000">
+            <a:outerShdw blurRad="76200" dist="12700" dir="5400000" algn="bl" rotWithShape="0">
               <a:srgbClr val="94A3B8">
                 <a:alpha val="16000"/>
               </a:srgbClr>
             </a:outerShdw>
           </a:effectLst>
         </p:spPr>
+        <p:txBody>
+          <a:bodyPr/>
+          <a:lstStyle/>
+          <a:p>
+            <a:endParaRPr lang="th-TH"/>
+          </a:p>
+        </p:txBody>
       </p:sp>
       <p:sp>
         <p:nvSpPr>
@@ -12040,6 +12044,13 @@
           </a:solidFill>
           <a:ln/>
         </p:spPr>
+        <p:txBody>
+          <a:bodyPr/>
+          <a:lstStyle/>
+          <a:p>
+            <a:endParaRPr lang="th-TH"/>
+          </a:p>
+        </p:txBody>
       </p:sp>
       <p:sp>
         <p:nvSpPr>
@@ -12062,7 +12073,7 @@
           <a:bodyPr wrap="square" rtlCol="0" anchor="ctr"/>
           <a:lstStyle/>
           <a:p>
-            <a:pPr indent="0" marL="0">
+            <a:pPr marL="0" indent="0">
               <a:buNone/>
             </a:pPr>
             <a:r>
@@ -12101,7 +12112,7 @@
           <a:bodyPr wrap="square" rtlCol="0" anchor="ctr"/>
           <a:lstStyle/>
           <a:p>
-            <a:pPr indent="0" marL="0">
+            <a:pPr marL="0" indent="0">
               <a:lnSpc>
                 <a:spcPct val="120000"/>
               </a:lnSpc>
@@ -12121,7 +12132,7 @@
             <a:endParaRPr lang="en-US" sz="1000" dirty="0"/>
           </a:p>
           <a:p>
-            <a:pPr indent="0" marL="0">
+            <a:pPr marL="0" indent="0">
               <a:lnSpc>
                 <a:spcPct val="120000"/>
               </a:lnSpc>
@@ -12141,7 +12152,7 @@
             <a:endParaRPr lang="en-US" sz="1000" dirty="0"/>
           </a:p>
           <a:p>
-            <a:pPr indent="0" marL="0">
+            <a:pPr marL="0" indent="0">
               <a:lnSpc>
                 <a:spcPct val="120000"/>
               </a:lnSpc>
@@ -12188,13 +12199,20 @@
             <a:prstDash val="solid"/>
           </a:ln>
           <a:effectLst>
-            <a:outerShdw sx="100000" sy="100000" kx="0" ky="0" algn="bl" rotWithShape="0" blurRad="76200" dist="12700" dir="5400000">
+            <a:outerShdw blurRad="76200" dist="12700" dir="5400000" algn="bl" rotWithShape="0">
               <a:srgbClr val="94A3B8">
                 <a:alpha val="16000"/>
               </a:srgbClr>
             </a:outerShdw>
           </a:effectLst>
         </p:spPr>
+        <p:txBody>
+          <a:bodyPr/>
+          <a:lstStyle/>
+          <a:p>
+            <a:endParaRPr lang="th-TH"/>
+          </a:p>
+        </p:txBody>
       </p:sp>
       <p:sp>
         <p:nvSpPr>
@@ -12215,6 +12233,13 @@
           </a:solidFill>
           <a:ln/>
         </p:spPr>
+        <p:txBody>
+          <a:bodyPr/>
+          <a:lstStyle/>
+          <a:p>
+            <a:endParaRPr lang="th-TH"/>
+          </a:p>
+        </p:txBody>
       </p:sp>
       <p:sp>
         <p:nvSpPr>
@@ -12237,7 +12262,7 @@
           <a:bodyPr wrap="square" rtlCol="0" anchor="ctr"/>
           <a:lstStyle/>
           <a:p>
-            <a:pPr indent="0" marL="0">
+            <a:pPr marL="0" indent="0">
               <a:buNone/>
             </a:pPr>
             <a:r>
@@ -12365,6 +12390,7 @@
         <a:solidFill>
           <a:srgbClr val="F8FAFC"/>
         </a:solidFill>
+        <a:effectLst/>
       </p:bgPr>
     </p:bg>
     <p:spTree>
@@ -12402,11 +12428,11 @@
           <a:bodyPr wrap="square" rtlCol="0" anchor="ctr"/>
           <a:lstStyle/>
           <a:p>
-            <a:pPr indent="0" marL="0">
-              <a:buNone/>
-            </a:pPr>
-            <a:r>
-              <a:rPr lang="en-US" sz="1100" b="1" spc="200" kern="0" dirty="0">
+            <a:pPr marL="0" indent="0">
+              <a:buNone/>
+            </a:pPr>
+            <a:r>
+              <a:rPr lang="en-US" sz="1100" b="1" kern="0" spc="200" dirty="0">
                 <a:solidFill>
                   <a:srgbClr val="D97706"/>
                 </a:solidFill>
@@ -12441,7 +12467,7 @@
           <a:bodyPr wrap="square" rtlCol="0" anchor="ctr"/>
           <a:lstStyle/>
           <a:p>
-            <a:pPr indent="0" marL="0">
+            <a:pPr marL="0" indent="0">
               <a:buNone/>
             </a:pPr>
             <a:r>
@@ -12478,6 +12504,13 @@
           </a:solidFill>
           <a:ln/>
         </p:spPr>
+        <p:txBody>
+          <a:bodyPr/>
+          <a:lstStyle/>
+          <a:p>
+            <a:endParaRPr lang="th-TH"/>
+          </a:p>
+        </p:txBody>
       </p:sp>
       <p:sp>
         <p:nvSpPr>
@@ -12500,7 +12533,7 @@
           <a:bodyPr wrap="square" rtlCol="0" anchor="ctr"/>
           <a:lstStyle/>
           <a:p>
-            <a:pPr indent="0" marL="0">
+            <a:pPr marL="0" indent="0">
               <a:buNone/>
             </a:pPr>
             <a:r>
@@ -12539,7 +12572,7 @@
           <a:bodyPr wrap="square" rtlCol="0" anchor="ctr"/>
           <a:lstStyle/>
           <a:p>
-            <a:pPr algn="r" indent="0" marL="0">
+            <a:pPr marL="0" indent="0" algn="r">
               <a:buNone/>
             </a:pPr>
             <a:r>
@@ -12559,14 +12592,14 @@
       </p:sp>
       <p:pic>
         <p:nvPicPr>
-          <p:cNvPr id="7" name="Image 0" descr="C:\Users\mpalg\OneDrive\เดสก์ท็อป\pic\PLC-Control-Tower\deliverables\Slides\assets\02-dashboard-admin.png">    </p:cNvPr>
+          <p:cNvPr id="7" name="Image 0" descr="C:\Users\mpalg\OneDrive\เดสก์ท็อป\pic\PLC-Control-Tower\deliverables\Slides\assets\02-dashboard-admin.png"/>
           <p:cNvPicPr>
             <a:picLocks noChangeAspect="1"/>
           </p:cNvPicPr>
           <p:nvPr/>
         </p:nvPicPr>
         <p:blipFill>
-          <a:blip r:embed="rId1"/>
+          <a:blip r:embed="rId3"/>
           <a:stretch>
             <a:fillRect/>
           </a:stretch>
@@ -12602,6 +12635,13 @@
             <a:prstDash val="solid"/>
           </a:ln>
         </p:spPr>
+        <p:txBody>
+          <a:bodyPr/>
+          <a:lstStyle/>
+          <a:p>
+            <a:endParaRPr lang="th-TH"/>
+          </a:p>
+        </p:txBody>
       </p:sp>
       <p:sp>
         <p:nvSpPr>
@@ -12629,13 +12669,20 @@
             <a:prstDash val="solid"/>
           </a:ln>
           <a:effectLst>
-            <a:outerShdw sx="100000" sy="100000" kx="0" ky="0" algn="bl" rotWithShape="0" blurRad="76200" dist="12700" dir="5400000">
+            <a:outerShdw blurRad="76200" dist="12700" dir="5400000" algn="bl" rotWithShape="0">
               <a:srgbClr val="94A3B8">
                 <a:alpha val="16000"/>
               </a:srgbClr>
             </a:outerShdw>
           </a:effectLst>
         </p:spPr>
+        <p:txBody>
+          <a:bodyPr/>
+          <a:lstStyle/>
+          <a:p>
+            <a:endParaRPr lang="th-TH"/>
+          </a:p>
+        </p:txBody>
       </p:sp>
       <p:sp>
         <p:nvSpPr>
@@ -12656,6 +12703,13 @@
           </a:solidFill>
           <a:ln/>
         </p:spPr>
+        <p:txBody>
+          <a:bodyPr/>
+          <a:lstStyle/>
+          <a:p>
+            <a:endParaRPr lang="th-TH"/>
+          </a:p>
+        </p:txBody>
       </p:sp>
       <p:sp>
         <p:nvSpPr>
@@ -12678,7 +12732,7 @@
           <a:bodyPr wrap="square" rtlCol="0" anchor="ctr"/>
           <a:lstStyle/>
           <a:p>
-            <a:pPr indent="0" marL="0">
+            <a:pPr marL="0" indent="0">
               <a:buNone/>
             </a:pPr>
             <a:r>
@@ -12717,7 +12771,7 @@
           <a:bodyPr wrap="square" rtlCol="0" anchor="ctr"/>
           <a:lstStyle/>
           <a:p>
-            <a:pPr indent="0" marL="0">
+            <a:pPr marL="0" indent="0">
               <a:buNone/>
             </a:pPr>
             <a:r>
@@ -12756,7 +12810,7 @@
           <a:bodyPr wrap="square" rtlCol="0" anchor="ctr"/>
           <a:lstStyle/>
           <a:p>
-            <a:pPr indent="0" marL="0">
+            <a:pPr marL="0" indent="0">
               <a:lnSpc>
                 <a:spcPct val="120000"/>
               </a:lnSpc>
@@ -12798,7 +12852,7 @@
           <a:bodyPr wrap="square" rtlCol="0" anchor="ctr"/>
           <a:lstStyle/>
           <a:p>
-            <a:pPr indent="0" marL="0">
+            <a:pPr marL="0" indent="0">
               <a:buNone/>
             </a:pPr>
             <a:r>
@@ -12842,13 +12896,20 @@
             <a:prstDash val="solid"/>
           </a:ln>
           <a:effectLst>
-            <a:outerShdw sx="100000" sy="100000" kx="0" ky="0" algn="bl" rotWithShape="0" blurRad="76200" dist="12700" dir="5400000">
+            <a:outerShdw blurRad="76200" dist="12700" dir="5400000" algn="bl" rotWithShape="0">
               <a:srgbClr val="94A3B8">
                 <a:alpha val="16000"/>
               </a:srgbClr>
             </a:outerShdw>
           </a:effectLst>
         </p:spPr>
+        <p:txBody>
+          <a:bodyPr/>
+          <a:lstStyle/>
+          <a:p>
+            <a:endParaRPr lang="th-TH"/>
+          </a:p>
+        </p:txBody>
       </p:sp>
       <p:sp>
         <p:nvSpPr>
@@ -12869,6 +12930,13 @@
           </a:solidFill>
           <a:ln/>
         </p:spPr>
+        <p:txBody>
+          <a:bodyPr/>
+          <a:lstStyle/>
+          <a:p>
+            <a:endParaRPr lang="th-TH"/>
+          </a:p>
+        </p:txBody>
       </p:sp>
       <p:sp>
         <p:nvSpPr>
@@ -12891,7 +12959,7 @@
           <a:bodyPr wrap="square" rtlCol="0" anchor="ctr"/>
           <a:lstStyle/>
           <a:p>
-            <a:pPr indent="0" marL="0">
+            <a:pPr marL="0" indent="0">
               <a:buNone/>
             </a:pPr>
             <a:r>
@@ -13024,7 +13092,7 @@
           <a:bodyPr wrap="square" rtlCol="0" anchor="ctr"/>
           <a:lstStyle/>
           <a:p>
-            <a:pPr indent="0" marL="0">
+            <a:pPr marL="0" indent="0">
               <a:buNone/>
             </a:pPr>
             <a:r>
@@ -13058,6 +13126,7 @@
         <a:solidFill>
           <a:srgbClr val="F8FAFC"/>
         </a:solidFill>
+        <a:effectLst/>
       </p:bgPr>
     </p:bg>
     <p:spTree>
@@ -13095,11 +13164,11 @@
           <a:bodyPr wrap="square" rtlCol="0" anchor="ctr"/>
           <a:lstStyle/>
           <a:p>
-            <a:pPr indent="0" marL="0">
-              <a:buNone/>
-            </a:pPr>
-            <a:r>
-              <a:rPr lang="en-US" sz="1100" b="1" spc="200" kern="0" dirty="0">
+            <a:pPr marL="0" indent="0">
+              <a:buNone/>
+            </a:pPr>
+            <a:r>
+              <a:rPr lang="en-US" sz="1100" b="1" kern="0" spc="200" dirty="0">
                 <a:solidFill>
                   <a:srgbClr val="D97706"/>
                 </a:solidFill>
@@ -13134,7 +13203,7 @@
           <a:bodyPr wrap="square" rtlCol="0" anchor="ctr"/>
           <a:lstStyle/>
           <a:p>
-            <a:pPr indent="0" marL="0">
+            <a:pPr marL="0" indent="0">
               <a:buNone/>
             </a:pPr>
             <a:r>
@@ -13171,6 +13240,13 @@
           </a:solidFill>
           <a:ln/>
         </p:spPr>
+        <p:txBody>
+          <a:bodyPr/>
+          <a:lstStyle/>
+          <a:p>
+            <a:endParaRPr lang="th-TH"/>
+          </a:p>
+        </p:txBody>
       </p:sp>
       <p:sp>
         <p:nvSpPr>
@@ -13193,7 +13269,7 @@
           <a:bodyPr wrap="square" rtlCol="0" anchor="ctr"/>
           <a:lstStyle/>
           <a:p>
-            <a:pPr indent="0" marL="0">
+            <a:pPr marL="0" indent="0">
               <a:buNone/>
             </a:pPr>
             <a:r>
@@ -13232,7 +13308,7 @@
           <a:bodyPr wrap="square" rtlCol="0" anchor="ctr"/>
           <a:lstStyle/>
           <a:p>
-            <a:pPr algn="r" indent="0" marL="0">
+            <a:pPr marL="0" indent="0" algn="r">
               <a:buNone/>
             </a:pPr>
             <a:r>
@@ -13276,13 +13352,20 @@
             <a:prstDash val="solid"/>
           </a:ln>
           <a:effectLst>
-            <a:outerShdw sx="100000" sy="100000" kx="0" ky="0" algn="bl" rotWithShape="0" blurRad="76200" dist="12700" dir="5400000">
+            <a:outerShdw blurRad="76200" dist="12700" dir="5400000" algn="bl" rotWithShape="0">
               <a:srgbClr val="94A3B8">
                 <a:alpha val="16000"/>
               </a:srgbClr>
             </a:outerShdw>
           </a:effectLst>
         </p:spPr>
+        <p:txBody>
+          <a:bodyPr/>
+          <a:lstStyle/>
+          <a:p>
+            <a:endParaRPr lang="th-TH"/>
+          </a:p>
+        </p:txBody>
       </p:sp>
       <p:sp>
         <p:nvSpPr>
@@ -13303,6 +13386,13 @@
           </a:solidFill>
           <a:ln/>
         </p:spPr>
+        <p:txBody>
+          <a:bodyPr/>
+          <a:lstStyle/>
+          <a:p>
+            <a:endParaRPr lang="th-TH"/>
+          </a:p>
+        </p:txBody>
       </p:sp>
       <p:sp>
         <p:nvSpPr>
@@ -13325,7 +13415,7 @@
           <a:bodyPr wrap="square" rtlCol="0" anchor="ctr"/>
           <a:lstStyle/>
           <a:p>
-            <a:pPr indent="0" marL="0">
+            <a:pPr marL="0" indent="0">
               <a:buNone/>
             </a:pPr>
             <a:r>
@@ -13364,7 +13454,7 @@
           <a:bodyPr wrap="square" rtlCol="0" anchor="ctr"/>
           <a:lstStyle/>
           <a:p>
-            <a:pPr indent="0" marL="0">
+            <a:pPr marL="0" indent="0">
               <a:lnSpc>
                 <a:spcPct val="115000"/>
               </a:lnSpc>
@@ -13406,7 +13496,7 @@
           <a:bodyPr wrap="square" rtlCol="0" anchor="ctr"/>
           <a:lstStyle/>
           <a:p>
-            <a:pPr indent="0" marL="0">
+            <a:pPr marL="0" indent="0">
               <a:buNone/>
             </a:pPr>
             <a:r>
@@ -13450,13 +13540,20 @@
             <a:prstDash val="solid"/>
           </a:ln>
           <a:effectLst>
-            <a:outerShdw sx="100000" sy="100000" kx="0" ky="0" algn="bl" rotWithShape="0" blurRad="76200" dist="12700" dir="5400000">
+            <a:outerShdw blurRad="76200" dist="12700" dir="5400000" algn="bl" rotWithShape="0">
               <a:srgbClr val="94A3B8">
                 <a:alpha val="16000"/>
               </a:srgbClr>
             </a:outerShdw>
           </a:effectLst>
         </p:spPr>
+        <p:txBody>
+          <a:bodyPr/>
+          <a:lstStyle/>
+          <a:p>
+            <a:endParaRPr lang="th-TH"/>
+          </a:p>
+        </p:txBody>
       </p:sp>
       <p:sp>
         <p:nvSpPr>
@@ -13477,6 +13574,13 @@
           </a:solidFill>
           <a:ln/>
         </p:spPr>
+        <p:txBody>
+          <a:bodyPr/>
+          <a:lstStyle/>
+          <a:p>
+            <a:endParaRPr lang="th-TH"/>
+          </a:p>
+        </p:txBody>
       </p:sp>
       <p:sp>
         <p:nvSpPr>
@@ -13499,7 +13603,7 @@
           <a:bodyPr wrap="square" rtlCol="0" anchor="ctr"/>
           <a:lstStyle/>
           <a:p>
-            <a:pPr indent="0" marL="0">
+            <a:pPr marL="0" indent="0">
               <a:buNone/>
             </a:pPr>
             <a:r>
@@ -13538,7 +13642,7 @@
           <a:bodyPr wrap="square" rtlCol="0" anchor="ctr"/>
           <a:lstStyle/>
           <a:p>
-            <a:pPr indent="0" marL="0">
+            <a:pPr marL="0" indent="0">
               <a:lnSpc>
                 <a:spcPct val="115000"/>
               </a:lnSpc>
@@ -13580,7 +13684,7 @@
           <a:bodyPr wrap="square" rtlCol="0" anchor="ctr"/>
           <a:lstStyle/>
           <a:p>
-            <a:pPr indent="0" marL="0">
+            <a:pPr marL="0" indent="0">
               <a:buNone/>
             </a:pPr>
             <a:r>
@@ -13624,13 +13728,20 @@
             <a:prstDash val="solid"/>
           </a:ln>
           <a:effectLst>
-            <a:outerShdw sx="100000" sy="100000" kx="0" ky="0" algn="bl" rotWithShape="0" blurRad="76200" dist="12700" dir="5400000">
+            <a:outerShdw blurRad="76200" dist="12700" dir="5400000" algn="bl" rotWithShape="0">
               <a:srgbClr val="94A3B8">
                 <a:alpha val="16000"/>
               </a:srgbClr>
             </a:outerShdw>
           </a:effectLst>
         </p:spPr>
+        <p:txBody>
+          <a:bodyPr/>
+          <a:lstStyle/>
+          <a:p>
+            <a:endParaRPr lang="th-TH"/>
+          </a:p>
+        </p:txBody>
       </p:sp>
       <p:sp>
         <p:nvSpPr>
@@ -13651,6 +13762,13 @@
           </a:solidFill>
           <a:ln/>
         </p:spPr>
+        <p:txBody>
+          <a:bodyPr/>
+          <a:lstStyle/>
+          <a:p>
+            <a:endParaRPr lang="th-TH"/>
+          </a:p>
+        </p:txBody>
       </p:sp>
       <p:sp>
         <p:nvSpPr>
@@ -13673,7 +13791,7 @@
           <a:bodyPr wrap="square" rtlCol="0" anchor="ctr"/>
           <a:lstStyle/>
           <a:p>
-            <a:pPr indent="0" marL="0">
+            <a:pPr marL="0" indent="0">
               <a:buNone/>
             </a:pPr>
             <a:r>
@@ -13712,7 +13830,7 @@
           <a:bodyPr wrap="square" rtlCol="0" anchor="ctr"/>
           <a:lstStyle/>
           <a:p>
-            <a:pPr indent="0" marL="0">
+            <a:pPr marL="0" indent="0">
               <a:lnSpc>
                 <a:spcPct val="115000"/>
               </a:lnSpc>
@@ -13754,7 +13872,7 @@
           <a:bodyPr wrap="square" rtlCol="0" anchor="ctr"/>
           <a:lstStyle/>
           <a:p>
-            <a:pPr indent="0" marL="0">
+            <a:pPr marL="0" indent="0">
               <a:buNone/>
             </a:pPr>
             <a:r>
@@ -13793,6 +13911,13 @@
           </a:solidFill>
           <a:ln/>
         </p:spPr>
+        <p:txBody>
+          <a:bodyPr/>
+          <a:lstStyle/>
+          <a:p>
+            <a:endParaRPr lang="th-TH"/>
+          </a:p>
+        </p:txBody>
       </p:sp>
       <p:sp>
         <p:nvSpPr>
@@ -13815,7 +13940,7 @@
           <a:bodyPr wrap="square" rtlCol="0" anchor="ctr"/>
           <a:lstStyle/>
           <a:p>
-            <a:pPr indent="0" marL="0">
+            <a:pPr marL="0" indent="0">
               <a:buNone/>
             </a:pPr>
             <a:r>
@@ -13829,9 +13954,6 @@
               </a:rPr>
               <a:t>OEE = Availability × Performance × Quality = </a:t>
             </a:r>
-            <a:pPr indent="0" marL="0">
-              <a:buNone/>
-            </a:pPr>
             <a:r>
               <a:rPr lang="en-US" sz="1500" b="1" dirty="0">
                 <a:solidFill>
@@ -13843,9 +13965,6 @@
               </a:rPr>
               <a:t>57.6%</a:t>
             </a:r>
-            <a:pPr indent="0" marL="0">
-              <a:buNone/>
-            </a:pPr>
             <a:r>
               <a:rPr lang="en-US" sz="1200" dirty="0">
                 <a:solidFill>
@@ -13863,7 +13982,7 @@
       </p:sp>
       <p:graphicFrame>
         <p:nvGraphicFramePr>
-          <p:cNvPr id="6" name="Table 0"/>
+          <p:cNvPr id="24" name="Table 0"/>
           <p:cNvGraphicFramePr>
             <a:graphicFrameLocks noGrp="1"/>
           </p:cNvGraphicFramePr>
@@ -13877,18 +13996,48 @@
         </p:nvGraphicFramePr>
         <p:xfrm>
           <a:off x="640080" y="3858768"/>
-          <a:ext cx="10881360" cy="914400"/>
+          <a:ext cx="10881360" cy="1645920"/>
         </p:xfrm>
         <a:graphic>
           <a:graphicData uri="http://schemas.openxmlformats.org/drawingml/2006/table">
             <a:tbl>
               <a:tblPr/>
               <a:tblGrid>
-                <a:gridCol w="3749040"/>
-                <a:gridCol w="1828800"/>
-                <a:gridCol w="1554480"/>
-                <a:gridCol w="1554480"/>
-                <a:gridCol w="2194560"/>
+                <a:gridCol w="3749040">
+                  <a:extLst>
+                    <a:ext uri="{9D8B030D-6E8A-4147-A177-3AD203B41FA5}">
+                      <a16:colId xmlns:a16="http://schemas.microsoft.com/office/drawing/2014/main" val="20000"/>
+                    </a:ext>
+                  </a:extLst>
+                </a:gridCol>
+                <a:gridCol w="1828800">
+                  <a:extLst>
+                    <a:ext uri="{9D8B030D-6E8A-4147-A177-3AD203B41FA5}">
+                      <a16:colId xmlns:a16="http://schemas.microsoft.com/office/drawing/2014/main" val="20001"/>
+                    </a:ext>
+                  </a:extLst>
+                </a:gridCol>
+                <a:gridCol w="1554480">
+                  <a:extLst>
+                    <a:ext uri="{9D8B030D-6E8A-4147-A177-3AD203B41FA5}">
+                      <a16:colId xmlns:a16="http://schemas.microsoft.com/office/drawing/2014/main" val="20002"/>
+                    </a:ext>
+                  </a:extLst>
+                </a:gridCol>
+                <a:gridCol w="1554480">
+                  <a:extLst>
+                    <a:ext uri="{9D8B030D-6E8A-4147-A177-3AD203B41FA5}">
+                      <a16:colId xmlns:a16="http://schemas.microsoft.com/office/drawing/2014/main" val="20003"/>
+                    </a:ext>
+                  </a:extLst>
+                </a:gridCol>
+                <a:gridCol w="2194560">
+                  <a:extLst>
+                    <a:ext uri="{9D8B030D-6E8A-4147-A177-3AD203B41FA5}">
+                      <a16:colId xmlns:a16="http://schemas.microsoft.com/office/drawing/2014/main" val="20004"/>
+                    </a:ext>
+                  </a:extLst>
+                </a:gridCol>
               </a:tblGrid>
               <a:tr h="329184">
                 <a:tc>
@@ -13896,7 +14045,7 @@
                     <a:bodyPr/>
                     <a:lstStyle/>
                     <a:p>
-                      <a:pPr algn="ctr" indent="0" marL="0">
+                      <a:pPr marL="0" indent="0" algn="ctr">
                         <a:buNone/>
                       </a:pPr>
                       <a:r>
@@ -13917,7 +14066,7 @@
                       </a:endParaRPr>
                     </a:p>
                   </a:txBody>
-                  <a:tcPr marL="91440" marR="91440" marT="45720" marB="45720" anchor="ctr">
+                  <a:tcPr anchor="ctr">
                     <a:lnL w="0" cap="flat" cmpd="sng" algn="ctr">
                       <a:noFill/>
                     </a:lnL>
@@ -13940,7 +14089,7 @@
                     <a:bodyPr/>
                     <a:lstStyle/>
                     <a:p>
-                      <a:pPr algn="ctr" indent="0" marL="0">
+                      <a:pPr marL="0" indent="0" algn="ctr">
                         <a:buNone/>
                       </a:pPr>
                       <a:r>
@@ -13961,7 +14110,7 @@
                       </a:endParaRPr>
                     </a:p>
                   </a:txBody>
-                  <a:tcPr marL="91440" marR="91440" marT="45720" marB="45720" anchor="ctr">
+                  <a:tcPr anchor="ctr">
                     <a:lnL w="0" cap="flat" cmpd="sng" algn="ctr">
                       <a:noFill/>
                     </a:lnL>
@@ -13984,7 +14133,7 @@
                     <a:bodyPr/>
                     <a:lstStyle/>
                     <a:p>
-                      <a:pPr algn="ctr" indent="0" marL="0">
+                      <a:pPr marL="0" indent="0" algn="ctr">
                         <a:buNone/>
                       </a:pPr>
                       <a:r>
@@ -14005,7 +14154,7 @@
                       </a:endParaRPr>
                     </a:p>
                   </a:txBody>
-                  <a:tcPr marL="91440" marR="91440" marT="45720" marB="45720" anchor="ctr">
+                  <a:tcPr anchor="ctr">
                     <a:lnL w="0" cap="flat" cmpd="sng" algn="ctr">
                       <a:noFill/>
                     </a:lnL>
@@ -14028,7 +14177,7 @@
                     <a:bodyPr/>
                     <a:lstStyle/>
                     <a:p>
-                      <a:pPr algn="ctr" indent="0" marL="0">
+                      <a:pPr marL="0" indent="0" algn="ctr">
                         <a:buNone/>
                       </a:pPr>
                       <a:r>
@@ -14049,7 +14198,7 @@
                       </a:endParaRPr>
                     </a:p>
                   </a:txBody>
-                  <a:tcPr marL="91440" marR="91440" marT="45720" marB="45720" anchor="ctr">
+                  <a:tcPr anchor="ctr">
                     <a:lnL w="0" cap="flat" cmpd="sng" algn="ctr">
                       <a:noFill/>
                     </a:lnL>
@@ -14072,7 +14221,7 @@
                     <a:bodyPr/>
                     <a:lstStyle/>
                     <a:p>
-                      <a:pPr algn="ctr" indent="0" marL="0">
+                      <a:pPr marL="0" indent="0" algn="ctr">
                         <a:buNone/>
                       </a:pPr>
                       <a:r>
@@ -14093,7 +14242,7 @@
                       </a:endParaRPr>
                     </a:p>
                   </a:txBody>
-                  <a:tcPr marL="91440" marR="91440" marT="45720" marB="45720" anchor="ctr">
+                  <a:tcPr anchor="ctr">
                     <a:lnL w="0" cap="flat" cmpd="sng" algn="ctr">
                       <a:noFill/>
                     </a:lnL>
@@ -14111,6 +14260,11 @@
                     </a:solidFill>
                   </a:tcPr>
                 </a:tc>
+                <a:extLst>
+                  <a:ext uri="{0D108BD9-81ED-4DB2-BD59-A6C34878D82A}">
+                    <a16:rowId xmlns:a16="http://schemas.microsoft.com/office/drawing/2014/main" val="10000"/>
+                  </a:ext>
+                </a:extLst>
               </a:tr>
               <a:tr h="329184">
                 <a:tc>
@@ -14118,7 +14272,7 @@
                     <a:bodyPr/>
                     <a:lstStyle/>
                     <a:p>
-                      <a:pPr algn="l" indent="0" marL="0">
+                      <a:pPr marL="0" indent="0" algn="l">
                         <a:buNone/>
                       </a:pPr>
                       <a:r>
@@ -14139,7 +14293,344 @@
                       </a:endParaRPr>
                     </a:p>
                   </a:txBody>
-                  <a:tcPr marL="91440" marR="91440" marT="45720" marB="45720" anchor="ctr">
+                  <a:tcPr anchor="ctr">
+                    <a:lnL w="6350" cap="flat" cmpd="sng" algn="ctr">
+                      <a:solidFill>
+                        <a:srgbClr val="E2E8F0"/>
+                      </a:solidFill>
+                      <a:prstDash val="solid"/>
+                      <a:round/>
+                      <a:headEnd type="none" w="med" len="med"/>
+                      <a:tailEnd type="none" w="med" len="med"/>
+                    </a:lnL>
+                    <a:lnR w="6350" cap="flat" cmpd="sng" algn="ctr">
+                      <a:solidFill>
+                        <a:srgbClr val="E2E8F0"/>
+                      </a:solidFill>
+                      <a:prstDash val="solid"/>
+                      <a:round/>
+                      <a:headEnd type="none" w="med" len="med"/>
+                      <a:tailEnd type="none" w="med" len="med"/>
+                    </a:lnR>
+                    <a:lnT w="6350" cap="flat" cmpd="sng" algn="ctr">
+                      <a:noFill/>
+                      <a:prstDash val="solid"/>
+                      <a:round/>
+                      <a:headEnd type="none" w="med" len="med"/>
+                      <a:tailEnd type="none" w="med" len="med"/>
+                    </a:lnT>
+                    <a:lnB w="6350" cap="flat" cmpd="sng" algn="ctr">
+                      <a:solidFill>
+                        <a:srgbClr val="E2E8F0"/>
+                      </a:solidFill>
+                      <a:prstDash val="solid"/>
+                      <a:round/>
+                      <a:headEnd type="none" w="med" len="med"/>
+                      <a:tailEnd type="none" w="med" len="med"/>
+                    </a:lnB>
+                    <a:solidFill>
+                      <a:srgbClr val="FFFFFF"/>
+                    </a:solidFill>
+                  </a:tcPr>
+                </a:tc>
+                <a:tc>
+                  <a:txBody>
+                    <a:bodyPr/>
+                    <a:lstStyle/>
+                    <a:p>
+                      <a:pPr marL="0" indent="0" algn="r">
+                        <a:buNone/>
+                      </a:pPr>
+                      <a:r>
+                        <a:rPr lang="en-US" sz="1200" dirty="0">
+                          <a:solidFill>
+                            <a:srgbClr val="334155"/>
+                          </a:solidFill>
+                          <a:latin typeface="Leelawadee UI" pitchFamily="34" charset="0"/>
+                          <a:ea typeface="Leelawadee UI" pitchFamily="34" charset="-122"/>
+                          <a:cs typeface="Leelawadee UI" pitchFamily="34" charset="-120"/>
+                        </a:rPr>
+                        <a:t>57.3%</a:t>
+                      </a:r>
+                      <a:endParaRPr lang="en-US" sz="1200" dirty="0">
+                        <a:latin typeface="Leelawadee UI" charset="0"/>
+                        <a:ea typeface="Leelawadee UI" charset="0"/>
+                        <a:cs typeface="Leelawadee UI" charset="0"/>
+                      </a:endParaRPr>
+                    </a:p>
+                  </a:txBody>
+                  <a:tcPr anchor="ctr">
+                    <a:lnL w="6350" cap="flat" cmpd="sng" algn="ctr">
+                      <a:solidFill>
+                        <a:srgbClr val="E2E8F0"/>
+                      </a:solidFill>
+                      <a:prstDash val="solid"/>
+                      <a:round/>
+                      <a:headEnd type="none" w="med" len="med"/>
+                      <a:tailEnd type="none" w="med" len="med"/>
+                    </a:lnL>
+                    <a:lnR w="6350" cap="flat" cmpd="sng" algn="ctr">
+                      <a:solidFill>
+                        <a:srgbClr val="E2E8F0"/>
+                      </a:solidFill>
+                      <a:prstDash val="solid"/>
+                      <a:round/>
+                      <a:headEnd type="none" w="med" len="med"/>
+                      <a:tailEnd type="none" w="med" len="med"/>
+                    </a:lnR>
+                    <a:lnT w="6350" cap="flat" cmpd="sng" algn="ctr">
+                      <a:noFill/>
+                      <a:prstDash val="solid"/>
+                      <a:round/>
+                      <a:headEnd type="none" w="med" len="med"/>
+                      <a:tailEnd type="none" w="med" len="med"/>
+                    </a:lnT>
+                    <a:lnB w="6350" cap="flat" cmpd="sng" algn="ctr">
+                      <a:solidFill>
+                        <a:srgbClr val="E2E8F0"/>
+                      </a:solidFill>
+                      <a:prstDash val="solid"/>
+                      <a:round/>
+                      <a:headEnd type="none" w="med" len="med"/>
+                      <a:tailEnd type="none" w="med" len="med"/>
+                    </a:lnB>
+                    <a:solidFill>
+                      <a:srgbClr val="FFFFFF"/>
+                    </a:solidFill>
+                  </a:tcPr>
+                </a:tc>
+                <a:tc>
+                  <a:txBody>
+                    <a:bodyPr/>
+                    <a:lstStyle/>
+                    <a:p>
+                      <a:pPr marL="0" indent="0" algn="r">
+                        <a:buNone/>
+                      </a:pPr>
+                      <a:r>
+                        <a:rPr lang="en-US" sz="1200" dirty="0">
+                          <a:solidFill>
+                            <a:srgbClr val="334155"/>
+                          </a:solidFill>
+                          <a:latin typeface="Leelawadee UI" pitchFamily="34" charset="0"/>
+                          <a:ea typeface="Leelawadee UI" pitchFamily="34" charset="-122"/>
+                          <a:cs typeface="Leelawadee UI" pitchFamily="34" charset="-120"/>
+                        </a:rPr>
+                        <a:t>99%</a:t>
+                      </a:r>
+                      <a:endParaRPr lang="en-US" sz="1200" dirty="0">
+                        <a:latin typeface="Leelawadee UI" charset="0"/>
+                        <a:ea typeface="Leelawadee UI" charset="0"/>
+                        <a:cs typeface="Leelawadee UI" charset="0"/>
+                      </a:endParaRPr>
+                    </a:p>
+                  </a:txBody>
+                  <a:tcPr anchor="ctr">
+                    <a:lnL w="6350" cap="flat" cmpd="sng" algn="ctr">
+                      <a:solidFill>
+                        <a:srgbClr val="E2E8F0"/>
+                      </a:solidFill>
+                      <a:prstDash val="solid"/>
+                      <a:round/>
+                      <a:headEnd type="none" w="med" len="med"/>
+                      <a:tailEnd type="none" w="med" len="med"/>
+                    </a:lnL>
+                    <a:lnR w="6350" cap="flat" cmpd="sng" algn="ctr">
+                      <a:solidFill>
+                        <a:srgbClr val="E2E8F0"/>
+                      </a:solidFill>
+                      <a:prstDash val="solid"/>
+                      <a:round/>
+                      <a:headEnd type="none" w="med" len="med"/>
+                      <a:tailEnd type="none" w="med" len="med"/>
+                    </a:lnR>
+                    <a:lnT w="6350" cap="flat" cmpd="sng" algn="ctr">
+                      <a:noFill/>
+                      <a:prstDash val="solid"/>
+                      <a:round/>
+                      <a:headEnd type="none" w="med" len="med"/>
+                      <a:tailEnd type="none" w="med" len="med"/>
+                    </a:lnT>
+                    <a:lnB w="6350" cap="flat" cmpd="sng" algn="ctr">
+                      <a:solidFill>
+                        <a:srgbClr val="E2E8F0"/>
+                      </a:solidFill>
+                      <a:prstDash val="solid"/>
+                      <a:round/>
+                      <a:headEnd type="none" w="med" len="med"/>
+                      <a:tailEnd type="none" w="med" len="med"/>
+                    </a:lnB>
+                    <a:solidFill>
+                      <a:srgbClr val="FFFFFF"/>
+                    </a:solidFill>
+                  </a:tcPr>
+                </a:tc>
+                <a:tc>
+                  <a:txBody>
+                    <a:bodyPr/>
+                    <a:lstStyle/>
+                    <a:p>
+                      <a:pPr marL="0" indent="0" algn="r">
+                        <a:buNone/>
+                      </a:pPr>
+                      <a:r>
+                        <a:rPr lang="en-US" sz="1200" b="1" dirty="0">
+                          <a:solidFill>
+                            <a:srgbClr val="B91C1C"/>
+                          </a:solidFill>
+                          <a:latin typeface="Leelawadee UI" pitchFamily="34" charset="0"/>
+                          <a:ea typeface="Leelawadee UI" pitchFamily="34" charset="-122"/>
+                          <a:cs typeface="Leelawadee UI" pitchFamily="34" charset="-120"/>
+                        </a:rPr>
+                        <a:t>56.7%</a:t>
+                      </a:r>
+                      <a:endParaRPr lang="en-US" sz="1200" dirty="0">
+                        <a:latin typeface="Leelawadee UI" charset="0"/>
+                        <a:ea typeface="Leelawadee UI" charset="0"/>
+                        <a:cs typeface="Leelawadee UI" charset="0"/>
+                      </a:endParaRPr>
+                    </a:p>
+                  </a:txBody>
+                  <a:tcPr anchor="ctr">
+                    <a:lnL w="6350" cap="flat" cmpd="sng" algn="ctr">
+                      <a:solidFill>
+                        <a:srgbClr val="E2E8F0"/>
+                      </a:solidFill>
+                      <a:prstDash val="solid"/>
+                      <a:round/>
+                      <a:headEnd type="none" w="med" len="med"/>
+                      <a:tailEnd type="none" w="med" len="med"/>
+                    </a:lnL>
+                    <a:lnR w="6350" cap="flat" cmpd="sng" algn="ctr">
+                      <a:solidFill>
+                        <a:srgbClr val="E2E8F0"/>
+                      </a:solidFill>
+                      <a:prstDash val="solid"/>
+                      <a:round/>
+                      <a:headEnd type="none" w="med" len="med"/>
+                      <a:tailEnd type="none" w="med" len="med"/>
+                    </a:lnR>
+                    <a:lnT w="6350" cap="flat" cmpd="sng" algn="ctr">
+                      <a:noFill/>
+                      <a:prstDash val="solid"/>
+                      <a:round/>
+                      <a:headEnd type="none" w="med" len="med"/>
+                      <a:tailEnd type="none" w="med" len="med"/>
+                    </a:lnT>
+                    <a:lnB w="6350" cap="flat" cmpd="sng" algn="ctr">
+                      <a:solidFill>
+                        <a:srgbClr val="E2E8F0"/>
+                      </a:solidFill>
+                      <a:prstDash val="solid"/>
+                      <a:round/>
+                      <a:headEnd type="none" w="med" len="med"/>
+                      <a:tailEnd type="none" w="med" len="med"/>
+                    </a:lnB>
+                    <a:solidFill>
+                      <a:srgbClr val="FFFFFF"/>
+                    </a:solidFill>
+                  </a:tcPr>
+                </a:tc>
+                <a:tc>
+                  <a:txBody>
+                    <a:bodyPr/>
+                    <a:lstStyle/>
+                    <a:p>
+                      <a:pPr marL="0" indent="0" algn="r">
+                        <a:buNone/>
+                      </a:pPr>
+                      <a:r>
+                        <a:rPr lang="en-US" sz="1200" dirty="0">
+                          <a:solidFill>
+                            <a:srgbClr val="334155"/>
+                          </a:solidFill>
+                          <a:latin typeface="Leelawadee UI" pitchFamily="34" charset="0"/>
+                          <a:ea typeface="Leelawadee UI" pitchFamily="34" charset="-122"/>
+                          <a:cs typeface="Leelawadee UI" pitchFamily="34" charset="-120"/>
+                        </a:rPr>
+                        <a:t>42.7%</a:t>
+                      </a:r>
+                      <a:endParaRPr lang="en-US" sz="1200" dirty="0">
+                        <a:latin typeface="Leelawadee UI" charset="0"/>
+                        <a:ea typeface="Leelawadee UI" charset="0"/>
+                        <a:cs typeface="Leelawadee UI" charset="0"/>
+                      </a:endParaRPr>
+                    </a:p>
+                  </a:txBody>
+                  <a:tcPr anchor="ctr">
+                    <a:lnL w="6350" cap="flat" cmpd="sng" algn="ctr">
+                      <a:solidFill>
+                        <a:srgbClr val="E2E8F0"/>
+                      </a:solidFill>
+                      <a:prstDash val="solid"/>
+                      <a:round/>
+                      <a:headEnd type="none" w="med" len="med"/>
+                      <a:tailEnd type="none" w="med" len="med"/>
+                    </a:lnL>
+                    <a:lnR w="6350" cap="flat" cmpd="sng" algn="ctr">
+                      <a:solidFill>
+                        <a:srgbClr val="E2E8F0"/>
+                      </a:solidFill>
+                      <a:prstDash val="solid"/>
+                      <a:round/>
+                      <a:headEnd type="none" w="med" len="med"/>
+                      <a:tailEnd type="none" w="med" len="med"/>
+                    </a:lnR>
+                    <a:lnT w="6350" cap="flat" cmpd="sng" algn="ctr">
+                      <a:noFill/>
+                      <a:prstDash val="solid"/>
+                      <a:round/>
+                      <a:headEnd type="none" w="med" len="med"/>
+                      <a:tailEnd type="none" w="med" len="med"/>
+                    </a:lnT>
+                    <a:lnB w="6350" cap="flat" cmpd="sng" algn="ctr">
+                      <a:solidFill>
+                        <a:srgbClr val="E2E8F0"/>
+                      </a:solidFill>
+                      <a:prstDash val="solid"/>
+                      <a:round/>
+                      <a:headEnd type="none" w="med" len="med"/>
+                      <a:tailEnd type="none" w="med" len="med"/>
+                    </a:lnB>
+                    <a:solidFill>
+                      <a:srgbClr val="FFFFFF"/>
+                    </a:solidFill>
+                  </a:tcPr>
+                </a:tc>
+                <a:extLst>
+                  <a:ext uri="{0D108BD9-81ED-4DB2-BD59-A6C34878D82A}">
+                    <a16:rowId xmlns:a16="http://schemas.microsoft.com/office/drawing/2014/main" val="10001"/>
+                  </a:ext>
+                </a:extLst>
+              </a:tr>
+              <a:tr h="329184">
+                <a:tc>
+                  <a:txBody>
+                    <a:bodyPr/>
+                    <a:lstStyle/>
+                    <a:p>
+                      <a:pPr marL="0" indent="0" algn="l">
+                        <a:buNone/>
+                      </a:pPr>
+                      <a:r>
+                        <a:rPr lang="en-US" sz="1200" dirty="0">
+                          <a:solidFill>
+                            <a:srgbClr val="334155"/>
+                          </a:solidFill>
+                          <a:latin typeface="Leelawadee UI" pitchFamily="34" charset="0"/>
+                          <a:ea typeface="Leelawadee UI" pitchFamily="34" charset="-122"/>
+                          <a:cs typeface="Leelawadee UI" pitchFamily="34" charset="-120"/>
+                        </a:rPr>
+                        <a:t>LN-B สายเติมวงจรและทดสอบ</a:t>
+                      </a:r>
+                      <a:endParaRPr lang="en-US" sz="1200" dirty="0">
+                        <a:latin typeface="Leelawadee UI" charset="0"/>
+                        <a:ea typeface="Leelawadee UI" charset="0"/>
+                        <a:cs typeface="Leelawadee UI" charset="0"/>
+                      </a:endParaRPr>
+                    </a:p>
+                  </a:txBody>
+                  <a:tcPr anchor="ctr">
                     <a:lnL w="6350" cap="flat" cmpd="sng" algn="ctr">
                       <a:solidFill>
                         <a:srgbClr val="E2E8F0"/>
@@ -14186,7 +14677,7 @@
                     <a:bodyPr/>
                     <a:lstStyle/>
                     <a:p>
-                      <a:pPr algn="r" indent="0" marL="0">
+                      <a:pPr marL="0" indent="0" algn="r">
                         <a:buNone/>
                       </a:pPr>
                       <a:r>
@@ -14198,7 +14689,7 @@
                           <a:ea typeface="Leelawadee UI" pitchFamily="34" charset="-122"/>
                           <a:cs typeface="Leelawadee UI" pitchFamily="34" charset="-120"/>
                         </a:rPr>
-                        <a:t>57.3%</a:t>
+                        <a:t>74.1%</a:t>
                       </a:r>
                       <a:endParaRPr lang="en-US" sz="1200" dirty="0">
                         <a:latin typeface="Leelawadee UI" charset="0"/>
@@ -14207,7 +14698,7 @@
                       </a:endParaRPr>
                     </a:p>
                   </a:txBody>
-                  <a:tcPr marL="91440" marR="91440" marT="45720" marB="45720" anchor="ctr">
+                  <a:tcPr anchor="ctr">
                     <a:lnL w="6350" cap="flat" cmpd="sng" algn="ctr">
                       <a:solidFill>
                         <a:srgbClr val="E2E8F0"/>
@@ -14254,7 +14745,7 @@
                     <a:bodyPr/>
                     <a:lstStyle/>
                     <a:p>
-                      <a:pPr algn="r" indent="0" marL="0">
+                      <a:pPr marL="0" indent="0" algn="r">
                         <a:buNone/>
                       </a:pPr>
                       <a:r>
@@ -14266,7 +14757,7 @@
                           <a:ea typeface="Leelawadee UI" pitchFamily="34" charset="-122"/>
                           <a:cs typeface="Leelawadee UI" pitchFamily="34" charset="-120"/>
                         </a:rPr>
-                        <a:t>99%</a:t>
+                        <a:t>98.7%</a:t>
                       </a:r>
                       <a:endParaRPr lang="en-US" sz="1200" dirty="0">
                         <a:latin typeface="Leelawadee UI" charset="0"/>
@@ -14275,7 +14766,7 @@
                       </a:endParaRPr>
                     </a:p>
                   </a:txBody>
-                  <a:tcPr marL="91440" marR="91440" marT="45720" marB="45720" anchor="ctr">
+                  <a:tcPr anchor="ctr">
                     <a:lnL w="6350" cap="flat" cmpd="sng" algn="ctr">
                       <a:solidFill>
                         <a:srgbClr val="E2E8F0"/>
@@ -14322,19 +14813,19 @@
                     <a:bodyPr/>
                     <a:lstStyle/>
                     <a:p>
-                      <a:pPr algn="r" indent="0" marL="0">
+                      <a:pPr marL="0" indent="0" algn="r">
                         <a:buNone/>
                       </a:pPr>
                       <a:r>
                         <a:rPr lang="en-US" sz="1200" b="1" dirty="0">
                           <a:solidFill>
-                            <a:srgbClr val="B91C1C"/>
+                            <a:srgbClr val="15803D"/>
                           </a:solidFill>
                           <a:latin typeface="Leelawadee UI" pitchFamily="34" charset="0"/>
                           <a:ea typeface="Leelawadee UI" pitchFamily="34" charset="-122"/>
                           <a:cs typeface="Leelawadee UI" pitchFamily="34" charset="-120"/>
                         </a:rPr>
-                        <a:t>56.7%</a:t>
+                        <a:t>73.1%</a:t>
                       </a:r>
                       <a:endParaRPr lang="en-US" sz="1200" dirty="0">
                         <a:latin typeface="Leelawadee UI" charset="0"/>
@@ -14343,7 +14834,7 @@
                       </a:endParaRPr>
                     </a:p>
                   </a:txBody>
-                  <a:tcPr marL="91440" marR="91440" marT="45720" marB="45720" anchor="ctr">
+                  <a:tcPr anchor="ctr">
                     <a:lnL w="6350" cap="flat" cmpd="sng" algn="ctr">
                       <a:solidFill>
                         <a:srgbClr val="E2E8F0"/>
@@ -14390,7 +14881,7 @@
                     <a:bodyPr/>
                     <a:lstStyle/>
                     <a:p>
-                      <a:pPr algn="r" indent="0" marL="0">
+                      <a:pPr marL="0" indent="0" algn="r">
                         <a:buNone/>
                       </a:pPr>
                       <a:r>
@@ -14402,7 +14893,7 @@
                           <a:ea typeface="Leelawadee UI" pitchFamily="34" charset="-122"/>
                           <a:cs typeface="Leelawadee UI" pitchFamily="34" charset="-120"/>
                         </a:rPr>
-                        <a:t>42.7%</a:t>
+                        <a:t>25.9%</a:t>
                       </a:r>
                       <a:endParaRPr lang="en-US" sz="1200" dirty="0">
                         <a:latin typeface="Leelawadee UI" charset="0"/>
@@ -14411,7 +14902,7 @@
                       </a:endParaRPr>
                     </a:p>
                   </a:txBody>
-                  <a:tcPr marL="91440" marR="91440" marT="45720" marB="45720" anchor="ctr">
+                  <a:tcPr anchor="ctr">
                     <a:lnL w="6350" cap="flat" cmpd="sng" algn="ctr">
                       <a:solidFill>
                         <a:srgbClr val="E2E8F0"/>
@@ -14453,6 +14944,11 @@
                     </a:solidFill>
                   </a:tcPr>
                 </a:tc>
+                <a:extLst>
+                  <a:ext uri="{0D108BD9-81ED-4DB2-BD59-A6C34878D82A}">
+                    <a16:rowId xmlns:a16="http://schemas.microsoft.com/office/drawing/2014/main" val="10002"/>
+                  </a:ext>
+                </a:extLst>
               </a:tr>
               <a:tr h="329184">
                 <a:tc>
@@ -14460,7 +14956,7 @@
                     <a:bodyPr/>
                     <a:lstStyle/>
                     <a:p>
-                      <a:pPr algn="l" indent="0" marL="0">
+                      <a:pPr marL="0" indent="0" algn="l">
                         <a:buNone/>
                       </a:pPr>
                       <a:r>
@@ -14472,7 +14968,7 @@
                           <a:ea typeface="Leelawadee UI" pitchFamily="34" charset="-122"/>
                           <a:cs typeface="Leelawadee UI" pitchFamily="34" charset="-120"/>
                         </a:rPr>
-                        <a:t>LN-B สายเติมวงจรและทดสอบ</a:t>
+                        <a:t>LN-C สายฉีดขึ้นรูปพลาสติก</a:t>
                       </a:r>
                       <a:endParaRPr lang="en-US" sz="1200" dirty="0">
                         <a:latin typeface="Leelawadee UI" charset="0"/>
@@ -14481,7 +14977,7 @@
                       </a:endParaRPr>
                     </a:p>
                   </a:txBody>
-                  <a:tcPr marL="91440" marR="91440" marT="45720" marB="45720" anchor="ctr">
+                  <a:tcPr anchor="ctr">
                     <a:lnL w="6350" cap="flat" cmpd="sng" algn="ctr">
                       <a:solidFill>
                         <a:srgbClr val="E2E8F0"/>
@@ -14528,7 +15024,7 @@
                     <a:bodyPr/>
                     <a:lstStyle/>
                     <a:p>
-                      <a:pPr algn="r" indent="0" marL="0">
+                      <a:pPr marL="0" indent="0" algn="r">
                         <a:buNone/>
                       </a:pPr>
                       <a:r>
@@ -14540,7 +15036,7 @@
                           <a:ea typeface="Leelawadee UI" pitchFamily="34" charset="-122"/>
                           <a:cs typeface="Leelawadee UI" pitchFamily="34" charset="-120"/>
                         </a:rPr>
-                        <a:t>74.1%</a:t>
+                        <a:t>56%</a:t>
                       </a:r>
                       <a:endParaRPr lang="en-US" sz="1200" dirty="0">
                         <a:latin typeface="Leelawadee UI" charset="0"/>
@@ -14549,7 +15045,7 @@
                       </a:endParaRPr>
                     </a:p>
                   </a:txBody>
-                  <a:tcPr marL="91440" marR="91440" marT="45720" marB="45720" anchor="ctr">
+                  <a:tcPr anchor="ctr">
                     <a:lnL w="6350" cap="flat" cmpd="sng" algn="ctr">
                       <a:solidFill>
                         <a:srgbClr val="E2E8F0"/>
@@ -14596,7 +15092,7 @@
                     <a:bodyPr/>
                     <a:lstStyle/>
                     <a:p>
-                      <a:pPr algn="r" indent="0" marL="0">
+                      <a:pPr marL="0" indent="0" algn="r">
                         <a:buNone/>
                       </a:pPr>
                       <a:r>
@@ -14608,7 +15104,7 @@
                           <a:ea typeface="Leelawadee UI" pitchFamily="34" charset="-122"/>
                           <a:cs typeface="Leelawadee UI" pitchFamily="34" charset="-120"/>
                         </a:rPr>
-                        <a:t>98.7%</a:t>
+                        <a:t>98.4%</a:t>
                       </a:r>
                       <a:endParaRPr lang="en-US" sz="1200" dirty="0">
                         <a:latin typeface="Leelawadee UI" charset="0"/>
@@ -14617,7 +15113,7 @@
                       </a:endParaRPr>
                     </a:p>
                   </a:txBody>
-                  <a:tcPr marL="91440" marR="91440" marT="45720" marB="45720" anchor="ctr">
+                  <a:tcPr anchor="ctr">
                     <a:lnL w="6350" cap="flat" cmpd="sng" algn="ctr">
                       <a:solidFill>
                         <a:srgbClr val="E2E8F0"/>
@@ -14664,19 +15160,19 @@
                     <a:bodyPr/>
                     <a:lstStyle/>
                     <a:p>
-                      <a:pPr algn="r" indent="0" marL="0">
+                      <a:pPr marL="0" indent="0" algn="r">
                         <a:buNone/>
                       </a:pPr>
                       <a:r>
                         <a:rPr lang="en-US" sz="1200" b="1" dirty="0">
                           <a:solidFill>
-                            <a:srgbClr val="15803D"/>
+                            <a:srgbClr val="B91C1C"/>
                           </a:solidFill>
                           <a:latin typeface="Leelawadee UI" pitchFamily="34" charset="0"/>
                           <a:ea typeface="Leelawadee UI" pitchFamily="34" charset="-122"/>
                           <a:cs typeface="Leelawadee UI" pitchFamily="34" charset="-120"/>
                         </a:rPr>
-                        <a:t>73.1%</a:t>
+                        <a:t>55.1%</a:t>
                       </a:r>
                       <a:endParaRPr lang="en-US" sz="1200" dirty="0">
                         <a:latin typeface="Leelawadee UI" charset="0"/>
@@ -14685,7 +15181,7 @@
                       </a:endParaRPr>
                     </a:p>
                   </a:txBody>
-                  <a:tcPr marL="91440" marR="91440" marT="45720" marB="45720" anchor="ctr">
+                  <a:tcPr anchor="ctr">
                     <a:lnL w="6350" cap="flat" cmpd="sng" algn="ctr">
                       <a:solidFill>
                         <a:srgbClr val="E2E8F0"/>
@@ -14732,7 +15228,7 @@
                     <a:bodyPr/>
                     <a:lstStyle/>
                     <a:p>
-                      <a:pPr algn="r" indent="0" marL="0">
+                      <a:pPr marL="0" indent="0" algn="r">
                         <a:buNone/>
                       </a:pPr>
                       <a:r>
@@ -14744,7 +15240,7 @@
                           <a:ea typeface="Leelawadee UI" pitchFamily="34" charset="-122"/>
                           <a:cs typeface="Leelawadee UI" pitchFamily="34" charset="-120"/>
                         </a:rPr>
-                        <a:t>25.9%</a:t>
+                        <a:t>44%</a:t>
                       </a:r>
                       <a:endParaRPr lang="en-US" sz="1200" dirty="0">
                         <a:latin typeface="Leelawadee UI" charset="0"/>
@@ -14753,7 +15249,7 @@
                       </a:endParaRPr>
                     </a:p>
                   </a:txBody>
-                  <a:tcPr marL="91440" marR="91440" marT="45720" marB="45720" anchor="ctr">
+                  <a:tcPr anchor="ctr">
                     <a:lnL w="6350" cap="flat" cmpd="sng" algn="ctr">
                       <a:solidFill>
                         <a:srgbClr val="E2E8F0"/>
@@ -14795,6 +15291,11 @@
                     </a:solidFill>
                   </a:tcPr>
                 </a:tc>
+                <a:extLst>
+                  <a:ext uri="{0D108BD9-81ED-4DB2-BD59-A6C34878D82A}">
+                    <a16:rowId xmlns:a16="http://schemas.microsoft.com/office/drawing/2014/main" val="10003"/>
+                  </a:ext>
+                </a:extLst>
               </a:tr>
               <a:tr h="329184">
                 <a:tc>
@@ -14802,349 +15303,7 @@
                     <a:bodyPr/>
                     <a:lstStyle/>
                     <a:p>
-                      <a:pPr algn="l" indent="0" marL="0">
-                        <a:buNone/>
-                      </a:pPr>
-                      <a:r>
-                        <a:rPr lang="en-US" sz="1200" dirty="0">
-                          <a:solidFill>
-                            <a:srgbClr val="334155"/>
-                          </a:solidFill>
-                          <a:latin typeface="Leelawadee UI" pitchFamily="34" charset="0"/>
-                          <a:ea typeface="Leelawadee UI" pitchFamily="34" charset="-122"/>
-                          <a:cs typeface="Leelawadee UI" pitchFamily="34" charset="-120"/>
-                        </a:rPr>
-                        <a:t>LN-C สายฉีดขึ้นรูปพลาสติก</a:t>
-                      </a:r>
-                      <a:endParaRPr lang="en-US" sz="1200" dirty="0">
-                        <a:latin typeface="Leelawadee UI" charset="0"/>
-                        <a:ea typeface="Leelawadee UI" charset="0"/>
-                        <a:cs typeface="Leelawadee UI" charset="0"/>
-                      </a:endParaRPr>
-                    </a:p>
-                  </a:txBody>
-                  <a:tcPr marL="91440" marR="91440" marT="45720" marB="45720" anchor="ctr">
-                    <a:lnL w="6350" cap="flat" cmpd="sng" algn="ctr">
-                      <a:solidFill>
-                        <a:srgbClr val="E2E8F0"/>
-                      </a:solidFill>
-                      <a:prstDash val="solid"/>
-                      <a:round/>
-                      <a:headEnd type="none" w="med" len="med"/>
-                      <a:tailEnd type="none" w="med" len="med"/>
-                    </a:lnL>
-                    <a:lnR w="6350" cap="flat" cmpd="sng" algn="ctr">
-                      <a:solidFill>
-                        <a:srgbClr val="E2E8F0"/>
-                      </a:solidFill>
-                      <a:prstDash val="solid"/>
-                      <a:round/>
-                      <a:headEnd type="none" w="med" len="med"/>
-                      <a:tailEnd type="none" w="med" len="med"/>
-                    </a:lnR>
-                    <a:lnT w="6350" cap="flat" cmpd="sng" algn="ctr">
-                      <a:solidFill>
-                        <a:srgbClr val="E2E8F0"/>
-                      </a:solidFill>
-                      <a:prstDash val="solid"/>
-                      <a:round/>
-                      <a:headEnd type="none" w="med" len="med"/>
-                      <a:tailEnd type="none" w="med" len="med"/>
-                    </a:lnT>
-                    <a:lnB w="6350" cap="flat" cmpd="sng" algn="ctr">
-                      <a:solidFill>
-                        <a:srgbClr val="E2E8F0"/>
-                      </a:solidFill>
-                      <a:prstDash val="solid"/>
-                      <a:round/>
-                      <a:headEnd type="none" w="med" len="med"/>
-                      <a:tailEnd type="none" w="med" len="med"/>
-                    </a:lnB>
-                    <a:solidFill>
-                      <a:srgbClr val="FFFFFF"/>
-                    </a:solidFill>
-                  </a:tcPr>
-                </a:tc>
-                <a:tc>
-                  <a:txBody>
-                    <a:bodyPr/>
-                    <a:lstStyle/>
-                    <a:p>
-                      <a:pPr algn="r" indent="0" marL="0">
-                        <a:buNone/>
-                      </a:pPr>
-                      <a:r>
-                        <a:rPr lang="en-US" sz="1200" dirty="0">
-                          <a:solidFill>
-                            <a:srgbClr val="334155"/>
-                          </a:solidFill>
-                          <a:latin typeface="Leelawadee UI" pitchFamily="34" charset="0"/>
-                          <a:ea typeface="Leelawadee UI" pitchFamily="34" charset="-122"/>
-                          <a:cs typeface="Leelawadee UI" pitchFamily="34" charset="-120"/>
-                        </a:rPr>
-                        <a:t>56%</a:t>
-                      </a:r>
-                      <a:endParaRPr lang="en-US" sz="1200" dirty="0">
-                        <a:latin typeface="Leelawadee UI" charset="0"/>
-                        <a:ea typeface="Leelawadee UI" charset="0"/>
-                        <a:cs typeface="Leelawadee UI" charset="0"/>
-                      </a:endParaRPr>
-                    </a:p>
-                  </a:txBody>
-                  <a:tcPr marL="91440" marR="91440" marT="45720" marB="45720" anchor="ctr">
-                    <a:lnL w="6350" cap="flat" cmpd="sng" algn="ctr">
-                      <a:solidFill>
-                        <a:srgbClr val="E2E8F0"/>
-                      </a:solidFill>
-                      <a:prstDash val="solid"/>
-                      <a:round/>
-                      <a:headEnd type="none" w="med" len="med"/>
-                      <a:tailEnd type="none" w="med" len="med"/>
-                    </a:lnL>
-                    <a:lnR w="6350" cap="flat" cmpd="sng" algn="ctr">
-                      <a:solidFill>
-                        <a:srgbClr val="E2E8F0"/>
-                      </a:solidFill>
-                      <a:prstDash val="solid"/>
-                      <a:round/>
-                      <a:headEnd type="none" w="med" len="med"/>
-                      <a:tailEnd type="none" w="med" len="med"/>
-                    </a:lnR>
-                    <a:lnT w="6350" cap="flat" cmpd="sng" algn="ctr">
-                      <a:solidFill>
-                        <a:srgbClr val="E2E8F0"/>
-                      </a:solidFill>
-                      <a:prstDash val="solid"/>
-                      <a:round/>
-                      <a:headEnd type="none" w="med" len="med"/>
-                      <a:tailEnd type="none" w="med" len="med"/>
-                    </a:lnT>
-                    <a:lnB w="6350" cap="flat" cmpd="sng" algn="ctr">
-                      <a:solidFill>
-                        <a:srgbClr val="E2E8F0"/>
-                      </a:solidFill>
-                      <a:prstDash val="solid"/>
-                      <a:round/>
-                      <a:headEnd type="none" w="med" len="med"/>
-                      <a:tailEnd type="none" w="med" len="med"/>
-                    </a:lnB>
-                    <a:solidFill>
-                      <a:srgbClr val="FFFFFF"/>
-                    </a:solidFill>
-                  </a:tcPr>
-                </a:tc>
-                <a:tc>
-                  <a:txBody>
-                    <a:bodyPr/>
-                    <a:lstStyle/>
-                    <a:p>
-                      <a:pPr algn="r" indent="0" marL="0">
-                        <a:buNone/>
-                      </a:pPr>
-                      <a:r>
-                        <a:rPr lang="en-US" sz="1200" dirty="0">
-                          <a:solidFill>
-                            <a:srgbClr val="334155"/>
-                          </a:solidFill>
-                          <a:latin typeface="Leelawadee UI" pitchFamily="34" charset="0"/>
-                          <a:ea typeface="Leelawadee UI" pitchFamily="34" charset="-122"/>
-                          <a:cs typeface="Leelawadee UI" pitchFamily="34" charset="-120"/>
-                        </a:rPr>
-                        <a:t>98.4%</a:t>
-                      </a:r>
-                      <a:endParaRPr lang="en-US" sz="1200" dirty="0">
-                        <a:latin typeface="Leelawadee UI" charset="0"/>
-                        <a:ea typeface="Leelawadee UI" charset="0"/>
-                        <a:cs typeface="Leelawadee UI" charset="0"/>
-                      </a:endParaRPr>
-                    </a:p>
-                  </a:txBody>
-                  <a:tcPr marL="91440" marR="91440" marT="45720" marB="45720" anchor="ctr">
-                    <a:lnL w="6350" cap="flat" cmpd="sng" algn="ctr">
-                      <a:solidFill>
-                        <a:srgbClr val="E2E8F0"/>
-                      </a:solidFill>
-                      <a:prstDash val="solid"/>
-                      <a:round/>
-                      <a:headEnd type="none" w="med" len="med"/>
-                      <a:tailEnd type="none" w="med" len="med"/>
-                    </a:lnL>
-                    <a:lnR w="6350" cap="flat" cmpd="sng" algn="ctr">
-                      <a:solidFill>
-                        <a:srgbClr val="E2E8F0"/>
-                      </a:solidFill>
-                      <a:prstDash val="solid"/>
-                      <a:round/>
-                      <a:headEnd type="none" w="med" len="med"/>
-                      <a:tailEnd type="none" w="med" len="med"/>
-                    </a:lnR>
-                    <a:lnT w="6350" cap="flat" cmpd="sng" algn="ctr">
-                      <a:solidFill>
-                        <a:srgbClr val="E2E8F0"/>
-                      </a:solidFill>
-                      <a:prstDash val="solid"/>
-                      <a:round/>
-                      <a:headEnd type="none" w="med" len="med"/>
-                      <a:tailEnd type="none" w="med" len="med"/>
-                    </a:lnT>
-                    <a:lnB w="6350" cap="flat" cmpd="sng" algn="ctr">
-                      <a:solidFill>
-                        <a:srgbClr val="E2E8F0"/>
-                      </a:solidFill>
-                      <a:prstDash val="solid"/>
-                      <a:round/>
-                      <a:headEnd type="none" w="med" len="med"/>
-                      <a:tailEnd type="none" w="med" len="med"/>
-                    </a:lnB>
-                    <a:solidFill>
-                      <a:srgbClr val="FFFFFF"/>
-                    </a:solidFill>
-                  </a:tcPr>
-                </a:tc>
-                <a:tc>
-                  <a:txBody>
-                    <a:bodyPr/>
-                    <a:lstStyle/>
-                    <a:p>
-                      <a:pPr algn="r" indent="0" marL="0">
-                        <a:buNone/>
-                      </a:pPr>
-                      <a:r>
-                        <a:rPr lang="en-US" sz="1200" b="1" dirty="0">
-                          <a:solidFill>
-                            <a:srgbClr val="B91C1C"/>
-                          </a:solidFill>
-                          <a:latin typeface="Leelawadee UI" pitchFamily="34" charset="0"/>
-                          <a:ea typeface="Leelawadee UI" pitchFamily="34" charset="-122"/>
-                          <a:cs typeface="Leelawadee UI" pitchFamily="34" charset="-120"/>
-                        </a:rPr>
-                        <a:t>55.1%</a:t>
-                      </a:r>
-                      <a:endParaRPr lang="en-US" sz="1200" dirty="0">
-                        <a:latin typeface="Leelawadee UI" charset="0"/>
-                        <a:ea typeface="Leelawadee UI" charset="0"/>
-                        <a:cs typeface="Leelawadee UI" charset="0"/>
-                      </a:endParaRPr>
-                    </a:p>
-                  </a:txBody>
-                  <a:tcPr marL="91440" marR="91440" marT="45720" marB="45720" anchor="ctr">
-                    <a:lnL w="6350" cap="flat" cmpd="sng" algn="ctr">
-                      <a:solidFill>
-                        <a:srgbClr val="E2E8F0"/>
-                      </a:solidFill>
-                      <a:prstDash val="solid"/>
-                      <a:round/>
-                      <a:headEnd type="none" w="med" len="med"/>
-                      <a:tailEnd type="none" w="med" len="med"/>
-                    </a:lnL>
-                    <a:lnR w="6350" cap="flat" cmpd="sng" algn="ctr">
-                      <a:solidFill>
-                        <a:srgbClr val="E2E8F0"/>
-                      </a:solidFill>
-                      <a:prstDash val="solid"/>
-                      <a:round/>
-                      <a:headEnd type="none" w="med" len="med"/>
-                      <a:tailEnd type="none" w="med" len="med"/>
-                    </a:lnR>
-                    <a:lnT w="6350" cap="flat" cmpd="sng" algn="ctr">
-                      <a:solidFill>
-                        <a:srgbClr val="E2E8F0"/>
-                      </a:solidFill>
-                      <a:prstDash val="solid"/>
-                      <a:round/>
-                      <a:headEnd type="none" w="med" len="med"/>
-                      <a:tailEnd type="none" w="med" len="med"/>
-                    </a:lnT>
-                    <a:lnB w="6350" cap="flat" cmpd="sng" algn="ctr">
-                      <a:solidFill>
-                        <a:srgbClr val="E2E8F0"/>
-                      </a:solidFill>
-                      <a:prstDash val="solid"/>
-                      <a:round/>
-                      <a:headEnd type="none" w="med" len="med"/>
-                      <a:tailEnd type="none" w="med" len="med"/>
-                    </a:lnB>
-                    <a:solidFill>
-                      <a:srgbClr val="FFFFFF"/>
-                    </a:solidFill>
-                  </a:tcPr>
-                </a:tc>
-                <a:tc>
-                  <a:txBody>
-                    <a:bodyPr/>
-                    <a:lstStyle/>
-                    <a:p>
-                      <a:pPr algn="r" indent="0" marL="0">
-                        <a:buNone/>
-                      </a:pPr>
-                      <a:r>
-                        <a:rPr lang="en-US" sz="1200" dirty="0">
-                          <a:solidFill>
-                            <a:srgbClr val="334155"/>
-                          </a:solidFill>
-                          <a:latin typeface="Leelawadee UI" pitchFamily="34" charset="0"/>
-                          <a:ea typeface="Leelawadee UI" pitchFamily="34" charset="-122"/>
-                          <a:cs typeface="Leelawadee UI" pitchFamily="34" charset="-120"/>
-                        </a:rPr>
-                        <a:t>44%</a:t>
-                      </a:r>
-                      <a:endParaRPr lang="en-US" sz="1200" dirty="0">
-                        <a:latin typeface="Leelawadee UI" charset="0"/>
-                        <a:ea typeface="Leelawadee UI" charset="0"/>
-                        <a:cs typeface="Leelawadee UI" charset="0"/>
-                      </a:endParaRPr>
-                    </a:p>
-                  </a:txBody>
-                  <a:tcPr marL="91440" marR="91440" marT="45720" marB="45720" anchor="ctr">
-                    <a:lnL w="6350" cap="flat" cmpd="sng" algn="ctr">
-                      <a:solidFill>
-                        <a:srgbClr val="E2E8F0"/>
-                      </a:solidFill>
-                      <a:prstDash val="solid"/>
-                      <a:round/>
-                      <a:headEnd type="none" w="med" len="med"/>
-                      <a:tailEnd type="none" w="med" len="med"/>
-                    </a:lnL>
-                    <a:lnR w="6350" cap="flat" cmpd="sng" algn="ctr">
-                      <a:solidFill>
-                        <a:srgbClr val="E2E8F0"/>
-                      </a:solidFill>
-                      <a:prstDash val="solid"/>
-                      <a:round/>
-                      <a:headEnd type="none" w="med" len="med"/>
-                      <a:tailEnd type="none" w="med" len="med"/>
-                    </a:lnR>
-                    <a:lnT w="6350" cap="flat" cmpd="sng" algn="ctr">
-                      <a:solidFill>
-                        <a:srgbClr val="E2E8F0"/>
-                      </a:solidFill>
-                      <a:prstDash val="solid"/>
-                      <a:round/>
-                      <a:headEnd type="none" w="med" len="med"/>
-                      <a:tailEnd type="none" w="med" len="med"/>
-                    </a:lnT>
-                    <a:lnB w="6350" cap="flat" cmpd="sng" algn="ctr">
-                      <a:solidFill>
-                        <a:srgbClr val="E2E8F0"/>
-                      </a:solidFill>
-                      <a:prstDash val="solid"/>
-                      <a:round/>
-                      <a:headEnd type="none" w="med" len="med"/>
-                      <a:tailEnd type="none" w="med" len="med"/>
-                    </a:lnB>
-                    <a:solidFill>
-                      <a:srgbClr val="FFFFFF"/>
-                    </a:solidFill>
-                  </a:tcPr>
-                </a:tc>
-              </a:tr>
-              <a:tr h="329184">
-                <a:tc>
-                  <a:txBody>
-                    <a:bodyPr/>
-                    <a:lstStyle/>
-                    <a:p>
-                      <a:pPr algn="l" indent="0" marL="0">
+                      <a:pPr marL="0" indent="0" algn="l">
                         <a:buNone/>
                       </a:pPr>
                       <a:r>
@@ -15165,7 +15324,7 @@
                       </a:endParaRPr>
                     </a:p>
                   </a:txBody>
-                  <a:tcPr marL="91440" marR="91440" marT="45720" marB="45720" anchor="ctr">
+                  <a:tcPr anchor="ctr">
                     <a:lnL w="6350" cap="flat" cmpd="sng" algn="ctr">
                       <a:solidFill>
                         <a:srgbClr val="E2E8F0"/>
@@ -15212,7 +15371,7 @@
                     <a:bodyPr/>
                     <a:lstStyle/>
                     <a:p>
-                      <a:pPr algn="r" indent="0" marL="0">
+                      <a:pPr marL="0" indent="0" algn="r">
                         <a:buNone/>
                       </a:pPr>
                       <a:r>
@@ -15233,7 +15392,7 @@
                       </a:endParaRPr>
                     </a:p>
                   </a:txBody>
-                  <a:tcPr marL="91440" marR="91440" marT="45720" marB="45720" anchor="ctr">
+                  <a:tcPr anchor="ctr">
                     <a:lnL w="6350" cap="flat" cmpd="sng" algn="ctr">
                       <a:solidFill>
                         <a:srgbClr val="E2E8F0"/>
@@ -15280,7 +15439,7 @@
                     <a:bodyPr/>
                     <a:lstStyle/>
                     <a:p>
-                      <a:pPr algn="r" indent="0" marL="0">
+                      <a:pPr marL="0" indent="0" algn="r">
                         <a:buNone/>
                       </a:pPr>
                       <a:r>
@@ -15301,7 +15460,7 @@
                       </a:endParaRPr>
                     </a:p>
                   </a:txBody>
-                  <a:tcPr marL="91440" marR="91440" marT="45720" marB="45720" anchor="ctr">
+                  <a:tcPr anchor="ctr">
                     <a:lnL w="6350" cap="flat" cmpd="sng" algn="ctr">
                       <a:solidFill>
                         <a:srgbClr val="E2E8F0"/>
@@ -15348,7 +15507,7 @@
                     <a:bodyPr/>
                     <a:lstStyle/>
                     <a:p>
-                      <a:pPr algn="r" indent="0" marL="0">
+                      <a:pPr marL="0" indent="0" algn="r">
                         <a:buNone/>
                       </a:pPr>
                       <a:r>
@@ -15369,7 +15528,7 @@
                       </a:endParaRPr>
                     </a:p>
                   </a:txBody>
-                  <a:tcPr marL="91440" marR="91440" marT="45720" marB="45720" anchor="ctr">
+                  <a:tcPr anchor="ctr">
                     <a:lnL w="6350" cap="flat" cmpd="sng" algn="ctr">
                       <a:solidFill>
                         <a:srgbClr val="E2E8F0"/>
@@ -15416,7 +15575,7 @@
                     <a:bodyPr/>
                     <a:lstStyle/>
                     <a:p>
-                      <a:pPr algn="r" indent="0" marL="0">
+                      <a:pPr marL="0" indent="0" algn="r">
                         <a:buNone/>
                       </a:pPr>
                       <a:r>
@@ -15437,7 +15596,7 @@
                       </a:endParaRPr>
                     </a:p>
                   </a:txBody>
-                  <a:tcPr marL="91440" marR="91440" marT="45720" marB="45720" anchor="ctr">
+                  <a:tcPr anchor="ctr">
                     <a:lnL w="6350" cap="flat" cmpd="sng" algn="ctr">
                       <a:solidFill>
                         <a:srgbClr val="E2E8F0"/>
@@ -15479,6 +15638,11 @@
                     </a:solidFill>
                   </a:tcPr>
                 </a:tc>
+                <a:extLst>
+                  <a:ext uri="{0D108BD9-81ED-4DB2-BD59-A6C34878D82A}">
+                    <a16:rowId xmlns:a16="http://schemas.microsoft.com/office/drawing/2014/main" val="10004"/>
+                  </a:ext>
+                </a:extLst>
               </a:tr>
             </a:tbl>
           </a:graphicData>
@@ -15505,7 +15669,7 @@
           <a:bodyPr wrap="square" rtlCol="0" anchor="ctr"/>
           <a:lstStyle/>
           <a:p>
-            <a:pPr indent="0" marL="0">
+            <a:pPr marL="0" indent="0">
               <a:buNone/>
             </a:pPr>
             <a:r>
@@ -15539,6 +15703,7 @@
         <a:solidFill>
           <a:srgbClr val="F8FAFC"/>
         </a:solidFill>
+        <a:effectLst/>
       </p:bgPr>
     </p:bg>
     <p:spTree>
@@ -15576,11 +15741,11 @@
           <a:bodyPr wrap="square" rtlCol="0" anchor="ctr"/>
           <a:lstStyle/>
           <a:p>
-            <a:pPr indent="0" marL="0">
-              <a:buNone/>
-            </a:pPr>
-            <a:r>
-              <a:rPr lang="en-US" sz="1100" b="1" spc="200" kern="0" dirty="0">
+            <a:pPr marL="0" indent="0">
+              <a:buNone/>
+            </a:pPr>
+            <a:r>
+              <a:rPr lang="en-US" sz="1100" b="1" kern="0" spc="200" dirty="0">
                 <a:solidFill>
                   <a:srgbClr val="D97706"/>
                 </a:solidFill>
@@ -15615,7 +15780,7 @@
           <a:bodyPr wrap="square" rtlCol="0" anchor="ctr"/>
           <a:lstStyle/>
           <a:p>
-            <a:pPr indent="0" marL="0">
+            <a:pPr marL="0" indent="0">
               <a:buNone/>
             </a:pPr>
             <a:r>
@@ -15652,6 +15817,13 @@
           </a:solidFill>
           <a:ln/>
         </p:spPr>
+        <p:txBody>
+          <a:bodyPr/>
+          <a:lstStyle/>
+          <a:p>
+            <a:endParaRPr lang="th-TH"/>
+          </a:p>
+        </p:txBody>
       </p:sp>
       <p:sp>
         <p:nvSpPr>
@@ -15674,7 +15846,7 @@
           <a:bodyPr wrap="square" rtlCol="0" anchor="ctr"/>
           <a:lstStyle/>
           <a:p>
-            <a:pPr indent="0" marL="0">
+            <a:pPr marL="0" indent="0">
               <a:buNone/>
             </a:pPr>
             <a:r>
@@ -15713,7 +15885,7 @@
           <a:bodyPr wrap="square" rtlCol="0" anchor="ctr"/>
           <a:lstStyle/>
           <a:p>
-            <a:pPr algn="r" indent="0" marL="0">
+            <a:pPr marL="0" indent="0" algn="r">
               <a:buNone/>
             </a:pPr>
             <a:r>
@@ -15733,14 +15905,14 @@
       </p:sp>
       <p:pic>
         <p:nvPicPr>
-          <p:cNvPr id="7" name="Image 0" descr="C:\Users\mpalg\OneDrive\เดสก์ท็อป\pic\PLC-Control-Tower\deliverables\Slides\assets\08-downtime.png">    </p:cNvPr>
+          <p:cNvPr id="7" name="Image 0" descr="C:\Users\mpalg\OneDrive\เดสก์ท็อป\pic\PLC-Control-Tower\deliverables\Slides\assets\08-downtime.png"/>
           <p:cNvPicPr>
             <a:picLocks noChangeAspect="1"/>
           </p:cNvPicPr>
           <p:nvPr/>
         </p:nvPicPr>
         <p:blipFill>
-          <a:blip r:embed="rId1"/>
+          <a:blip r:embed="rId3"/>
           <a:stretch>
             <a:fillRect/>
           </a:stretch>
@@ -15776,6 +15948,13 @@
             <a:prstDash val="solid"/>
           </a:ln>
         </p:spPr>
+        <p:txBody>
+          <a:bodyPr/>
+          <a:lstStyle/>
+          <a:p>
+            <a:endParaRPr lang="th-TH"/>
+          </a:p>
+        </p:txBody>
       </p:sp>
       <p:sp>
         <p:nvSpPr>
@@ -15803,13 +15982,20 @@
             <a:prstDash val="solid"/>
           </a:ln>
           <a:effectLst>
-            <a:outerShdw sx="100000" sy="100000" kx="0" ky="0" algn="bl" rotWithShape="0" blurRad="76200" dist="12700" dir="5400000">
+            <a:outerShdw blurRad="76200" dist="12700" dir="5400000" algn="bl" rotWithShape="0">
               <a:srgbClr val="94A3B8">
                 <a:alpha val="16000"/>
               </a:srgbClr>
             </a:outerShdw>
           </a:effectLst>
         </p:spPr>
+        <p:txBody>
+          <a:bodyPr/>
+          <a:lstStyle/>
+          <a:p>
+            <a:endParaRPr lang="th-TH"/>
+          </a:p>
+        </p:txBody>
       </p:sp>
       <p:sp>
         <p:nvSpPr>
@@ -15830,6 +16016,13 @@
           </a:solidFill>
           <a:ln/>
         </p:spPr>
+        <p:txBody>
+          <a:bodyPr/>
+          <a:lstStyle/>
+          <a:p>
+            <a:endParaRPr lang="th-TH"/>
+          </a:p>
+        </p:txBody>
       </p:sp>
       <p:sp>
         <p:nvSpPr>
@@ -15852,7 +16045,7 @@
           <a:bodyPr wrap="square" rtlCol="0" anchor="ctr"/>
           <a:lstStyle/>
           <a:p>
-            <a:pPr indent="0" marL="0">
+            <a:pPr marL="0" indent="0">
               <a:buNone/>
             </a:pPr>
             <a:r>
@@ -15891,6 +16084,13 @@
           </a:solidFill>
           <a:ln/>
         </p:spPr>
+        <p:txBody>
+          <a:bodyPr/>
+          <a:lstStyle/>
+          <a:p>
+            <a:endParaRPr lang="th-TH"/>
+          </a:p>
+        </p:txBody>
       </p:sp>
       <p:sp>
         <p:nvSpPr>
@@ -15913,7 +16113,7 @@
           <a:bodyPr wrap="square" rtlCol="0" anchor="ctr"/>
           <a:lstStyle/>
           <a:p>
-            <a:pPr algn="ctr" indent="0" marL="0">
+            <a:pPr marL="0" indent="0" algn="ctr">
               <a:buNone/>
             </a:pPr>
             <a:r>
@@ -15952,7 +16152,7 @@
           <a:bodyPr wrap="square" rtlCol="0" anchor="ctr"/>
           <a:lstStyle/>
           <a:p>
-            <a:pPr indent="0" marL="0">
+            <a:pPr marL="0" indent="0">
               <a:buNone/>
             </a:pPr>
             <a:r>
@@ -15991,6 +16191,13 @@
           </a:solidFill>
           <a:ln/>
         </p:spPr>
+        <p:txBody>
+          <a:bodyPr/>
+          <a:lstStyle/>
+          <a:p>
+            <a:endParaRPr lang="th-TH"/>
+          </a:p>
+        </p:txBody>
       </p:sp>
       <p:sp>
         <p:nvSpPr>
@@ -16013,7 +16220,7 @@
           <a:bodyPr wrap="square" rtlCol="0" anchor="ctr"/>
           <a:lstStyle/>
           <a:p>
-            <a:pPr algn="ctr" indent="0" marL="0">
+            <a:pPr marL="0" indent="0" algn="ctr">
               <a:buNone/>
             </a:pPr>
             <a:r>
@@ -16052,7 +16259,7 @@
           <a:bodyPr wrap="square" rtlCol="0" anchor="ctr"/>
           <a:lstStyle/>
           <a:p>
-            <a:pPr indent="0" marL="0">
+            <a:pPr marL="0" indent="0">
               <a:buNone/>
             </a:pPr>
             <a:r>
@@ -16091,6 +16298,13 @@
           </a:solidFill>
           <a:ln/>
         </p:spPr>
+        <p:txBody>
+          <a:bodyPr/>
+          <a:lstStyle/>
+          <a:p>
+            <a:endParaRPr lang="th-TH"/>
+          </a:p>
+        </p:txBody>
       </p:sp>
       <p:sp>
         <p:nvSpPr>
@@ -16113,7 +16327,7 @@
           <a:bodyPr wrap="square" rtlCol="0" anchor="ctr"/>
           <a:lstStyle/>
           <a:p>
-            <a:pPr algn="ctr" indent="0" marL="0">
+            <a:pPr marL="0" indent="0" algn="ctr">
               <a:buNone/>
             </a:pPr>
             <a:r>
@@ -16152,7 +16366,7 @@
           <a:bodyPr wrap="square" rtlCol="0" anchor="ctr"/>
           <a:lstStyle/>
           <a:p>
-            <a:pPr indent="0" marL="0">
+            <a:pPr marL="0" indent="0">
               <a:buNone/>
             </a:pPr>
             <a:r>
@@ -16196,13 +16410,20 @@
             <a:prstDash val="solid"/>
           </a:ln>
           <a:effectLst>
-            <a:outerShdw sx="100000" sy="100000" kx="0" ky="0" algn="bl" rotWithShape="0" blurRad="76200" dist="12700" dir="5400000">
+            <a:outerShdw blurRad="76200" dist="12700" dir="5400000" algn="bl" rotWithShape="0">
               <a:srgbClr val="94A3B8">
                 <a:alpha val="16000"/>
               </a:srgbClr>
             </a:outerShdw>
           </a:effectLst>
         </p:spPr>
+        <p:txBody>
+          <a:bodyPr/>
+          <a:lstStyle/>
+          <a:p>
+            <a:endParaRPr lang="th-TH"/>
+          </a:p>
+        </p:txBody>
       </p:sp>
       <p:sp>
         <p:nvSpPr>
@@ -16223,6 +16444,13 @@
           </a:solidFill>
           <a:ln/>
         </p:spPr>
+        <p:txBody>
+          <a:bodyPr/>
+          <a:lstStyle/>
+          <a:p>
+            <a:endParaRPr lang="th-TH"/>
+          </a:p>
+        </p:txBody>
       </p:sp>
       <p:sp>
         <p:nvSpPr>
@@ -16245,7 +16473,7 @@
           <a:bodyPr wrap="square" rtlCol="0" anchor="ctr"/>
           <a:lstStyle/>
           <a:p>
-            <a:pPr indent="0" marL="0">
+            <a:pPr marL="0" indent="0">
               <a:buNone/>
             </a:pPr>
             <a:r>
@@ -16284,7 +16512,7 @@
           <a:bodyPr wrap="square" rtlCol="0" anchor="ctr"/>
           <a:lstStyle/>
           <a:p>
-            <a:pPr indent="0" marL="0">
+            <a:pPr marL="0" indent="0">
               <a:lnSpc>
                 <a:spcPct val="135000"/>
               </a:lnSpc>
@@ -16301,12 +16529,6 @@
               </a:rPr>
               <a:t>1 เหตุ </a:t>
             </a:r>
-            <a:pPr indent="0" marL="0">
-              <a:lnSpc>
-                <a:spcPct val="135000"/>
-              </a:lnSpc>
-              <a:buNone/>
-            </a:pPr>
             <a:r>
               <a:rPr lang="en-US" sz="1200" dirty="0">
                 <a:solidFill>
@@ -16318,12 +16540,6 @@
               </a:rPr>
               <a:t>ยังไม่มีใครรับทราบ   </a:t>
             </a:r>
-            <a:pPr indent="0" marL="0">
-              <a:lnSpc>
-                <a:spcPct val="135000"/>
-              </a:lnSpc>
-              <a:buNone/>
-            </a:pPr>
             <a:r>
               <a:rPr lang="en-US" sz="1200" b="1" dirty="0">
                 <a:solidFill>
@@ -16335,12 +16551,6 @@
               </a:rPr>
               <a:t>2 เหตุ </a:t>
             </a:r>
-            <a:pPr indent="0" marL="0">
-              <a:lnSpc>
-                <a:spcPct val="135000"/>
-              </a:lnSpc>
-              <a:buNone/>
-            </a:pPr>
             <a:r>
               <a:rPr lang="en-US" sz="1200" dirty="0">
                 <a:solidFill>
@@ -16353,12 +16563,6 @@
               <a:t>รับทราบแล้ว
 </a:t>
             </a:r>
-            <a:pPr indent="0" marL="0">
-              <a:lnSpc>
-                <a:spcPct val="135000"/>
-              </a:lnSpc>
-              <a:buNone/>
-            </a:pPr>
             <a:r>
               <a:rPr lang="en-US" sz="1200" b="1" dirty="0">
                 <a:solidFill>
@@ -16370,12 +16574,6 @@
               </a:rPr>
               <a:t>3 เหตุ </a:t>
             </a:r>
-            <a:pPr indent="0" marL="0">
-              <a:lnSpc>
-                <a:spcPct val="135000"/>
-              </a:lnSpc>
-              <a:buNone/>
-            </a:pPr>
             <a:r>
               <a:rPr lang="en-US" sz="1200" dirty="0">
                 <a:solidFill>
@@ -16387,12 +16585,6 @@
               </a:rPr>
               <a:t>ปิดเรียบร้อย  ·  รวม </a:t>
             </a:r>
-            <a:pPr indent="0" marL="0">
-              <a:lnSpc>
-                <a:spcPct val="135000"/>
-              </a:lnSpc>
-              <a:buNone/>
-            </a:pPr>
             <a:r>
               <a:rPr lang="en-US" sz="1200" b="1" dirty="0">
                 <a:solidFill>
@@ -16429,7 +16621,7 @@
           <a:bodyPr wrap="square" rtlCol="0" anchor="ctr"/>
           <a:lstStyle/>
           <a:p>
-            <a:pPr indent="0" marL="0">
+            <a:pPr marL="0" indent="0">
               <a:buNone/>
             </a:pPr>
             <a:r>
@@ -16468,7 +16660,7 @@
           <a:bodyPr wrap="square" rtlCol="0" anchor="ctr"/>
           <a:lstStyle/>
           <a:p>
-            <a:pPr indent="0" marL="0">
+            <a:pPr marL="0" indent="0">
               <a:buNone/>
             </a:pPr>
             <a:r>
@@ -16502,6 +16694,7 @@
         <a:solidFill>
           <a:srgbClr val="F8FAFC"/>
         </a:solidFill>
+        <a:effectLst/>
       </p:bgPr>
     </p:bg>
     <p:spTree>
@@ -16539,11 +16732,11 @@
           <a:bodyPr wrap="square" rtlCol="0" anchor="ctr"/>
           <a:lstStyle/>
           <a:p>
-            <a:pPr indent="0" marL="0">
-              <a:buNone/>
-            </a:pPr>
-            <a:r>
-              <a:rPr lang="en-US" sz="1100" b="1" spc="200" kern="0" dirty="0">
+            <a:pPr marL="0" indent="0">
+              <a:buNone/>
+            </a:pPr>
+            <a:r>
+              <a:rPr lang="en-US" sz="1100" b="1" kern="0" spc="200" dirty="0">
                 <a:solidFill>
                   <a:srgbClr val="D97706"/>
                 </a:solidFill>
@@ -16578,7 +16771,7 @@
           <a:bodyPr wrap="square" rtlCol="0" anchor="ctr"/>
           <a:lstStyle/>
           <a:p>
-            <a:pPr indent="0" marL="0">
+            <a:pPr marL="0" indent="0">
               <a:buNone/>
             </a:pPr>
             <a:r>
@@ -16615,6 +16808,13 @@
           </a:solidFill>
           <a:ln/>
         </p:spPr>
+        <p:txBody>
+          <a:bodyPr/>
+          <a:lstStyle/>
+          <a:p>
+            <a:endParaRPr lang="th-TH"/>
+          </a:p>
+        </p:txBody>
       </p:sp>
       <p:sp>
         <p:nvSpPr>
@@ -16637,7 +16837,7 @@
           <a:bodyPr wrap="square" rtlCol="0" anchor="ctr"/>
           <a:lstStyle/>
           <a:p>
-            <a:pPr indent="0" marL="0">
+            <a:pPr marL="0" indent="0">
               <a:buNone/>
             </a:pPr>
             <a:r>
@@ -16676,7 +16876,7 @@
           <a:bodyPr wrap="square" rtlCol="0" anchor="ctr"/>
           <a:lstStyle/>
           <a:p>
-            <a:pPr algn="r" indent="0" marL="0">
+            <a:pPr marL="0" indent="0" algn="r">
               <a:buNone/>
             </a:pPr>
             <a:r>
@@ -16696,14 +16896,14 @@
       </p:sp>
       <p:pic>
         <p:nvPicPr>
-          <p:cNvPr id="7" name="Image 0" descr="C:\Users\mpalg\OneDrive\เดสก์ท็อป\pic\PLC-Control-Tower\deliverables\Slides\assets\09-parts.png">    </p:cNvPr>
+          <p:cNvPr id="7" name="Image 0" descr="C:\Users\mpalg\OneDrive\เดสก์ท็อป\pic\PLC-Control-Tower\deliverables\Slides\assets\09-parts.png"/>
           <p:cNvPicPr>
             <a:picLocks noChangeAspect="1"/>
           </p:cNvPicPr>
           <p:nvPr/>
         </p:nvPicPr>
         <p:blipFill>
-          <a:blip r:embed="rId1"/>
+          <a:blip r:embed="rId3"/>
           <a:stretch>
             <a:fillRect/>
           </a:stretch>
@@ -16739,6 +16939,13 @@
             <a:prstDash val="solid"/>
           </a:ln>
         </p:spPr>
+        <p:txBody>
+          <a:bodyPr/>
+          <a:lstStyle/>
+          <a:p>
+            <a:endParaRPr lang="th-TH"/>
+          </a:p>
+        </p:txBody>
       </p:sp>
       <p:sp>
         <p:nvSpPr>
@@ -16766,13 +16973,20 @@
             <a:prstDash val="solid"/>
           </a:ln>
           <a:effectLst>
-            <a:outerShdw sx="100000" sy="100000" kx="0" ky="0" algn="bl" rotWithShape="0" blurRad="76200" dist="12700" dir="5400000">
+            <a:outerShdw blurRad="76200" dist="12700" dir="5400000" algn="bl" rotWithShape="0">
               <a:srgbClr val="94A3B8">
                 <a:alpha val="16000"/>
               </a:srgbClr>
             </a:outerShdw>
           </a:effectLst>
         </p:spPr>
+        <p:txBody>
+          <a:bodyPr/>
+          <a:lstStyle/>
+          <a:p>
+            <a:endParaRPr lang="th-TH"/>
+          </a:p>
+        </p:txBody>
       </p:sp>
       <p:sp>
         <p:nvSpPr>
@@ -16793,6 +17007,13 @@
           </a:solidFill>
           <a:ln/>
         </p:spPr>
+        <p:txBody>
+          <a:bodyPr/>
+          <a:lstStyle/>
+          <a:p>
+            <a:endParaRPr lang="th-TH"/>
+          </a:p>
+        </p:txBody>
       </p:sp>
       <p:sp>
         <p:nvSpPr>
@@ -16815,7 +17036,7 @@
           <a:bodyPr wrap="square" rtlCol="0" anchor="ctr"/>
           <a:lstStyle/>
           <a:p>
-            <a:pPr indent="0" marL="0">
+            <a:pPr marL="0" indent="0">
               <a:buNone/>
             </a:pPr>
             <a:r>
@@ -16977,13 +17198,20 @@
             <a:prstDash val="solid"/>
           </a:ln>
           <a:effectLst>
-            <a:outerShdw sx="100000" sy="100000" kx="0" ky="0" algn="bl" rotWithShape="0" blurRad="76200" dist="12700" dir="5400000">
+            <a:outerShdw blurRad="76200" dist="12700" dir="5400000" algn="bl" rotWithShape="0">
               <a:srgbClr val="94A3B8">
                 <a:alpha val="16000"/>
               </a:srgbClr>
             </a:outerShdw>
           </a:effectLst>
         </p:spPr>
+        <p:txBody>
+          <a:bodyPr/>
+          <a:lstStyle/>
+          <a:p>
+            <a:endParaRPr lang="th-TH"/>
+          </a:p>
+        </p:txBody>
       </p:sp>
       <p:sp>
         <p:nvSpPr>
@@ -17004,6 +17232,13 @@
           </a:solidFill>
           <a:ln/>
         </p:spPr>
+        <p:txBody>
+          <a:bodyPr/>
+          <a:lstStyle/>
+          <a:p>
+            <a:endParaRPr lang="th-TH"/>
+          </a:p>
+        </p:txBody>
       </p:sp>
       <p:sp>
         <p:nvSpPr>
@@ -17026,7 +17261,7 @@
           <a:bodyPr wrap="square" rtlCol="0" anchor="ctr"/>
           <a:lstStyle/>
           <a:p>
-            <a:pPr indent="0" marL="0">
+            <a:pPr marL="0" indent="0">
               <a:buNone/>
             </a:pPr>
             <a:r>
@@ -17065,7 +17300,7 @@
           <a:bodyPr wrap="square" rtlCol="0" anchor="ctr"/>
           <a:lstStyle/>
           <a:p>
-            <a:pPr indent="0" marL="0">
+            <a:pPr marL="0" indent="0">
               <a:buNone/>
             </a:pPr>
             <a:r>
@@ -17104,7 +17339,7 @@
           <a:bodyPr wrap="square" rtlCol="0" anchor="ctr"/>
           <a:lstStyle/>
           <a:p>
-            <a:pPr algn="r" indent="0" marL="0">
+            <a:pPr marL="0" indent="0" algn="r">
               <a:buNone/>
             </a:pPr>
             <a:r>
@@ -17143,7 +17378,7 @@
           <a:bodyPr wrap="square" rtlCol="0" anchor="ctr"/>
           <a:lstStyle/>
           <a:p>
-            <a:pPr indent="0" marL="0">
+            <a:pPr marL="0" indent="0">
               <a:buNone/>
             </a:pPr>
             <a:r>
@@ -17182,7 +17417,7 @@
           <a:bodyPr wrap="square" rtlCol="0" anchor="ctr"/>
           <a:lstStyle/>
           <a:p>
-            <a:pPr algn="r" indent="0" marL="0">
+            <a:pPr marL="0" indent="0" algn="r">
               <a:buNone/>
             </a:pPr>
             <a:r>
@@ -17221,7 +17456,7 @@
           <a:bodyPr wrap="square" rtlCol="0" anchor="ctr"/>
           <a:lstStyle/>
           <a:p>
-            <a:pPr indent="0" marL="0">
+            <a:pPr marL="0" indent="0">
               <a:buNone/>
             </a:pPr>
             <a:r>
@@ -17255,6 +17490,7 @@
         <a:solidFill>
           <a:srgbClr val="F8FAFC"/>
         </a:solidFill>
+        <a:effectLst/>
       </p:bgPr>
     </p:bg>
     <p:spTree>
@@ -17292,11 +17528,11 @@
           <a:bodyPr wrap="square" rtlCol="0" anchor="ctr"/>
           <a:lstStyle/>
           <a:p>
-            <a:pPr indent="0" marL="0">
-              <a:buNone/>
-            </a:pPr>
-            <a:r>
-              <a:rPr lang="en-US" sz="1100" b="1" spc="200" kern="0" dirty="0">
+            <a:pPr marL="0" indent="0">
+              <a:buNone/>
+            </a:pPr>
+            <a:r>
+              <a:rPr lang="en-US" sz="1100" b="1" kern="0" spc="200" dirty="0">
                 <a:solidFill>
                   <a:srgbClr val="D97706"/>
                 </a:solidFill>
@@ -17331,7 +17567,7 @@
           <a:bodyPr wrap="square" rtlCol="0" anchor="ctr"/>
           <a:lstStyle/>
           <a:p>
-            <a:pPr indent="0" marL="0">
+            <a:pPr marL="0" indent="0">
               <a:buNone/>
             </a:pPr>
             <a:r>
@@ -17368,6 +17604,13 @@
           </a:solidFill>
           <a:ln/>
         </p:spPr>
+        <p:txBody>
+          <a:bodyPr/>
+          <a:lstStyle/>
+          <a:p>
+            <a:endParaRPr lang="th-TH"/>
+          </a:p>
+        </p:txBody>
       </p:sp>
       <p:sp>
         <p:nvSpPr>
@@ -17390,7 +17633,7 @@
           <a:bodyPr wrap="square" rtlCol="0" anchor="ctr"/>
           <a:lstStyle/>
           <a:p>
-            <a:pPr indent="0" marL="0">
+            <a:pPr marL="0" indent="0">
               <a:buNone/>
             </a:pPr>
             <a:r>
@@ -17429,7 +17672,7 @@
           <a:bodyPr wrap="square" rtlCol="0" anchor="ctr"/>
           <a:lstStyle/>
           <a:p>
-            <a:pPr algn="r" indent="0" marL="0">
+            <a:pPr marL="0" indent="0" algn="r">
               <a:buNone/>
             </a:pPr>
             <a:r>
@@ -17449,177 +17692,7 @@
       </p:sp>
       <p:pic>
         <p:nvPicPr>
-          <p:cNvPr id="7" name="Image 0" descr="C:\Users\mpalg\OneDrive\เดสก์ท็อป\pic\PLC-Control-Tower\deliverables\Slides\assets\01-login.png">    </p:cNvPr>
-          <p:cNvPicPr>
-            <a:picLocks noChangeAspect="1"/>
-          </p:cNvPicPr>
-          <p:nvPr/>
-        </p:nvPicPr>
-        <p:blipFill>
-          <a:blip r:embed="rId1"/>
-          <a:stretch>
-            <a:fillRect/>
-          </a:stretch>
-        </p:blipFill>
-        <p:spPr>
-          <a:xfrm>
-            <a:off x="640080" y="1481328"/>
-            <a:ext cx="2615184" cy="1068705"/>
-          </a:xfrm>
-          <a:prstGeom prst="rect">
-            <a:avLst/>
-          </a:prstGeom>
-        </p:spPr>
-      </p:pic>
-      <p:sp>
-        <p:nvSpPr>
-          <p:cNvPr id="8" name="Shape 5"/>
-          <p:cNvSpPr/>
-          <p:nvPr/>
-        </p:nvSpPr>
-        <p:spPr>
-          <a:xfrm>
-            <a:off x="640080" y="1481328"/>
-            <a:ext cx="2615184" cy="1634490"/>
-          </a:xfrm>
-          <a:prstGeom prst="rect">
-            <a:avLst/>
-          </a:prstGeom>
-          <a:ln w="9525">
-            <a:solidFill>
-              <a:srgbClr val="E2E8F0"/>
-            </a:solidFill>
-            <a:prstDash val="solid"/>
-          </a:ln>
-        </p:spPr>
-      </p:sp>
-      <p:sp>
-        <p:nvSpPr>
-          <p:cNvPr id="9" name="Text 6"/>
-          <p:cNvSpPr/>
-          <p:nvPr/>
-        </p:nvSpPr>
-        <p:spPr>
-          <a:xfrm>
-            <a:off x="640080" y="3170682"/>
-            <a:ext cx="2615184" cy="237744"/>
-          </a:xfrm>
-          <a:prstGeom prst="rect">
-            <a:avLst/>
-          </a:prstGeom>
-          <a:noFill/>
-          <a:ln/>
-        </p:spPr>
-        <p:txBody>
-          <a:bodyPr wrap="square" rtlCol="0" anchor="ctr"/>
-          <a:lstStyle/>
-          <a:p>
-            <a:pPr algn="ctr" indent="0" marL="0">
-              <a:buNone/>
-            </a:pPr>
-            <a:r>
-              <a:rPr lang="en-US" sz="1000" dirty="0">
-                <a:solidFill>
-                  <a:srgbClr val="334155"/>
-                </a:solidFill>
-                <a:latin typeface="Leelawadee UI" pitchFamily="34" charset="0"/>
-                <a:ea typeface="Leelawadee UI" pitchFamily="34" charset="-122"/>
-                <a:cs typeface="Leelawadee UI" pitchFamily="34" charset="-120"/>
-              </a:rPr>
-              <a:t>หน้าเข้าสู่ระบบ</a:t>
-            </a:r>
-            <a:endParaRPr lang="en-US" sz="1000" dirty="0"/>
-          </a:p>
-        </p:txBody>
-      </p:sp>
-      <p:pic>
-        <p:nvPicPr>
-          <p:cNvPr id="10" name="Image 1" descr="C:\Users\mpalg\OneDrive\เดสก์ท็อป\pic\PLC-Control-Tower\deliverables\Slides\assets\04-assets.png">    </p:cNvPr>
-          <p:cNvPicPr>
-            <a:picLocks noChangeAspect="1"/>
-          </p:cNvPicPr>
-          <p:nvPr/>
-        </p:nvPicPr>
-        <p:blipFill>
-          <a:blip r:embed="rId2"/>
-          <a:stretch>
-            <a:fillRect/>
-          </a:stretch>
-        </p:blipFill>
-        <p:spPr>
-          <a:xfrm>
-            <a:off x="3429000" y="1481328"/>
-            <a:ext cx="2615184" cy="1068705"/>
-          </a:xfrm>
-          <a:prstGeom prst="rect">
-            <a:avLst/>
-          </a:prstGeom>
-        </p:spPr>
-      </p:pic>
-      <p:sp>
-        <p:nvSpPr>
-          <p:cNvPr id="11" name="Shape 7"/>
-          <p:cNvSpPr/>
-          <p:nvPr/>
-        </p:nvSpPr>
-        <p:spPr>
-          <a:xfrm>
-            <a:off x="3429000" y="1481328"/>
-            <a:ext cx="2615184" cy="1634490"/>
-          </a:xfrm>
-          <a:prstGeom prst="rect">
-            <a:avLst/>
-          </a:prstGeom>
-          <a:ln w="9525">
-            <a:solidFill>
-              <a:srgbClr val="E2E8F0"/>
-            </a:solidFill>
-            <a:prstDash val="solid"/>
-          </a:ln>
-        </p:spPr>
-      </p:sp>
-      <p:sp>
-        <p:nvSpPr>
-          <p:cNvPr id="12" name="Text 8"/>
-          <p:cNvSpPr/>
-          <p:nvPr/>
-        </p:nvSpPr>
-        <p:spPr>
-          <a:xfrm>
-            <a:off x="3429000" y="3170682"/>
-            <a:ext cx="2615184" cy="237744"/>
-          </a:xfrm>
-          <a:prstGeom prst="rect">
-            <a:avLst/>
-          </a:prstGeom>
-          <a:noFill/>
-          <a:ln/>
-        </p:spPr>
-        <p:txBody>
-          <a:bodyPr wrap="square" rtlCol="0" anchor="ctr"/>
-          <a:lstStyle/>
-          <a:p>
-            <a:pPr algn="ctr" indent="0" marL="0">
-              <a:buNone/>
-            </a:pPr>
-            <a:r>
-              <a:rPr lang="en-US" sz="1000" dirty="0">
-                <a:solidFill>
-                  <a:srgbClr val="334155"/>
-                </a:solidFill>
-                <a:latin typeface="Leelawadee UI" pitchFamily="34" charset="0"/>
-                <a:ea typeface="Leelawadee UI" pitchFamily="34" charset="-122"/>
-                <a:cs typeface="Leelawadee UI" pitchFamily="34" charset="-120"/>
-              </a:rPr>
-              <a:t>ทะเบียนเครื่องจักร</a:t>
-            </a:r>
-            <a:endParaRPr lang="en-US" sz="1000" dirty="0"/>
-          </a:p>
-        </p:txBody>
-      </p:sp>
-      <p:pic>
-        <p:nvPicPr>
-          <p:cNvPr id="13" name="Image 2" descr="C:\Users\mpalg\OneDrive\เดสก์ท็อป\pic\PLC-Control-Tower\deliverables\Slides\assets\05-asset-detail.png">    </p:cNvPr>
+          <p:cNvPr id="7" name="Image 0" descr="C:\Users\mpalg\OneDrive\เดสก์ท็อป\pic\PLC-Control-Tower\deliverables\Slides\assets\01-login.png"/>
           <p:cNvPicPr>
             <a:picLocks noChangeAspect="1"/>
           </p:cNvPicPr>
@@ -17633,7 +17706,7 @@
         </p:blipFill>
         <p:spPr>
           <a:xfrm>
-            <a:off x="6217920" y="1481328"/>
+            <a:off x="640080" y="1481328"/>
             <a:ext cx="2615184" cy="1068705"/>
           </a:xfrm>
           <a:prstGeom prst="rect">
@@ -17643,13 +17716,13 @@
       </p:pic>
       <p:sp>
         <p:nvSpPr>
-          <p:cNvPr id="14" name="Shape 9"/>
-          <p:cNvSpPr/>
-          <p:nvPr/>
-        </p:nvSpPr>
-        <p:spPr>
-          <a:xfrm>
-            <a:off x="6217920" y="1481328"/>
+          <p:cNvPr id="8" name="Shape 5"/>
+          <p:cNvSpPr/>
+          <p:nvPr/>
+        </p:nvSpPr>
+        <p:spPr>
+          <a:xfrm>
+            <a:off x="640080" y="1481328"/>
             <a:ext cx="2615184" cy="1634490"/>
           </a:xfrm>
           <a:prstGeom prst="rect">
@@ -17662,16 +17735,23 @@
             <a:prstDash val="solid"/>
           </a:ln>
         </p:spPr>
-      </p:sp>
-      <p:sp>
-        <p:nvSpPr>
-          <p:cNvPr id="15" name="Text 10"/>
-          <p:cNvSpPr/>
-          <p:nvPr/>
-        </p:nvSpPr>
-        <p:spPr>
-          <a:xfrm>
-            <a:off x="6217920" y="3170682"/>
+        <p:txBody>
+          <a:bodyPr/>
+          <a:lstStyle/>
+          <a:p>
+            <a:endParaRPr lang="th-TH"/>
+          </a:p>
+        </p:txBody>
+      </p:sp>
+      <p:sp>
+        <p:nvSpPr>
+          <p:cNvPr id="9" name="Text 6"/>
+          <p:cNvSpPr/>
+          <p:nvPr/>
+        </p:nvSpPr>
+        <p:spPr>
+          <a:xfrm>
+            <a:off x="640080" y="3170682"/>
             <a:ext cx="2615184" cy="237744"/>
           </a:xfrm>
           <a:prstGeom prst="rect">
@@ -17684,7 +17764,7 @@
           <a:bodyPr wrap="square" rtlCol="0" anchor="ctr"/>
           <a:lstStyle/>
           <a:p>
-            <a:pPr algn="ctr" indent="0" marL="0">
+            <a:pPr marL="0" indent="0" algn="ctr">
               <a:buNone/>
             </a:pPr>
             <a:r>
@@ -17696,7 +17776,7 @@
                 <a:ea typeface="Leelawadee UI" pitchFamily="34" charset="-122"/>
                 <a:cs typeface="Leelawadee UI" pitchFamily="34" charset="-120"/>
               </a:rPr>
-              <a:t>รายละเอียดเครื่อง</a:t>
+              <a:t>หน้าเข้าสู่ระบบ</a:t>
             </a:r>
             <a:endParaRPr lang="en-US" sz="1000" dirty="0"/>
           </a:p>
@@ -17704,7 +17784,7 @@
       </p:sp>
       <p:pic>
         <p:nvPicPr>
-          <p:cNvPr id="16" name="Image 3" descr="C:\Users\mpalg\OneDrive\เดสก์ท็อป\pic\PLC-Control-Tower\deliverables\Slides\assets\06-work-orders.png">    </p:cNvPr>
+          <p:cNvPr id="10" name="Image 1" descr="C:\Users\mpalg\OneDrive\เดสก์ท็อป\pic\PLC-Control-Tower\deliverables\Slides\assets\04-assets.png"/>
           <p:cNvPicPr>
             <a:picLocks noChangeAspect="1"/>
           </p:cNvPicPr>
@@ -17718,7 +17798,7 @@
         </p:blipFill>
         <p:spPr>
           <a:xfrm>
-            <a:off x="9006840" y="1481328"/>
+            <a:off x="3429000" y="1481328"/>
             <a:ext cx="2615184" cy="1068705"/>
           </a:xfrm>
           <a:prstGeom prst="rect">
@@ -17728,13 +17808,13 @@
       </p:pic>
       <p:sp>
         <p:nvSpPr>
-          <p:cNvPr id="17" name="Shape 11"/>
-          <p:cNvSpPr/>
-          <p:nvPr/>
-        </p:nvSpPr>
-        <p:spPr>
-          <a:xfrm>
-            <a:off x="9006840" y="1481328"/>
+          <p:cNvPr id="11" name="Shape 7"/>
+          <p:cNvSpPr/>
+          <p:nvPr/>
+        </p:nvSpPr>
+        <p:spPr>
+          <a:xfrm>
+            <a:off x="3429000" y="1481328"/>
             <a:ext cx="2615184" cy="1634490"/>
           </a:xfrm>
           <a:prstGeom prst="rect">
@@ -17747,16 +17827,23 @@
             <a:prstDash val="solid"/>
           </a:ln>
         </p:spPr>
-      </p:sp>
-      <p:sp>
-        <p:nvSpPr>
-          <p:cNvPr id="18" name="Text 12"/>
-          <p:cNvSpPr/>
-          <p:nvPr/>
-        </p:nvSpPr>
-        <p:spPr>
-          <a:xfrm>
-            <a:off x="9006840" y="3170682"/>
+        <p:txBody>
+          <a:bodyPr/>
+          <a:lstStyle/>
+          <a:p>
+            <a:endParaRPr lang="th-TH"/>
+          </a:p>
+        </p:txBody>
+      </p:sp>
+      <p:sp>
+        <p:nvSpPr>
+          <p:cNvPr id="12" name="Text 8"/>
+          <p:cNvSpPr/>
+          <p:nvPr/>
+        </p:nvSpPr>
+        <p:spPr>
+          <a:xfrm>
+            <a:off x="3429000" y="3170682"/>
             <a:ext cx="2615184" cy="237744"/>
           </a:xfrm>
           <a:prstGeom prst="rect">
@@ -17769,7 +17856,7 @@
           <a:bodyPr wrap="square" rtlCol="0" anchor="ctr"/>
           <a:lstStyle/>
           <a:p>
-            <a:pPr algn="ctr" indent="0" marL="0">
+            <a:pPr marL="0" indent="0" algn="ctr">
               <a:buNone/>
             </a:pPr>
             <a:r>
@@ -17781,7 +17868,7 @@
                 <a:ea typeface="Leelawadee UI" pitchFamily="34" charset="-122"/>
                 <a:cs typeface="Leelawadee UI" pitchFamily="34" charset="-120"/>
               </a:rPr>
-              <a:t>ใบงานบำรุง</a:t>
+              <a:t>ทะเบียนเครื่องจักร</a:t>
             </a:r>
             <a:endParaRPr lang="en-US" sz="1000" dirty="0"/>
           </a:p>
@@ -17789,7 +17876,7 @@
       </p:sp>
       <p:pic>
         <p:nvPicPr>
-          <p:cNvPr id="19" name="Image 4" descr="C:\Users\mpalg\OneDrive\เดสก์ท็อป\pic\PLC-Control-Tower\deliverables\Slides\assets\07-work-order-detail.png">    </p:cNvPr>
+          <p:cNvPr id="13" name="Image 2" descr="C:\Users\mpalg\OneDrive\เดสก์ท็อป\pic\PLC-Control-Tower\deliverables\Slides\assets\05-asset-detail.png"/>
           <p:cNvPicPr>
             <a:picLocks noChangeAspect="1"/>
           </p:cNvPicPr>
@@ -17803,7 +17890,7 @@
         </p:blipFill>
         <p:spPr>
           <a:xfrm>
-            <a:off x="640080" y="3364992"/>
+            <a:off x="6217920" y="1481328"/>
             <a:ext cx="2615184" cy="1068705"/>
           </a:xfrm>
           <a:prstGeom prst="rect">
@@ -17813,13 +17900,13 @@
       </p:pic>
       <p:sp>
         <p:nvSpPr>
-          <p:cNvPr id="20" name="Shape 13"/>
-          <p:cNvSpPr/>
-          <p:nvPr/>
-        </p:nvSpPr>
-        <p:spPr>
-          <a:xfrm>
-            <a:off x="640080" y="3364992"/>
+          <p:cNvPr id="14" name="Shape 9"/>
+          <p:cNvSpPr/>
+          <p:nvPr/>
+        </p:nvSpPr>
+        <p:spPr>
+          <a:xfrm>
+            <a:off x="6217920" y="1481328"/>
             <a:ext cx="2615184" cy="1634490"/>
           </a:xfrm>
           <a:prstGeom prst="rect">
@@ -17832,16 +17919,23 @@
             <a:prstDash val="solid"/>
           </a:ln>
         </p:spPr>
-      </p:sp>
-      <p:sp>
-        <p:nvSpPr>
-          <p:cNvPr id="21" name="Text 14"/>
-          <p:cNvSpPr/>
-          <p:nvPr/>
-        </p:nvSpPr>
-        <p:spPr>
-          <a:xfrm>
-            <a:off x="640080" y="5054346"/>
+        <p:txBody>
+          <a:bodyPr/>
+          <a:lstStyle/>
+          <a:p>
+            <a:endParaRPr lang="th-TH"/>
+          </a:p>
+        </p:txBody>
+      </p:sp>
+      <p:sp>
+        <p:nvSpPr>
+          <p:cNvPr id="15" name="Text 10"/>
+          <p:cNvSpPr/>
+          <p:nvPr/>
+        </p:nvSpPr>
+        <p:spPr>
+          <a:xfrm>
+            <a:off x="6217920" y="3170682"/>
             <a:ext cx="2615184" cy="237744"/>
           </a:xfrm>
           <a:prstGeom prst="rect">
@@ -17854,7 +17948,7 @@
           <a:bodyPr wrap="square" rtlCol="0" anchor="ctr"/>
           <a:lstStyle/>
           <a:p>
-            <a:pPr algn="ctr" indent="0" marL="0">
+            <a:pPr marL="0" indent="0" algn="ctr">
               <a:buNone/>
             </a:pPr>
             <a:r>
@@ -17866,7 +17960,7 @@
                 <a:ea typeface="Leelawadee UI" pitchFamily="34" charset="-122"/>
                 <a:cs typeface="Leelawadee UI" pitchFamily="34" charset="-120"/>
               </a:rPr>
-              <a:t>รายละเอียดใบงาน</a:t>
+              <a:t>รายละเอียดเครื่อง</a:t>
             </a:r>
             <a:endParaRPr lang="en-US" sz="1000" dirty="0"/>
           </a:p>
@@ -17874,7 +17968,7 @@
       </p:sp>
       <p:pic>
         <p:nvPicPr>
-          <p:cNvPr id="22" name="Image 5" descr="C:\Users\mpalg\OneDrive\เดสก์ท็อป\pic\PLC-Control-Tower\deliverables\Slides\assets\10-reports.png">    </p:cNvPr>
+          <p:cNvPr id="16" name="Image 3" descr="C:\Users\mpalg\OneDrive\เดสก์ท็อป\pic\PLC-Control-Tower\deliverables\Slides\assets\06-work-orders.png"/>
           <p:cNvPicPr>
             <a:picLocks noChangeAspect="1"/>
           </p:cNvPicPr>
@@ -17888,7 +17982,7 @@
         </p:blipFill>
         <p:spPr>
           <a:xfrm>
-            <a:off x="3429000" y="3364992"/>
+            <a:off x="9006840" y="1481328"/>
             <a:ext cx="2615184" cy="1068705"/>
           </a:xfrm>
           <a:prstGeom prst="rect">
@@ -17898,13 +17992,13 @@
       </p:pic>
       <p:sp>
         <p:nvSpPr>
-          <p:cNvPr id="23" name="Shape 15"/>
-          <p:cNvSpPr/>
-          <p:nvPr/>
-        </p:nvSpPr>
-        <p:spPr>
-          <a:xfrm>
-            <a:off x="3429000" y="3364992"/>
+          <p:cNvPr id="17" name="Shape 11"/>
+          <p:cNvSpPr/>
+          <p:nvPr/>
+        </p:nvSpPr>
+        <p:spPr>
+          <a:xfrm>
+            <a:off x="9006840" y="1481328"/>
             <a:ext cx="2615184" cy="1634490"/>
           </a:xfrm>
           <a:prstGeom prst="rect">
@@ -17917,16 +18011,23 @@
             <a:prstDash val="solid"/>
           </a:ln>
         </p:spPr>
-      </p:sp>
-      <p:sp>
-        <p:nvSpPr>
-          <p:cNvPr id="24" name="Text 16"/>
-          <p:cNvSpPr/>
-          <p:nvPr/>
-        </p:nvSpPr>
-        <p:spPr>
-          <a:xfrm>
-            <a:off x="3429000" y="5054346"/>
+        <p:txBody>
+          <a:bodyPr/>
+          <a:lstStyle/>
+          <a:p>
+            <a:endParaRPr lang="th-TH"/>
+          </a:p>
+        </p:txBody>
+      </p:sp>
+      <p:sp>
+        <p:nvSpPr>
+          <p:cNvPr id="18" name="Text 12"/>
+          <p:cNvSpPr/>
+          <p:nvPr/>
+        </p:nvSpPr>
+        <p:spPr>
+          <a:xfrm>
+            <a:off x="9006840" y="3170682"/>
             <a:ext cx="2615184" cy="237744"/>
           </a:xfrm>
           <a:prstGeom prst="rect">
@@ -17939,7 +18040,7 @@
           <a:bodyPr wrap="square" rtlCol="0" anchor="ctr"/>
           <a:lstStyle/>
           <a:p>
-            <a:pPr algn="ctr" indent="0" marL="0">
+            <a:pPr marL="0" indent="0" algn="ctr">
               <a:buNone/>
             </a:pPr>
             <a:r>
@@ -17951,7 +18052,7 @@
                 <a:ea typeface="Leelawadee UI" pitchFamily="34" charset="-122"/>
                 <a:cs typeface="Leelawadee UI" pitchFamily="34" charset="-120"/>
               </a:rPr>
-              <a:t>รายงานและส่งออก CSV</a:t>
+              <a:t>ใบงานบำรุง</a:t>
             </a:r>
             <a:endParaRPr lang="en-US" sz="1000" dirty="0"/>
           </a:p>
@@ -17959,7 +18060,7 @@
       </p:sp>
       <p:pic>
         <p:nvPicPr>
-          <p:cNvPr id="25" name="Image 6" descr="C:\Users\mpalg\OneDrive\เดสก์ท็อป\pic\PLC-Control-Tower\deliverables\Slides\assets\11-activity.png">    </p:cNvPr>
+          <p:cNvPr id="19" name="Image 4" descr="C:\Users\mpalg\OneDrive\เดสก์ท็อป\pic\PLC-Control-Tower\deliverables\Slides\assets\07-work-order-detail.png"/>
           <p:cNvPicPr>
             <a:picLocks noChangeAspect="1"/>
           </p:cNvPicPr>
@@ -17973,7 +18074,7 @@
         </p:blipFill>
         <p:spPr>
           <a:xfrm>
-            <a:off x="6217920" y="3364992"/>
+            <a:off x="640080" y="3364992"/>
             <a:ext cx="2615184" cy="1068705"/>
           </a:xfrm>
           <a:prstGeom prst="rect">
@@ -17983,13 +18084,13 @@
       </p:pic>
       <p:sp>
         <p:nvSpPr>
-          <p:cNvPr id="26" name="Shape 17"/>
-          <p:cNvSpPr/>
-          <p:nvPr/>
-        </p:nvSpPr>
-        <p:spPr>
-          <a:xfrm>
-            <a:off x="6217920" y="3364992"/>
+          <p:cNvPr id="20" name="Shape 13"/>
+          <p:cNvSpPr/>
+          <p:nvPr/>
+        </p:nvSpPr>
+        <p:spPr>
+          <a:xfrm>
+            <a:off x="640080" y="3364992"/>
             <a:ext cx="2615184" cy="1634490"/>
           </a:xfrm>
           <a:prstGeom prst="rect">
@@ -18002,16 +18103,23 @@
             <a:prstDash val="solid"/>
           </a:ln>
         </p:spPr>
-      </p:sp>
-      <p:sp>
-        <p:nvSpPr>
-          <p:cNvPr id="27" name="Text 18"/>
-          <p:cNvSpPr/>
-          <p:nvPr/>
-        </p:nvSpPr>
-        <p:spPr>
-          <a:xfrm>
-            <a:off x="6217920" y="5054346"/>
+        <p:txBody>
+          <a:bodyPr/>
+          <a:lstStyle/>
+          <a:p>
+            <a:endParaRPr lang="th-TH"/>
+          </a:p>
+        </p:txBody>
+      </p:sp>
+      <p:sp>
+        <p:nvSpPr>
+          <p:cNvPr id="21" name="Text 14"/>
+          <p:cNvSpPr/>
+          <p:nvPr/>
+        </p:nvSpPr>
+        <p:spPr>
+          <a:xfrm>
+            <a:off x="640080" y="5054346"/>
             <a:ext cx="2615184" cy="237744"/>
           </a:xfrm>
           <a:prstGeom prst="rect">
@@ -18024,7 +18132,7 @@
           <a:bodyPr wrap="square" rtlCol="0" anchor="ctr"/>
           <a:lstStyle/>
           <a:p>
-            <a:pPr algn="ctr" indent="0" marL="0">
+            <a:pPr marL="0" indent="0" algn="ctr">
               <a:buNone/>
             </a:pPr>
             <a:r>
@@ -18036,7 +18144,7 @@
                 <a:ea typeface="Leelawadee UI" pitchFamily="34" charset="-122"/>
                 <a:cs typeface="Leelawadee UI" pitchFamily="34" charset="-120"/>
               </a:rPr>
-              <a:t>ประวัติการแก้ไข</a:t>
+              <a:t>รายละเอียดใบงาน</a:t>
             </a:r>
             <a:endParaRPr lang="en-US" sz="1000" dirty="0"/>
           </a:p>
@@ -18044,7 +18152,7 @@
       </p:sp>
       <p:pic>
         <p:nvPicPr>
-          <p:cNvPr id="28" name="Image 7" descr="C:\Users\mpalg\OneDrive\เดสก์ท็อป\pic\PLC-Control-Tower\deliverables\Slides\assets\13-work-orders-planner.png">    </p:cNvPr>
+          <p:cNvPr id="22" name="Image 5" descr="C:\Users\mpalg\OneDrive\เดสก์ท็อป\pic\PLC-Control-Tower\deliverables\Slides\assets\10-reports.png"/>
           <p:cNvPicPr>
             <a:picLocks noChangeAspect="1"/>
           </p:cNvPicPr>
@@ -18058,7 +18166,7 @@
         </p:blipFill>
         <p:spPr>
           <a:xfrm>
-            <a:off x="9006840" y="3364992"/>
+            <a:off x="3429000" y="3364992"/>
             <a:ext cx="2615184" cy="1068705"/>
           </a:xfrm>
           <a:prstGeom prst="rect">
@@ -18068,13 +18176,13 @@
       </p:pic>
       <p:sp>
         <p:nvSpPr>
-          <p:cNvPr id="29" name="Shape 19"/>
-          <p:cNvSpPr/>
-          <p:nvPr/>
-        </p:nvSpPr>
-        <p:spPr>
-          <a:xfrm>
-            <a:off x="9006840" y="3364992"/>
+          <p:cNvPr id="23" name="Shape 15"/>
+          <p:cNvSpPr/>
+          <p:nvPr/>
+        </p:nvSpPr>
+        <p:spPr>
+          <a:xfrm>
+            <a:off x="3429000" y="3364992"/>
             <a:ext cx="2615184" cy="1634490"/>
           </a:xfrm>
           <a:prstGeom prst="rect">
@@ -18087,6 +18195,197 @@
             <a:prstDash val="solid"/>
           </a:ln>
         </p:spPr>
+        <p:txBody>
+          <a:bodyPr/>
+          <a:lstStyle/>
+          <a:p>
+            <a:endParaRPr lang="th-TH"/>
+          </a:p>
+        </p:txBody>
+      </p:sp>
+      <p:sp>
+        <p:nvSpPr>
+          <p:cNvPr id="24" name="Text 16"/>
+          <p:cNvSpPr/>
+          <p:nvPr/>
+        </p:nvSpPr>
+        <p:spPr>
+          <a:xfrm>
+            <a:off x="3429000" y="5054346"/>
+            <a:ext cx="2615184" cy="237744"/>
+          </a:xfrm>
+          <a:prstGeom prst="rect">
+            <a:avLst/>
+          </a:prstGeom>
+          <a:noFill/>
+          <a:ln/>
+        </p:spPr>
+        <p:txBody>
+          <a:bodyPr wrap="square" rtlCol="0" anchor="ctr"/>
+          <a:lstStyle/>
+          <a:p>
+            <a:pPr marL="0" indent="0" algn="ctr">
+              <a:buNone/>
+            </a:pPr>
+            <a:r>
+              <a:rPr lang="en-US" sz="1000" dirty="0">
+                <a:solidFill>
+                  <a:srgbClr val="334155"/>
+                </a:solidFill>
+                <a:latin typeface="Leelawadee UI" pitchFamily="34" charset="0"/>
+                <a:ea typeface="Leelawadee UI" pitchFamily="34" charset="-122"/>
+                <a:cs typeface="Leelawadee UI" pitchFamily="34" charset="-120"/>
+              </a:rPr>
+              <a:t>รายงานและส่งออก CSV</a:t>
+            </a:r>
+            <a:endParaRPr lang="en-US" sz="1000" dirty="0"/>
+          </a:p>
+        </p:txBody>
+      </p:sp>
+      <p:pic>
+        <p:nvPicPr>
+          <p:cNvPr id="25" name="Image 6" descr="C:\Users\mpalg\OneDrive\เดสก์ท็อป\pic\PLC-Control-Tower\deliverables\Slides\assets\11-activity.png"/>
+          <p:cNvPicPr>
+            <a:picLocks noChangeAspect="1"/>
+          </p:cNvPicPr>
+          <p:nvPr/>
+        </p:nvPicPr>
+        <p:blipFill>
+          <a:blip r:embed="rId9"/>
+          <a:stretch>
+            <a:fillRect/>
+          </a:stretch>
+        </p:blipFill>
+        <p:spPr>
+          <a:xfrm>
+            <a:off x="6217920" y="3364992"/>
+            <a:ext cx="2615184" cy="1068705"/>
+          </a:xfrm>
+          <a:prstGeom prst="rect">
+            <a:avLst/>
+          </a:prstGeom>
+        </p:spPr>
+      </p:pic>
+      <p:sp>
+        <p:nvSpPr>
+          <p:cNvPr id="26" name="Shape 17"/>
+          <p:cNvSpPr/>
+          <p:nvPr/>
+        </p:nvSpPr>
+        <p:spPr>
+          <a:xfrm>
+            <a:off x="6217920" y="3364992"/>
+            <a:ext cx="2615184" cy="1634490"/>
+          </a:xfrm>
+          <a:prstGeom prst="rect">
+            <a:avLst/>
+          </a:prstGeom>
+          <a:ln w="9525">
+            <a:solidFill>
+              <a:srgbClr val="E2E8F0"/>
+            </a:solidFill>
+            <a:prstDash val="solid"/>
+          </a:ln>
+        </p:spPr>
+        <p:txBody>
+          <a:bodyPr/>
+          <a:lstStyle/>
+          <a:p>
+            <a:endParaRPr lang="th-TH"/>
+          </a:p>
+        </p:txBody>
+      </p:sp>
+      <p:sp>
+        <p:nvSpPr>
+          <p:cNvPr id="27" name="Text 18"/>
+          <p:cNvSpPr/>
+          <p:nvPr/>
+        </p:nvSpPr>
+        <p:spPr>
+          <a:xfrm>
+            <a:off x="6217920" y="5054346"/>
+            <a:ext cx="2615184" cy="237744"/>
+          </a:xfrm>
+          <a:prstGeom prst="rect">
+            <a:avLst/>
+          </a:prstGeom>
+          <a:noFill/>
+          <a:ln/>
+        </p:spPr>
+        <p:txBody>
+          <a:bodyPr wrap="square" rtlCol="0" anchor="ctr"/>
+          <a:lstStyle/>
+          <a:p>
+            <a:pPr marL="0" indent="0" algn="ctr">
+              <a:buNone/>
+            </a:pPr>
+            <a:r>
+              <a:rPr lang="en-US" sz="1000" dirty="0">
+                <a:solidFill>
+                  <a:srgbClr val="334155"/>
+                </a:solidFill>
+                <a:latin typeface="Leelawadee UI" pitchFamily="34" charset="0"/>
+                <a:ea typeface="Leelawadee UI" pitchFamily="34" charset="-122"/>
+                <a:cs typeface="Leelawadee UI" pitchFamily="34" charset="-120"/>
+              </a:rPr>
+              <a:t>ประวัติการแก้ไข</a:t>
+            </a:r>
+            <a:endParaRPr lang="en-US" sz="1000" dirty="0"/>
+          </a:p>
+        </p:txBody>
+      </p:sp>
+      <p:pic>
+        <p:nvPicPr>
+          <p:cNvPr id="28" name="Image 7" descr="C:\Users\mpalg\OneDrive\เดสก์ท็อป\pic\PLC-Control-Tower\deliverables\Slides\assets\13-work-orders-planner.png"/>
+          <p:cNvPicPr>
+            <a:picLocks noChangeAspect="1"/>
+          </p:cNvPicPr>
+          <p:nvPr/>
+        </p:nvPicPr>
+        <p:blipFill>
+          <a:blip r:embed="rId10"/>
+          <a:stretch>
+            <a:fillRect/>
+          </a:stretch>
+        </p:blipFill>
+        <p:spPr>
+          <a:xfrm>
+            <a:off x="9006840" y="3364992"/>
+            <a:ext cx="2615184" cy="1068705"/>
+          </a:xfrm>
+          <a:prstGeom prst="rect">
+            <a:avLst/>
+          </a:prstGeom>
+        </p:spPr>
+      </p:pic>
+      <p:sp>
+        <p:nvSpPr>
+          <p:cNvPr id="29" name="Shape 19"/>
+          <p:cNvSpPr/>
+          <p:nvPr/>
+        </p:nvSpPr>
+        <p:spPr>
+          <a:xfrm>
+            <a:off x="9006840" y="3364992"/>
+            <a:ext cx="2615184" cy="1634490"/>
+          </a:xfrm>
+          <a:prstGeom prst="rect">
+            <a:avLst/>
+          </a:prstGeom>
+          <a:ln w="9525">
+            <a:solidFill>
+              <a:srgbClr val="E2E8F0"/>
+            </a:solidFill>
+            <a:prstDash val="solid"/>
+          </a:ln>
+        </p:spPr>
+        <p:txBody>
+          <a:bodyPr/>
+          <a:lstStyle/>
+          <a:p>
+            <a:endParaRPr lang="th-TH"/>
+          </a:p>
+        </p:txBody>
       </p:sp>
       <p:sp>
         <p:nvSpPr>
@@ -18109,7 +18408,7 @@
           <a:bodyPr wrap="square" rtlCol="0" anchor="ctr"/>
           <a:lstStyle/>
           <a:p>
-            <a:pPr algn="ctr" indent="0" marL="0">
+            <a:pPr marL="0" indent="0" algn="ctr">
               <a:buNone/>
             </a:pPr>
             <a:r>
@@ -18148,7 +18447,7 @@
           <a:bodyPr wrap="square" rtlCol="0" anchor="ctr"/>
           <a:lstStyle/>
           <a:p>
-            <a:pPr algn="ctr" indent="0" marL="0">
+            <a:pPr marL="0" indent="0" algn="ctr">
               <a:buNone/>
             </a:pPr>
             <a:r>
@@ -18182,6 +18481,7 @@
         <a:solidFill>
           <a:srgbClr val="F8FAFC"/>
         </a:solidFill>
+        <a:effectLst/>
       </p:bgPr>
     </p:bg>
     <p:spTree>
@@ -18219,11 +18519,11 @@
           <a:bodyPr wrap="square" rtlCol="0" anchor="ctr"/>
           <a:lstStyle/>
           <a:p>
-            <a:pPr indent="0" marL="0">
-              <a:buNone/>
-            </a:pPr>
-            <a:r>
-              <a:rPr lang="en-US" sz="1100" b="1" spc="200" kern="0" dirty="0">
+            <a:pPr marL="0" indent="0">
+              <a:buNone/>
+            </a:pPr>
+            <a:r>
+              <a:rPr lang="en-US" sz="1100" b="1" kern="0" spc="200" dirty="0">
                 <a:solidFill>
                   <a:srgbClr val="D97706"/>
                 </a:solidFill>
@@ -18258,7 +18558,7 @@
           <a:bodyPr wrap="square" rtlCol="0" anchor="ctr"/>
           <a:lstStyle/>
           <a:p>
-            <a:pPr indent="0" marL="0">
+            <a:pPr marL="0" indent="0">
               <a:buNone/>
             </a:pPr>
             <a:r>
@@ -18295,6 +18595,13 @@
           </a:solidFill>
           <a:ln/>
         </p:spPr>
+        <p:txBody>
+          <a:bodyPr/>
+          <a:lstStyle/>
+          <a:p>
+            <a:endParaRPr lang="th-TH"/>
+          </a:p>
+        </p:txBody>
       </p:sp>
       <p:sp>
         <p:nvSpPr>
@@ -18317,7 +18624,7 @@
           <a:bodyPr wrap="square" rtlCol="0" anchor="ctr"/>
           <a:lstStyle/>
           <a:p>
-            <a:pPr indent="0" marL="0">
+            <a:pPr marL="0" indent="0">
               <a:buNone/>
             </a:pPr>
             <a:r>
@@ -18356,7 +18663,7 @@
           <a:bodyPr wrap="square" rtlCol="0" anchor="ctr"/>
           <a:lstStyle/>
           <a:p>
-            <a:pPr algn="r" indent="0" marL="0">
+            <a:pPr marL="0" indent="0" algn="r">
               <a:buNone/>
             </a:pPr>
             <a:r>
@@ -18400,6 +18707,13 @@
             <a:prstDash val="solid"/>
           </a:ln>
         </p:spPr>
+        <p:txBody>
+          <a:bodyPr/>
+          <a:lstStyle/>
+          <a:p>
+            <a:endParaRPr lang="th-TH"/>
+          </a:p>
+        </p:txBody>
       </p:sp>
       <p:sp>
         <p:nvSpPr>
@@ -18420,6 +18734,13 @@
           </a:solidFill>
           <a:ln/>
         </p:spPr>
+        <p:txBody>
+          <a:bodyPr/>
+          <a:lstStyle/>
+          <a:p>
+            <a:endParaRPr lang="th-TH"/>
+          </a:p>
+        </p:txBody>
       </p:sp>
       <p:sp>
         <p:nvSpPr>
@@ -18442,7 +18763,7 @@
           <a:bodyPr wrap="square" rtlCol="0" anchor="ctr"/>
           <a:lstStyle/>
           <a:p>
-            <a:pPr indent="0" marL="0">
+            <a:pPr marL="0" indent="0">
               <a:buNone/>
             </a:pPr>
             <a:r>
@@ -18481,7 +18802,7 @@
           <a:bodyPr wrap="square" rtlCol="0" anchor="ctr"/>
           <a:lstStyle/>
           <a:p>
-            <a:pPr indent="0" marL="0">
+            <a:pPr marL="0" indent="0">
               <a:buNone/>
             </a:pPr>
             <a:r>
@@ -18518,6 +18839,13 @@
           </a:solidFill>
           <a:ln/>
         </p:spPr>
+        <p:txBody>
+          <a:bodyPr/>
+          <a:lstStyle/>
+          <a:p>
+            <a:endParaRPr lang="th-TH"/>
+          </a:p>
+        </p:txBody>
       </p:sp>
       <p:sp>
         <p:nvSpPr>
@@ -18545,6 +18873,13 @@
             <a:prstDash val="solid"/>
           </a:ln>
         </p:spPr>
+        <p:txBody>
+          <a:bodyPr/>
+          <a:lstStyle/>
+          <a:p>
+            <a:endParaRPr lang="th-TH"/>
+          </a:p>
+        </p:txBody>
       </p:sp>
       <p:sp>
         <p:nvSpPr>
@@ -18565,6 +18900,13 @@
           </a:solidFill>
           <a:ln/>
         </p:spPr>
+        <p:txBody>
+          <a:bodyPr/>
+          <a:lstStyle/>
+          <a:p>
+            <a:endParaRPr lang="th-TH"/>
+          </a:p>
+        </p:txBody>
       </p:sp>
       <p:sp>
         <p:nvSpPr>
@@ -18587,7 +18929,7 @@
           <a:bodyPr wrap="square" rtlCol="0" anchor="ctr"/>
           <a:lstStyle/>
           <a:p>
-            <a:pPr indent="0" marL="0">
+            <a:pPr marL="0" indent="0">
               <a:buNone/>
             </a:pPr>
             <a:r>
@@ -18626,7 +18968,7 @@
           <a:bodyPr wrap="square" rtlCol="0" anchor="ctr"/>
           <a:lstStyle/>
           <a:p>
-            <a:pPr indent="0" marL="0">
+            <a:pPr marL="0" indent="0">
               <a:buNone/>
             </a:pPr>
             <a:r>
@@ -18663,6 +19005,13 @@
           </a:solidFill>
           <a:ln/>
         </p:spPr>
+        <p:txBody>
+          <a:bodyPr/>
+          <a:lstStyle/>
+          <a:p>
+            <a:endParaRPr lang="th-TH"/>
+          </a:p>
+        </p:txBody>
       </p:sp>
       <p:sp>
         <p:nvSpPr>
@@ -18690,6 +19039,13 @@
             <a:prstDash val="solid"/>
           </a:ln>
         </p:spPr>
+        <p:txBody>
+          <a:bodyPr/>
+          <a:lstStyle/>
+          <a:p>
+            <a:endParaRPr lang="th-TH"/>
+          </a:p>
+        </p:txBody>
       </p:sp>
       <p:sp>
         <p:nvSpPr>
@@ -18710,6 +19066,13 @@
           </a:solidFill>
           <a:ln/>
         </p:spPr>
+        <p:txBody>
+          <a:bodyPr/>
+          <a:lstStyle/>
+          <a:p>
+            <a:endParaRPr lang="th-TH"/>
+          </a:p>
+        </p:txBody>
       </p:sp>
       <p:sp>
         <p:nvSpPr>
@@ -18732,7 +19095,7 @@
           <a:bodyPr wrap="square" rtlCol="0" anchor="ctr"/>
           <a:lstStyle/>
           <a:p>
-            <a:pPr indent="0" marL="0">
+            <a:pPr marL="0" indent="0">
               <a:buNone/>
             </a:pPr>
             <a:r>
@@ -18771,7 +19134,7 @@
           <a:bodyPr wrap="square" rtlCol="0" anchor="ctr"/>
           <a:lstStyle/>
           <a:p>
-            <a:pPr indent="0" marL="0">
+            <a:pPr marL="0" indent="0">
               <a:buNone/>
             </a:pPr>
             <a:r>
@@ -18815,13 +19178,20 @@
             <a:prstDash val="solid"/>
           </a:ln>
           <a:effectLst>
-            <a:outerShdw sx="100000" sy="100000" kx="0" ky="0" algn="bl" rotWithShape="0" blurRad="76200" dist="12700" dir="5400000">
+            <a:outerShdw blurRad="76200" dist="12700" dir="5400000" algn="bl" rotWithShape="0">
               <a:srgbClr val="94A3B8">
                 <a:alpha val="16000"/>
               </a:srgbClr>
             </a:outerShdw>
           </a:effectLst>
         </p:spPr>
+        <p:txBody>
+          <a:bodyPr/>
+          <a:lstStyle/>
+          <a:p>
+            <a:endParaRPr lang="th-TH"/>
+          </a:p>
+        </p:txBody>
       </p:sp>
       <p:sp>
         <p:nvSpPr>
@@ -18842,6 +19212,13 @@
           </a:solidFill>
           <a:ln/>
         </p:spPr>
+        <p:txBody>
+          <a:bodyPr/>
+          <a:lstStyle/>
+          <a:p>
+            <a:endParaRPr lang="th-TH"/>
+          </a:p>
+        </p:txBody>
       </p:sp>
       <p:sp>
         <p:nvSpPr>
@@ -18864,7 +19241,7 @@
           <a:bodyPr wrap="square" rtlCol="0" anchor="ctr"/>
           <a:lstStyle/>
           <a:p>
-            <a:pPr indent="0" marL="0">
+            <a:pPr marL="0" indent="0">
               <a:buNone/>
             </a:pPr>
             <a:r>
@@ -18978,13 +19355,20 @@
             <a:prstDash val="solid"/>
           </a:ln>
           <a:effectLst>
-            <a:outerShdw sx="100000" sy="100000" kx="0" ky="0" algn="bl" rotWithShape="0" blurRad="76200" dist="12700" dir="5400000">
+            <a:outerShdw blurRad="76200" dist="12700" dir="5400000" algn="bl" rotWithShape="0">
               <a:srgbClr val="94A3B8">
                 <a:alpha val="16000"/>
               </a:srgbClr>
             </a:outerShdw>
           </a:effectLst>
         </p:spPr>
+        <p:txBody>
+          <a:bodyPr/>
+          <a:lstStyle/>
+          <a:p>
+            <a:endParaRPr lang="th-TH"/>
+          </a:p>
+        </p:txBody>
       </p:sp>
       <p:sp>
         <p:nvSpPr>
@@ -19005,6 +19389,13 @@
           </a:solidFill>
           <a:ln/>
         </p:spPr>
+        <p:txBody>
+          <a:bodyPr/>
+          <a:lstStyle/>
+          <a:p>
+            <a:endParaRPr lang="th-TH"/>
+          </a:p>
+        </p:txBody>
       </p:sp>
       <p:sp>
         <p:nvSpPr>
@@ -19027,7 +19418,7 @@
           <a:bodyPr wrap="square" rtlCol="0" anchor="ctr"/>
           <a:lstStyle/>
           <a:p>
-            <a:pPr indent="0" marL="0">
+            <a:pPr marL="0" indent="0">
               <a:buNone/>
             </a:pPr>
             <a:r>
@@ -19440,4 +19831,319 @@
     </a:ext>
   </a:extLst>
 </a:theme>
+</file>
+
+<file path=ppt/theme/theme2.xml><?xml version="1.0" encoding="utf-8"?>
+<a:theme xmlns:a="http://schemas.openxmlformats.org/drawingml/2006/main" name="ธีมของ Office">
+  <a:themeElements>
+    <a:clrScheme name="Office">
+      <a:dk1>
+        <a:sysClr val="windowText" lastClr="000000"/>
+      </a:dk1>
+      <a:lt1>
+        <a:sysClr val="window" lastClr="FFFFFF"/>
+      </a:lt1>
+      <a:dk2>
+        <a:srgbClr val="0E2841"/>
+      </a:dk2>
+      <a:lt2>
+        <a:srgbClr val="E8E8E8"/>
+      </a:lt2>
+      <a:accent1>
+        <a:srgbClr val="156082"/>
+      </a:accent1>
+      <a:accent2>
+        <a:srgbClr val="E97132"/>
+      </a:accent2>
+      <a:accent3>
+        <a:srgbClr val="196B24"/>
+      </a:accent3>
+      <a:accent4>
+        <a:srgbClr val="0F9ED5"/>
+      </a:accent4>
+      <a:accent5>
+        <a:srgbClr val="A02B93"/>
+      </a:accent5>
+      <a:accent6>
+        <a:srgbClr val="4EA72E"/>
+      </a:accent6>
+      <a:hlink>
+        <a:srgbClr val="467886"/>
+      </a:hlink>
+      <a:folHlink>
+        <a:srgbClr val="96607D"/>
+      </a:folHlink>
+    </a:clrScheme>
+    <a:fontScheme name="Office">
+      <a:majorFont>
+        <a:latin typeface="Aptos Display" panose="02110004020202020204"/>
+        <a:ea typeface=""/>
+        <a:cs typeface=""/>
+        <a:font script="Jpan" typeface="游ゴシック Light"/>
+        <a:font script="Hang" typeface="맑은 고딕"/>
+        <a:font script="Hans" typeface="等线 Light"/>
+        <a:font script="Hant" typeface="新細明體"/>
+        <a:font script="Arab" typeface="Times New Roman"/>
+        <a:font script="Hebr" typeface="Times New Roman"/>
+        <a:font script="Thai" typeface="Angsana New"/>
+        <a:font script="Ethi" typeface="Nyala"/>
+        <a:font script="Beng" typeface="Vrinda"/>
+        <a:font script="Gujr" typeface="Shruti"/>
+        <a:font script="Khmr" typeface="MoolBoran"/>
+        <a:font script="Knda" typeface="Tunga"/>
+        <a:font script="Guru" typeface="Raavi"/>
+        <a:font script="Cans" typeface="Euphemia"/>
+        <a:font script="Cher" typeface="Plantagenet Cherokee"/>
+        <a:font script="Yiii" typeface="Microsoft Yi Baiti"/>
+        <a:font script="Tibt" typeface="Microsoft Himalaya"/>
+        <a:font script="Thaa" typeface="MV Boli"/>
+        <a:font script="Deva" typeface="Mangal"/>
+        <a:font script="Telu" typeface="Gautami"/>
+        <a:font script="Taml" typeface="Latha"/>
+        <a:font script="Syrc" typeface="Estrangelo Edessa"/>
+        <a:font script="Orya" typeface="Kalinga"/>
+        <a:font script="Mlym" typeface="Kartika"/>
+        <a:font script="Laoo" typeface="DokChampa"/>
+        <a:font script="Sinh" typeface="Iskoola Pota"/>
+        <a:font script="Mong" typeface="Mongolian Baiti"/>
+        <a:font script="Viet" typeface="Times New Roman"/>
+        <a:font script="Uigh" typeface="Microsoft Uighur"/>
+        <a:font script="Geor" typeface="Sylfaen"/>
+        <a:font script="Armn" typeface="Arial"/>
+        <a:font script="Bugi" typeface="Leelawadee UI"/>
+        <a:font script="Bopo" typeface="Microsoft JhengHei"/>
+        <a:font script="Java" typeface="Javanese Text"/>
+        <a:font script="Lisu" typeface="Segoe UI"/>
+        <a:font script="Mymr" typeface="Myanmar Text"/>
+        <a:font script="Nkoo" typeface="Ebrima"/>
+        <a:font script="Olck" typeface="Nirmala UI"/>
+        <a:font script="Osma" typeface="Ebrima"/>
+        <a:font script="Phag" typeface="Phagspa"/>
+        <a:font script="Syrn" typeface="Estrangelo Edessa"/>
+        <a:font script="Syrj" typeface="Estrangelo Edessa"/>
+        <a:font script="Syre" typeface="Estrangelo Edessa"/>
+        <a:font script="Sora" typeface="Nirmala UI"/>
+        <a:font script="Tale" typeface="Microsoft Tai Le"/>
+        <a:font script="Talu" typeface="Microsoft New Tai Lue"/>
+        <a:font script="Tfng" typeface="Ebrima"/>
+      </a:majorFont>
+      <a:minorFont>
+        <a:latin typeface="Aptos" panose="02110004020202020204"/>
+        <a:ea typeface=""/>
+        <a:cs typeface=""/>
+        <a:font script="Jpan" typeface="游ゴシック"/>
+        <a:font script="Hang" typeface="맑은 고딕"/>
+        <a:font script="Hans" typeface="等线"/>
+        <a:font script="Hant" typeface="新細明體"/>
+        <a:font script="Arab" typeface="Arial"/>
+        <a:font script="Hebr" typeface="Arial"/>
+        <a:font script="Thai" typeface="Cordia New"/>
+        <a:font script="Ethi" typeface="Nyala"/>
+        <a:font script="Beng" typeface="Vrinda"/>
+        <a:font script="Gujr" typeface="Shruti"/>
+        <a:font script="Khmr" typeface="DaunPenh"/>
+        <a:font script="Knda" typeface="Tunga"/>
+        <a:font script="Guru" typeface="Raavi"/>
+        <a:font script="Cans" typeface="Euphemia"/>
+        <a:font script="Cher" typeface="Plantagenet Cherokee"/>
+        <a:font script="Yiii" typeface="Microsoft Yi Baiti"/>
+        <a:font script="Tibt" typeface="Microsoft Himalaya"/>
+        <a:font script="Thaa" typeface="MV Boli"/>
+        <a:font script="Deva" typeface="Mangal"/>
+        <a:font script="Telu" typeface="Gautami"/>
+        <a:font script="Taml" typeface="Latha"/>
+        <a:font script="Syrc" typeface="Estrangelo Edessa"/>
+        <a:font script="Orya" typeface="Kalinga"/>
+        <a:font script="Mlym" typeface="Kartika"/>
+        <a:font script="Laoo" typeface="DokChampa"/>
+        <a:font script="Sinh" typeface="Iskoola Pota"/>
+        <a:font script="Mong" typeface="Mongolian Baiti"/>
+        <a:font script="Viet" typeface="Arial"/>
+        <a:font script="Uigh" typeface="Microsoft Uighur"/>
+        <a:font script="Geor" typeface="Sylfaen"/>
+        <a:font script="Armn" typeface="Arial"/>
+        <a:font script="Bugi" typeface="Leelawadee UI"/>
+        <a:font script="Bopo" typeface="Microsoft JhengHei"/>
+        <a:font script="Java" typeface="Javanese Text"/>
+        <a:font script="Lisu" typeface="Segoe UI"/>
+        <a:font script="Mymr" typeface="Myanmar Text"/>
+        <a:font script="Nkoo" typeface="Ebrima"/>
+        <a:font script="Olck" typeface="Nirmala UI"/>
+        <a:font script="Osma" typeface="Ebrima"/>
+        <a:font script="Phag" typeface="Phagspa"/>
+        <a:font script="Syrn" typeface="Estrangelo Edessa"/>
+        <a:font script="Syrj" typeface="Estrangelo Edessa"/>
+        <a:font script="Syre" typeface="Estrangelo Edessa"/>
+        <a:font script="Sora" typeface="Nirmala UI"/>
+        <a:font script="Tale" typeface="Microsoft Tai Le"/>
+        <a:font script="Talu" typeface="Microsoft New Tai Lue"/>
+        <a:font script="Tfng" typeface="Ebrima"/>
+      </a:minorFont>
+    </a:fontScheme>
+    <a:fmtScheme name="Office">
+      <a:fillStyleLst>
+        <a:solidFill>
+          <a:schemeClr val="phClr"/>
+        </a:solidFill>
+        <a:gradFill rotWithShape="1">
+          <a:gsLst>
+            <a:gs pos="0">
+              <a:schemeClr val="phClr">
+                <a:lumMod val="110000"/>
+                <a:satMod val="105000"/>
+                <a:tint val="67000"/>
+              </a:schemeClr>
+            </a:gs>
+            <a:gs pos="50000">
+              <a:schemeClr val="phClr">
+                <a:lumMod val="105000"/>
+                <a:satMod val="103000"/>
+                <a:tint val="73000"/>
+              </a:schemeClr>
+            </a:gs>
+            <a:gs pos="100000">
+              <a:schemeClr val="phClr">
+                <a:lumMod val="105000"/>
+                <a:satMod val="109000"/>
+                <a:tint val="81000"/>
+              </a:schemeClr>
+            </a:gs>
+          </a:gsLst>
+          <a:lin ang="5400000" scaled="0"/>
+        </a:gradFill>
+        <a:gradFill rotWithShape="1">
+          <a:gsLst>
+            <a:gs pos="0">
+              <a:schemeClr val="phClr">
+                <a:satMod val="103000"/>
+                <a:lumMod val="102000"/>
+                <a:tint val="94000"/>
+              </a:schemeClr>
+            </a:gs>
+            <a:gs pos="50000">
+              <a:schemeClr val="phClr">
+                <a:satMod val="110000"/>
+                <a:lumMod val="100000"/>
+                <a:shade val="100000"/>
+              </a:schemeClr>
+            </a:gs>
+            <a:gs pos="100000">
+              <a:schemeClr val="phClr">
+                <a:lumMod val="99000"/>
+                <a:satMod val="120000"/>
+                <a:shade val="78000"/>
+              </a:schemeClr>
+            </a:gs>
+          </a:gsLst>
+          <a:lin ang="5400000" scaled="0"/>
+        </a:gradFill>
+      </a:fillStyleLst>
+      <a:lnStyleLst>
+        <a:ln w="12700" cap="flat" cmpd="sng" algn="ctr">
+          <a:solidFill>
+            <a:schemeClr val="phClr"/>
+          </a:solidFill>
+          <a:prstDash val="solid"/>
+          <a:miter lim="800000"/>
+        </a:ln>
+        <a:ln w="19050" cap="flat" cmpd="sng" algn="ctr">
+          <a:solidFill>
+            <a:schemeClr val="phClr"/>
+          </a:solidFill>
+          <a:prstDash val="solid"/>
+          <a:miter lim="800000"/>
+        </a:ln>
+        <a:ln w="25400" cap="flat" cmpd="sng" algn="ctr">
+          <a:solidFill>
+            <a:schemeClr val="phClr"/>
+          </a:solidFill>
+          <a:prstDash val="solid"/>
+          <a:miter lim="800000"/>
+        </a:ln>
+      </a:lnStyleLst>
+      <a:effectStyleLst>
+        <a:effectStyle>
+          <a:effectLst/>
+        </a:effectStyle>
+        <a:effectStyle>
+          <a:effectLst/>
+        </a:effectStyle>
+        <a:effectStyle>
+          <a:effectLst>
+            <a:outerShdw blurRad="57150" dist="19050" dir="5400000" algn="ctr" rotWithShape="0">
+              <a:srgbClr val="000000">
+                <a:alpha val="63000"/>
+              </a:srgbClr>
+            </a:outerShdw>
+          </a:effectLst>
+        </a:effectStyle>
+      </a:effectStyleLst>
+      <a:bgFillStyleLst>
+        <a:solidFill>
+          <a:schemeClr val="phClr"/>
+        </a:solidFill>
+        <a:solidFill>
+          <a:schemeClr val="phClr">
+            <a:tint val="95000"/>
+            <a:satMod val="170000"/>
+          </a:schemeClr>
+        </a:solidFill>
+        <a:gradFill rotWithShape="1">
+          <a:gsLst>
+            <a:gs pos="0">
+              <a:schemeClr val="phClr">
+                <a:tint val="93000"/>
+                <a:satMod val="150000"/>
+                <a:shade val="98000"/>
+                <a:lumMod val="102000"/>
+              </a:schemeClr>
+            </a:gs>
+            <a:gs pos="50000">
+              <a:schemeClr val="phClr">
+                <a:tint val="98000"/>
+                <a:satMod val="130000"/>
+                <a:shade val="90000"/>
+                <a:lumMod val="103000"/>
+              </a:schemeClr>
+            </a:gs>
+            <a:gs pos="100000">
+              <a:schemeClr val="phClr">
+                <a:shade val="63000"/>
+                <a:satMod val="120000"/>
+              </a:schemeClr>
+            </a:gs>
+          </a:gsLst>
+          <a:lin ang="5400000" scaled="0"/>
+        </a:gradFill>
+      </a:bgFillStyleLst>
+    </a:fmtScheme>
+  </a:themeElements>
+  <a:objectDefaults>
+    <a:lnDef>
+      <a:spPr/>
+      <a:bodyPr/>
+      <a:lstStyle/>
+      <a:style>
+        <a:lnRef idx="2">
+          <a:schemeClr val="accent1"/>
+        </a:lnRef>
+        <a:fillRef idx="0">
+          <a:schemeClr val="accent1"/>
+        </a:fillRef>
+        <a:effectRef idx="1">
+          <a:schemeClr val="accent1"/>
+        </a:effectRef>
+        <a:fontRef idx="minor">
+          <a:schemeClr val="tx1"/>
+        </a:fontRef>
+      </a:style>
+    </a:lnDef>
+  </a:objectDefaults>
+  <a:extraClrSchemeLst/>
+  <a:extLst>
+    <a:ext uri="{05A4C25C-085E-4340-85A3-A5531E510DB2}">
+      <thm15:themeFamily xmlns:thm15="http://schemas.microsoft.com/office/thememl/2012/main" name="Office Theme" id="{2E142A2C-CD16-42D6-873A-C26D2A0506FA}" vid="{1BDDFF52-6CD6-40A5-AB3C-68EB2F1E4D0A}"/>
+    </a:ext>
+  </a:extLst>
+</a:theme>
 </file>